--- a/asset/ppt/ch01a_data_structures.pptx
+++ b/asset/ppt/ch01a_data_structures.pptx
@@ -7497,17 +7497,50 @@
       </dgm:t>
     </dgm:pt>
     <dgm:pt modelId="{38B8AEE1-66BA-F544-BA95-3B5BFC6B8EAD}">
-      <dgm:prSet/>
-      <dgm:spPr/>
+      <dgm:prSet custT="1"/>
+      <dgm:spPr>
+        <a:solidFill>
+          <a:prstClr val="white">
+            <a:lumMod val="75000"/>
+          </a:prstClr>
+        </a:solidFill>
+        <a:ln w="19050" cap="flat" cmpd="sng" algn="ctr">
+          <a:solidFill>
+            <a:prstClr val="white">
+              <a:hueOff val="0"/>
+              <a:satOff val="0"/>
+              <a:lumOff val="0"/>
+              <a:alphaOff val="0"/>
+            </a:prstClr>
+          </a:solidFill>
+          <a:prstDash val="solid"/>
+          <a:miter lim="800000"/>
+        </a:ln>
+        <a:effectLst/>
+      </dgm:spPr>
       <dgm:t>
-        <a:bodyPr/>
+        <a:bodyPr spcFirstLastPara="0" vert="horz" wrap="square" lIns="6350" tIns="6350" rIns="6350" bIns="6350" numCol="1" spcCol="1270" anchor="ctr" anchorCtr="0"/>
         <a:lstStyle/>
         <a:p>
           <a:r>
-            <a:rPr lang="en-US" altLang="zh-TW" dirty="0"/>
+            <a:rPr lang="en-US" altLang="zh-TW" sz="1000" kern="1200" dirty="0">
+              <a:solidFill>
+                <a:prstClr val="white"/>
+              </a:solidFill>
+              <a:latin typeface="Arial" panose="020B0604020202020204" pitchFamily="34" charset="0"/>
+              <a:ea typeface="新細明體" panose="02020500000000000000" pitchFamily="18" charset="-120"/>
+              <a:cs typeface="Arial" panose="020B0604020202020204" pitchFamily="34" charset="0"/>
+            </a:rPr>
             <a:t>Deduplication</a:t>
           </a:r>
-          <a:endParaRPr lang="zh-TW" altLang="en-US" dirty="0"/>
+          <a:endParaRPr lang="zh-TW" altLang="en-US" sz="1000" kern="1200" dirty="0">
+            <a:solidFill>
+              <a:prstClr val="white"/>
+            </a:solidFill>
+            <a:latin typeface="Arial" panose="020B0604020202020204" pitchFamily="34" charset="0"/>
+            <a:ea typeface="新細明體" panose="02020500000000000000" pitchFamily="18" charset="-120"/>
+            <a:cs typeface="Arial" panose="020B0604020202020204" pitchFamily="34" charset="0"/>
+          </a:endParaRPr>
         </a:p>
       </dgm:t>
     </dgm:pt>
@@ -8491,7 +8524,15 @@
           <dgm:chPref val="3"/>
         </dgm:presLayoutVars>
       </dgm:prSet>
-      <dgm:spPr/>
+      <dgm:spPr>
+        <a:xfrm>
+          <a:off x="6046345" y="2405080"/>
+          <a:ext cx="845795" cy="422897"/>
+        </a:xfrm>
+        <a:prstGeom prst="rect">
+          <a:avLst/>
+        </a:prstGeom>
+      </dgm:spPr>
     </dgm:pt>
     <dgm:pt modelId="{022E7FD9-2364-EB47-A0D7-BDA6FC31D89E}" type="pres">
       <dgm:prSet presAssocID="{38B8AEE1-66BA-F544-BA95-3B5BFC6B8EAD}" presName="rootConnector" presStyleLbl="node3" presStyleIdx="15" presStyleCnt="24"/>
@@ -9409,24 +9450,60 @@
       <dgm:prSet phldrT="[文字]" custT="1"/>
       <dgm:spPr>
         <a:solidFill>
-          <a:schemeClr val="bg1">
-            <a:lumMod val="75000"/>
-          </a:schemeClr>
+          <a:srgbClr val="156082">
+            <a:hueOff val="0"/>
+            <a:satOff val="0"/>
+            <a:lumOff val="0"/>
+            <a:alphaOff val="0"/>
+          </a:srgbClr>
         </a:solidFill>
+        <a:ln w="19050" cap="flat" cmpd="sng" algn="ctr">
+          <a:solidFill>
+            <a:prstClr val="white">
+              <a:hueOff val="0"/>
+              <a:satOff val="0"/>
+              <a:lumOff val="0"/>
+              <a:alphaOff val="0"/>
+            </a:prstClr>
+          </a:solidFill>
+          <a:prstDash val="solid"/>
+          <a:miter lim="800000"/>
+        </a:ln>
+        <a:effectLst/>
       </dgm:spPr>
       <dgm:t>
-        <a:bodyPr/>
+        <a:bodyPr spcFirstLastPara="0" vert="horz" wrap="square" lIns="7620" tIns="7620" rIns="7620" bIns="7620" numCol="1" spcCol="1270" anchor="ctr" anchorCtr="0"/>
         <a:lstStyle/>
         <a:p>
+          <a:pPr marL="0" lvl="0" indent="0" algn="ctr" defTabSz="533400">
+            <a:lnSpc>
+              <a:spcPct val="90000"/>
+            </a:lnSpc>
+            <a:spcBef>
+              <a:spcPct val="0"/>
+            </a:spcBef>
+            <a:spcAft>
+              <a:spcPct val="35000"/>
+            </a:spcAft>
+            <a:buNone/>
+          </a:pPr>
           <a:r>
-            <a:rPr lang="en-US" sz="1200" b="0" dirty="0">
+            <a:rPr lang="en-US" sz="1200" b="0" kern="1200" dirty="0">
+              <a:solidFill>
+                <a:prstClr val="white"/>
+              </a:solidFill>
               <a:latin typeface="Arial" panose="020B0604020202020204" pitchFamily="34" charset="0"/>
+              <a:ea typeface="+mn-ea"/>
               <a:cs typeface="Arial" panose="020B0604020202020204" pitchFamily="34" charset="0"/>
             </a:rPr>
             <a:t>Greedy Algorithms</a:t>
           </a:r>
-          <a:endParaRPr lang="zh-TW" altLang="en-US" sz="1200" b="0" dirty="0">
+          <a:endParaRPr lang="zh-TW" altLang="en-US" sz="1200" b="0" kern="1200" dirty="0">
+            <a:solidFill>
+              <a:prstClr val="white"/>
+            </a:solidFill>
             <a:latin typeface="Arial" panose="020B0604020202020204" pitchFamily="34" charset="0"/>
+            <a:ea typeface="+mn-ea"/>
             <a:cs typeface="Arial" panose="020B0604020202020204" pitchFamily="34" charset="0"/>
           </a:endParaRPr>
         </a:p>
@@ -9549,61 +9626,6 @@
       </dgm:t>
     </dgm:pt>
     <dgm:pt modelId="{EC7909EF-E8EE-C64B-90CC-EBA3F4F8FB7C}" type="sibTrans" cxnId="{2558F45E-976E-014F-87B4-8C1A43FEE39F}">
-      <dgm:prSet/>
-      <dgm:spPr/>
-      <dgm:t>
-        <a:bodyPr/>
-        <a:lstStyle/>
-        <a:p>
-          <a:endParaRPr lang="zh-TW" altLang="en-US" sz="1200">
-            <a:latin typeface="Arial" panose="020B0604020202020204" pitchFamily="34" charset="0"/>
-            <a:cs typeface="Arial" panose="020B0604020202020204" pitchFamily="34" charset="0"/>
-          </a:endParaRPr>
-        </a:p>
-      </dgm:t>
-    </dgm:pt>
-    <dgm:pt modelId="{583E99C7-946B-EE42-AE39-11379FBA8E65}">
-      <dgm:prSet custT="1"/>
-      <dgm:spPr>
-        <a:solidFill>
-          <a:schemeClr val="bg1">
-            <a:lumMod val="75000"/>
-          </a:schemeClr>
-        </a:solidFill>
-      </dgm:spPr>
-      <dgm:t>
-        <a:bodyPr/>
-        <a:lstStyle/>
-        <a:p>
-          <a:pPr>
-            <a:buFont typeface="Arial" panose="020B0604020202020204" pitchFamily="34" charset="0"/>
-            <a:buChar char="•"/>
-          </a:pPr>
-          <a:r>
-            <a:rPr lang="en-US" sz="1200" dirty="0">
-              <a:latin typeface="Arial" panose="020B0604020202020204" pitchFamily="34" charset="0"/>
-              <a:cs typeface="Arial" panose="020B0604020202020204" pitchFamily="34" charset="0"/>
-            </a:rPr>
-            <a:t>Naive string matching</a:t>
-          </a:r>
-        </a:p>
-      </dgm:t>
-    </dgm:pt>
-    <dgm:pt modelId="{94B55DD1-1CE9-9044-A8ED-288842793FCA}" type="parTrans" cxnId="{4C9DA413-E6A3-A649-A41A-0CCDB71CA700}">
-      <dgm:prSet/>
-      <dgm:spPr/>
-      <dgm:t>
-        <a:bodyPr/>
-        <a:lstStyle/>
-        <a:p>
-          <a:endParaRPr lang="zh-TW" altLang="en-US" sz="1200">
-            <a:latin typeface="Arial" panose="020B0604020202020204" pitchFamily="34" charset="0"/>
-            <a:cs typeface="Arial" panose="020B0604020202020204" pitchFamily="34" charset="0"/>
-          </a:endParaRPr>
-        </a:p>
-      </dgm:t>
-    </dgm:pt>
-    <dgm:pt modelId="{AC6AA048-0CF0-F946-B7EC-37782FA9FBFF}" type="sibTrans" cxnId="{4C9DA413-E6A3-A649-A41A-0CCDB71CA700}">
       <dgm:prSet/>
       <dgm:spPr/>
       <dgm:t>
@@ -9678,24 +9700,60 @@
     </dgm:pt>
     <dgm:pt modelId="{70835A8D-3044-414D-B196-A92445686440}">
       <dgm:prSet custT="1"/>
-      <dgm:spPr/>
+      <dgm:spPr>
+        <a:solidFill>
+          <a:prstClr val="white">
+            <a:lumMod val="75000"/>
+          </a:prstClr>
+        </a:solidFill>
+        <a:ln w="19050" cap="flat" cmpd="sng" algn="ctr">
+          <a:solidFill>
+            <a:prstClr val="white">
+              <a:hueOff val="0"/>
+              <a:satOff val="0"/>
+              <a:lumOff val="0"/>
+              <a:alphaOff val="0"/>
+            </a:prstClr>
+          </a:solidFill>
+          <a:prstDash val="solid"/>
+          <a:miter lim="800000"/>
+        </a:ln>
+        <a:effectLst/>
+      </dgm:spPr>
       <dgm:t>
-        <a:bodyPr/>
+        <a:bodyPr spcFirstLastPara="0" vert="horz" wrap="square" lIns="7620" tIns="7620" rIns="7620" bIns="7620" numCol="1" spcCol="1270" anchor="ctr" anchorCtr="0"/>
         <a:lstStyle/>
         <a:p>
-          <a:pPr>
+          <a:pPr marL="0" lvl="0" indent="0" algn="ctr" defTabSz="533400">
+            <a:lnSpc>
+              <a:spcPct val="90000"/>
+            </a:lnSpc>
+            <a:spcBef>
+              <a:spcPct val="0"/>
+            </a:spcBef>
+            <a:spcAft>
+              <a:spcPct val="35000"/>
+            </a:spcAft>
             <a:buFont typeface="Arial" panose="020B0604020202020204" pitchFamily="34" charset="0"/>
-            <a:buChar char="•"/>
+            <a:buNone/>
           </a:pPr>
           <a:r>
-            <a:rPr lang="en-US" altLang="zh-TW" sz="1200" dirty="0">
+            <a:rPr lang="en-US" altLang="zh-TW" sz="1200" kern="1200" dirty="0">
+              <a:solidFill>
+                <a:prstClr val="white"/>
+              </a:solidFill>
               <a:latin typeface="Arial" panose="020B0604020202020204" pitchFamily="34" charset="0"/>
+              <a:ea typeface="+mn-ea"/>
               <a:cs typeface="Arial" panose="020B0604020202020204" pitchFamily="34" charset="0"/>
             </a:rPr>
             <a:t>Subset</a:t>
           </a:r>
-          <a:endParaRPr lang="zh-TW" altLang="en-US" sz="1200" dirty="0">
+          <a:endParaRPr lang="zh-TW" altLang="en-US" sz="1200" kern="1200" dirty="0">
+            <a:solidFill>
+              <a:prstClr val="white"/>
+            </a:solidFill>
             <a:latin typeface="Arial" panose="020B0604020202020204" pitchFamily="34" charset="0"/>
+            <a:ea typeface="+mn-ea"/>
             <a:cs typeface="Arial" panose="020B0604020202020204" pitchFamily="34" charset="0"/>
           </a:endParaRPr>
         </a:p>
@@ -9890,13 +9948,29 @@
       <dgm:prSet phldrT="[文字]" custT="1"/>
       <dgm:spPr>
         <a:solidFill>
-          <a:schemeClr val="bg1">
-            <a:lumMod val="75000"/>
-          </a:schemeClr>
+          <a:srgbClr val="156082">
+            <a:hueOff val="0"/>
+            <a:satOff val="0"/>
+            <a:lumOff val="0"/>
+            <a:alphaOff val="0"/>
+          </a:srgbClr>
         </a:solidFill>
+        <a:ln w="19050" cap="flat" cmpd="sng" algn="ctr">
+          <a:solidFill>
+            <a:prstClr val="white">
+              <a:hueOff val="0"/>
+              <a:satOff val="0"/>
+              <a:lumOff val="0"/>
+              <a:alphaOff val="0"/>
+            </a:prstClr>
+          </a:solidFill>
+          <a:prstDash val="solid"/>
+          <a:miter lim="800000"/>
+        </a:ln>
+        <a:effectLst/>
       </dgm:spPr>
       <dgm:t>
-        <a:bodyPr/>
+        <a:bodyPr spcFirstLastPara="0" vert="horz" wrap="square" lIns="7620" tIns="7620" rIns="7620" bIns="7620" numCol="1" spcCol="1270" anchor="ctr" anchorCtr="0"/>
         <a:lstStyle/>
         <a:p>
           <a:pPr>
@@ -9904,13 +9978,24 @@
             <a:buChar char="•"/>
           </a:pPr>
           <a:r>
-            <a:rPr lang="en-US" sz="1200" dirty="0">
+            <a:rPr lang="en-US" sz="1200" kern="1200" dirty="0">
+              <a:solidFill>
+                <a:prstClr val="white"/>
+              </a:solidFill>
+              <a:latin typeface="Arial" panose="020B0604020202020204" pitchFamily="34" charset="0"/>
+              <a:ea typeface="+mn-ea"/>
+              <a:cs typeface="Arial" panose="020B0604020202020204" pitchFamily="34" charset="0"/>
+            </a:rPr>
+            <a:t>Huffman</a:t>
+          </a:r>
+          <a:r>
+            <a:rPr lang="en-US" sz="1200" kern="1200" dirty="0">
               <a:latin typeface="Arial" panose="020B0604020202020204" pitchFamily="34" charset="0"/>
               <a:cs typeface="Arial" panose="020B0604020202020204" pitchFamily="34" charset="0"/>
             </a:rPr>
-            <a:t>Activity Selection</a:t>
+            <a:t> Coding</a:t>
           </a:r>
-          <a:endParaRPr lang="zh-TW" altLang="en-US" sz="1200" b="0" dirty="0">
+          <a:endParaRPr lang="zh-TW" altLang="en-US" sz="1200" b="0" kern="1200" dirty="0">
             <a:latin typeface="Arial" panose="020B0604020202020204" pitchFamily="34" charset="0"/>
             <a:cs typeface="Arial" panose="020B0604020202020204" pitchFamily="34" charset="0"/>
           </a:endParaRPr>
@@ -9949,13 +10034,29 @@
       <dgm:prSet custT="1"/>
       <dgm:spPr>
         <a:solidFill>
-          <a:schemeClr val="bg1">
-            <a:lumMod val="75000"/>
-          </a:schemeClr>
+          <a:srgbClr val="156082">
+            <a:hueOff val="0"/>
+            <a:satOff val="0"/>
+            <a:lumOff val="0"/>
+            <a:alphaOff val="0"/>
+          </a:srgbClr>
         </a:solidFill>
+        <a:ln w="19050" cap="flat" cmpd="sng" algn="ctr">
+          <a:solidFill>
+            <a:prstClr val="white">
+              <a:hueOff val="0"/>
+              <a:satOff val="0"/>
+              <a:lumOff val="0"/>
+              <a:alphaOff val="0"/>
+            </a:prstClr>
+          </a:solidFill>
+          <a:prstDash val="solid"/>
+          <a:miter lim="800000"/>
+        </a:ln>
+        <a:effectLst/>
       </dgm:spPr>
       <dgm:t>
-        <a:bodyPr/>
+        <a:bodyPr spcFirstLastPara="0" vert="horz" wrap="square" lIns="7620" tIns="7620" rIns="7620" bIns="7620" numCol="1" spcCol="1270" anchor="ctr" anchorCtr="0"/>
         <a:lstStyle/>
         <a:p>
           <a:pPr>
@@ -9963,11 +10064,29 @@
             <a:buChar char="•"/>
           </a:pPr>
           <a:r>
-            <a:rPr lang="en-US" sz="1200" dirty="0">
+            <a:rPr lang="en-US" sz="1200" kern="1200" dirty="0">
               <a:latin typeface="Arial" panose="020B0604020202020204" pitchFamily="34" charset="0"/>
               <a:cs typeface="Arial" panose="020B0604020202020204" pitchFamily="34" charset="0"/>
             </a:rPr>
-            <a:t>Interval Scheduling</a:t>
+            <a:t>Minimum </a:t>
+          </a:r>
+          <a:r>
+            <a:rPr lang="en-US" sz="1200" kern="1200" dirty="0">
+              <a:solidFill>
+                <a:prstClr val="white"/>
+              </a:solidFill>
+              <a:latin typeface="Arial" panose="020B0604020202020204" pitchFamily="34" charset="0"/>
+              <a:ea typeface="+mn-ea"/>
+              <a:cs typeface="Arial" panose="020B0604020202020204" pitchFamily="34" charset="0"/>
+            </a:rPr>
+            <a:t>Spanning</a:t>
+          </a:r>
+          <a:r>
+            <a:rPr lang="en-US" sz="1200" kern="1200" dirty="0">
+              <a:latin typeface="Arial" panose="020B0604020202020204" pitchFamily="34" charset="0"/>
+              <a:cs typeface="Arial" panose="020B0604020202020204" pitchFamily="34" charset="0"/>
+            </a:rPr>
+            <a:t> Tree</a:t>
           </a:r>
         </a:p>
       </dgm:t>
@@ -10013,16 +10132,12 @@
         <a:bodyPr/>
         <a:lstStyle/>
         <a:p>
-          <a:pPr>
-            <a:buFont typeface="Arial" panose="020B0604020202020204" pitchFamily="34" charset="0"/>
-            <a:buChar char="•"/>
-          </a:pPr>
           <a:r>
             <a:rPr lang="en-US" sz="1200" dirty="0">
               <a:latin typeface="Arial" panose="020B0604020202020204" pitchFamily="34" charset="0"/>
               <a:cs typeface="Arial" panose="020B0604020202020204" pitchFamily="34" charset="0"/>
             </a:rPr>
-            <a:t>Huffman Coding</a:t>
+            <a:t>Activity Selection</a:t>
           </a:r>
         </a:p>
       </dgm:t>
@@ -10042,61 +10157,6 @@
       </dgm:t>
     </dgm:pt>
     <dgm:pt modelId="{179F05F7-A08C-2349-A95D-6DE3B735271F}" type="sibTrans" cxnId="{265EB2A6-111E-9249-8C46-7DE9D8C9184B}">
-      <dgm:prSet/>
-      <dgm:spPr/>
-      <dgm:t>
-        <a:bodyPr/>
-        <a:lstStyle/>
-        <a:p>
-          <a:endParaRPr lang="zh-TW" altLang="en-US" sz="1200">
-            <a:latin typeface="Arial" panose="020B0604020202020204" pitchFamily="34" charset="0"/>
-            <a:cs typeface="Arial" panose="020B0604020202020204" pitchFamily="34" charset="0"/>
-          </a:endParaRPr>
-        </a:p>
-      </dgm:t>
-    </dgm:pt>
-    <dgm:pt modelId="{EFCC6E3E-881F-4C44-8121-71DEAE61C0BB}">
-      <dgm:prSet custT="1"/>
-      <dgm:spPr>
-        <a:solidFill>
-          <a:schemeClr val="bg1">
-            <a:lumMod val="75000"/>
-          </a:schemeClr>
-        </a:solidFill>
-      </dgm:spPr>
-      <dgm:t>
-        <a:bodyPr/>
-        <a:lstStyle/>
-        <a:p>
-          <a:pPr>
-            <a:buFont typeface="Arial" panose="020B0604020202020204" pitchFamily="34" charset="0"/>
-            <a:buChar char="•"/>
-          </a:pPr>
-          <a:r>
-            <a:rPr lang="en-US" sz="1200" dirty="0">
-              <a:latin typeface="Arial" panose="020B0604020202020204" pitchFamily="34" charset="0"/>
-              <a:cs typeface="Arial" panose="020B0604020202020204" pitchFamily="34" charset="0"/>
-            </a:rPr>
-            <a:t>Minimum Spanning Tree</a:t>
-          </a:r>
-        </a:p>
-      </dgm:t>
-    </dgm:pt>
-    <dgm:pt modelId="{5602BEBE-7968-F84B-B194-03D4C8122D84}" type="parTrans" cxnId="{D7478DA8-1CBA-1C4B-9F9D-AFD8CF9ACC00}">
-      <dgm:prSet/>
-      <dgm:spPr/>
-      <dgm:t>
-        <a:bodyPr/>
-        <a:lstStyle/>
-        <a:p>
-          <a:endParaRPr lang="zh-TW" altLang="en-US" sz="1200">
-            <a:latin typeface="Arial" panose="020B0604020202020204" pitchFamily="34" charset="0"/>
-            <a:cs typeface="Arial" panose="020B0604020202020204" pitchFamily="34" charset="0"/>
-          </a:endParaRPr>
-        </a:p>
-      </dgm:t>
-    </dgm:pt>
-    <dgm:pt modelId="{3C329676-A86D-834B-8145-31389A380D91}" type="sibTrans" cxnId="{D7478DA8-1CBA-1C4B-9F9D-AFD8CF9ACC00}">
       <dgm:prSet/>
       <dgm:spPr/>
       <dgm:t>
@@ -10341,7 +10401,7 @@
       <dgm:spPr/>
     </dgm:pt>
     <dgm:pt modelId="{5D90D505-34BA-F345-9D64-69C4C5CF194C}" type="pres">
-      <dgm:prSet presAssocID="{03061AB2-7F42-A847-9D1C-6178F97CBFEC}" presName="Name37" presStyleLbl="parChTrans1D3" presStyleIdx="0" presStyleCnt="14"/>
+      <dgm:prSet presAssocID="{03061AB2-7F42-A847-9D1C-6178F97CBFEC}" presName="Name37" presStyleLbl="parChTrans1D3" presStyleIdx="0" presStyleCnt="12"/>
       <dgm:spPr/>
     </dgm:pt>
     <dgm:pt modelId="{3C003E65-03B1-E24C-A8E3-BEB72C02D3EA}" type="pres">
@@ -10357,7 +10417,7 @@
       <dgm:spPr/>
     </dgm:pt>
     <dgm:pt modelId="{6AFC0196-01F6-0240-99F1-2361465AF458}" type="pres">
-      <dgm:prSet presAssocID="{8914EC3B-4275-B441-ADD2-D7B06D735F07}" presName="rootText" presStyleLbl="node3" presStyleIdx="0" presStyleCnt="14">
+      <dgm:prSet presAssocID="{8914EC3B-4275-B441-ADD2-D7B06D735F07}" presName="rootText" presStyleLbl="node3" presStyleIdx="0" presStyleCnt="12">
         <dgm:presLayoutVars>
           <dgm:chPref val="3"/>
         </dgm:presLayoutVars>
@@ -10365,7 +10425,7 @@
       <dgm:spPr/>
     </dgm:pt>
     <dgm:pt modelId="{8F313E30-D575-0F44-90CD-741C1315A02C}" type="pres">
-      <dgm:prSet presAssocID="{8914EC3B-4275-B441-ADD2-D7B06D735F07}" presName="rootConnector" presStyleLbl="node3" presStyleIdx="0" presStyleCnt="14"/>
+      <dgm:prSet presAssocID="{8914EC3B-4275-B441-ADD2-D7B06D735F07}" presName="rootConnector" presStyleLbl="node3" presStyleIdx="0" presStyleCnt="12"/>
       <dgm:spPr/>
     </dgm:pt>
     <dgm:pt modelId="{F34B8FBD-FAB9-084A-A433-1FF1ED59CD3A}" type="pres">
@@ -10377,7 +10437,7 @@
       <dgm:spPr/>
     </dgm:pt>
     <dgm:pt modelId="{44D91E12-C830-5042-95BD-DE100E863AEC}" type="pres">
-      <dgm:prSet presAssocID="{D426C5D3-A43D-1B4D-9044-1B11E4CDF164}" presName="Name37" presStyleLbl="parChTrans1D3" presStyleIdx="1" presStyleCnt="14"/>
+      <dgm:prSet presAssocID="{D426C5D3-A43D-1B4D-9044-1B11E4CDF164}" presName="Name37" presStyleLbl="parChTrans1D3" presStyleIdx="1" presStyleCnt="12"/>
       <dgm:spPr/>
     </dgm:pt>
     <dgm:pt modelId="{7FCED045-48CA-1744-8DAE-7285446C89E5}" type="pres">
@@ -10393,15 +10453,23 @@
       <dgm:spPr/>
     </dgm:pt>
     <dgm:pt modelId="{9BD1E258-8689-464A-A587-4EB3F5827A63}" type="pres">
-      <dgm:prSet presAssocID="{70835A8D-3044-414D-B196-A92445686440}" presName="rootText" presStyleLbl="node3" presStyleIdx="1" presStyleCnt="14">
+      <dgm:prSet presAssocID="{70835A8D-3044-414D-B196-A92445686440}" presName="rootText" presStyleLbl="node3" presStyleIdx="1" presStyleCnt="12">
         <dgm:presLayoutVars>
           <dgm:chPref val="3"/>
         </dgm:presLayoutVars>
       </dgm:prSet>
-      <dgm:spPr/>
+      <dgm:spPr>
+        <a:xfrm>
+          <a:off x="1872086" y="2288397"/>
+          <a:ext cx="1073608" cy="536804"/>
+        </a:xfrm>
+        <a:prstGeom prst="rect">
+          <a:avLst/>
+        </a:prstGeom>
+      </dgm:spPr>
     </dgm:pt>
     <dgm:pt modelId="{2DEFAA7D-5F4C-4B4A-852C-591FF258C4BC}" type="pres">
-      <dgm:prSet presAssocID="{70835A8D-3044-414D-B196-A92445686440}" presName="rootConnector" presStyleLbl="node3" presStyleIdx="1" presStyleCnt="14"/>
+      <dgm:prSet presAssocID="{70835A8D-3044-414D-B196-A92445686440}" presName="rootConnector" presStyleLbl="node3" presStyleIdx="1" presStyleCnt="12"/>
       <dgm:spPr/>
     </dgm:pt>
     <dgm:pt modelId="{243B5B82-3A3F-7E42-92BE-179FF9327CC0}" type="pres">
@@ -10412,44 +10480,8 @@
       <dgm:prSet presAssocID="{70835A8D-3044-414D-B196-A92445686440}" presName="hierChild5" presStyleCnt="0"/>
       <dgm:spPr/>
     </dgm:pt>
-    <dgm:pt modelId="{5F428E68-6D3A-5748-9985-4CB72225EF95}" type="pres">
-      <dgm:prSet presAssocID="{94B55DD1-1CE9-9044-A8ED-288842793FCA}" presName="Name37" presStyleLbl="parChTrans1D3" presStyleIdx="2" presStyleCnt="14"/>
-      <dgm:spPr/>
-    </dgm:pt>
-    <dgm:pt modelId="{ECD20306-7E01-D147-A785-5B1883103868}" type="pres">
-      <dgm:prSet presAssocID="{583E99C7-946B-EE42-AE39-11379FBA8E65}" presName="hierRoot2" presStyleCnt="0">
-        <dgm:presLayoutVars>
-          <dgm:hierBranch val="init"/>
-        </dgm:presLayoutVars>
-      </dgm:prSet>
-      <dgm:spPr/>
-    </dgm:pt>
-    <dgm:pt modelId="{EB64934C-ED0E-D440-AE99-6A319E8E5761}" type="pres">
-      <dgm:prSet presAssocID="{583E99C7-946B-EE42-AE39-11379FBA8E65}" presName="rootComposite" presStyleCnt="0"/>
-      <dgm:spPr/>
-    </dgm:pt>
-    <dgm:pt modelId="{B985F0D8-2D18-A443-9D85-FB596BA7D682}" type="pres">
-      <dgm:prSet presAssocID="{583E99C7-946B-EE42-AE39-11379FBA8E65}" presName="rootText" presStyleLbl="node3" presStyleIdx="2" presStyleCnt="14">
-        <dgm:presLayoutVars>
-          <dgm:chPref val="3"/>
-        </dgm:presLayoutVars>
-      </dgm:prSet>
-      <dgm:spPr/>
-    </dgm:pt>
-    <dgm:pt modelId="{A46BB13F-E69A-014E-B900-FCA1999979D3}" type="pres">
-      <dgm:prSet presAssocID="{583E99C7-946B-EE42-AE39-11379FBA8E65}" presName="rootConnector" presStyleLbl="node3" presStyleIdx="2" presStyleCnt="14"/>
-      <dgm:spPr/>
-    </dgm:pt>
-    <dgm:pt modelId="{A6C50259-5036-674A-B577-24AC199ECDE1}" type="pres">
-      <dgm:prSet presAssocID="{583E99C7-946B-EE42-AE39-11379FBA8E65}" presName="hierChild4" presStyleCnt="0"/>
-      <dgm:spPr/>
-    </dgm:pt>
-    <dgm:pt modelId="{092F4CA8-1751-5844-89E4-19E1193E6797}" type="pres">
-      <dgm:prSet presAssocID="{583E99C7-946B-EE42-AE39-11379FBA8E65}" presName="hierChild5" presStyleCnt="0"/>
-      <dgm:spPr/>
-    </dgm:pt>
     <dgm:pt modelId="{F0EC5A6C-12AE-6E44-B761-CF66AE16A88B}" type="pres">
-      <dgm:prSet presAssocID="{64D358D9-825E-8A48-8B72-08A3352E40A5}" presName="Name37" presStyleLbl="parChTrans1D3" presStyleIdx="3" presStyleCnt="14"/>
+      <dgm:prSet presAssocID="{64D358D9-825E-8A48-8B72-08A3352E40A5}" presName="Name37" presStyleLbl="parChTrans1D3" presStyleIdx="2" presStyleCnt="12"/>
       <dgm:spPr/>
     </dgm:pt>
     <dgm:pt modelId="{E35D02FA-5824-8D44-90B4-F890555E7387}" type="pres">
@@ -10465,7 +10497,7 @@
       <dgm:spPr/>
     </dgm:pt>
     <dgm:pt modelId="{5B7F08E5-1124-2143-9E15-06A29F73FB9F}" type="pres">
-      <dgm:prSet presAssocID="{42394E76-EF2A-4143-B166-737AF9634EE2}" presName="rootText" presStyleLbl="node3" presStyleIdx="3" presStyleCnt="14">
+      <dgm:prSet presAssocID="{42394E76-EF2A-4143-B166-737AF9634EE2}" presName="rootText" presStyleLbl="node3" presStyleIdx="2" presStyleCnt="12">
         <dgm:presLayoutVars>
           <dgm:chPref val="3"/>
         </dgm:presLayoutVars>
@@ -10473,7 +10505,7 @@
       <dgm:spPr/>
     </dgm:pt>
     <dgm:pt modelId="{0BE51898-DC41-8F4A-A169-E72F348BC634}" type="pres">
-      <dgm:prSet presAssocID="{42394E76-EF2A-4143-B166-737AF9634EE2}" presName="rootConnector" presStyleLbl="node3" presStyleIdx="3" presStyleCnt="14"/>
+      <dgm:prSet presAssocID="{42394E76-EF2A-4143-B166-737AF9634EE2}" presName="rootConnector" presStyleLbl="node3" presStyleIdx="2" presStyleCnt="12"/>
       <dgm:spPr/>
     </dgm:pt>
     <dgm:pt modelId="{2B32C483-6FF0-F44E-A404-66555F24DA83}" type="pres">
@@ -10521,7 +10553,7 @@
       <dgm:spPr/>
     </dgm:pt>
     <dgm:pt modelId="{98EF5ED1-DAEC-3C47-A9F0-FE1B6B900A99}" type="pres">
-      <dgm:prSet presAssocID="{60F15EA2-3AB4-E040-ADC1-5801CCE9606D}" presName="Name37" presStyleLbl="parChTrans1D3" presStyleIdx="4" presStyleCnt="14"/>
+      <dgm:prSet presAssocID="{60F15EA2-3AB4-E040-ADC1-5801CCE9606D}" presName="Name37" presStyleLbl="parChTrans1D3" presStyleIdx="3" presStyleCnt="12"/>
       <dgm:spPr/>
     </dgm:pt>
     <dgm:pt modelId="{ADABD685-4DEA-2D4E-9F71-0ECBFB75155B}" type="pres">
@@ -10537,7 +10569,7 @@
       <dgm:spPr/>
     </dgm:pt>
     <dgm:pt modelId="{A19848DA-1684-694E-8AB2-37795844922E}" type="pres">
-      <dgm:prSet presAssocID="{FDB830E1-9116-A744-8567-B1CCDE622A6C}" presName="rootText" presStyleLbl="node3" presStyleIdx="4" presStyleCnt="14">
+      <dgm:prSet presAssocID="{FDB830E1-9116-A744-8567-B1CCDE622A6C}" presName="rootText" presStyleLbl="node3" presStyleIdx="3" presStyleCnt="12">
         <dgm:presLayoutVars>
           <dgm:chPref val="3"/>
         </dgm:presLayoutVars>
@@ -10545,7 +10577,7 @@
       <dgm:spPr/>
     </dgm:pt>
     <dgm:pt modelId="{841664F3-105E-A944-8889-EB0FF1050B57}" type="pres">
-      <dgm:prSet presAssocID="{FDB830E1-9116-A744-8567-B1CCDE622A6C}" presName="rootConnector" presStyleLbl="node3" presStyleIdx="4" presStyleCnt="14"/>
+      <dgm:prSet presAssocID="{FDB830E1-9116-A744-8567-B1CCDE622A6C}" presName="rootConnector" presStyleLbl="node3" presStyleIdx="3" presStyleCnt="12"/>
       <dgm:spPr/>
     </dgm:pt>
     <dgm:pt modelId="{3F3A11FB-561D-E849-B441-86092D49FFC2}" type="pres">
@@ -10557,7 +10589,7 @@
       <dgm:spPr/>
     </dgm:pt>
     <dgm:pt modelId="{C387BB6B-C6A7-1140-AB3E-D359B07E2050}" type="pres">
-      <dgm:prSet presAssocID="{B5A8548A-BDE5-1A48-BACF-30D3A7AADA22}" presName="Name37" presStyleLbl="parChTrans1D3" presStyleIdx="5" presStyleCnt="14"/>
+      <dgm:prSet presAssocID="{B5A8548A-BDE5-1A48-BACF-30D3A7AADA22}" presName="Name37" presStyleLbl="parChTrans1D3" presStyleIdx="4" presStyleCnt="12"/>
       <dgm:spPr/>
     </dgm:pt>
     <dgm:pt modelId="{8EAE7639-7542-764B-B37E-31A064C7D70D}" type="pres">
@@ -10573,7 +10605,7 @@
       <dgm:spPr/>
     </dgm:pt>
     <dgm:pt modelId="{06395E12-08EB-C642-A2A2-1B2FCE15A2D0}" type="pres">
-      <dgm:prSet presAssocID="{20E05D4E-98E9-E24C-ABB9-4885743272E0}" presName="rootText" presStyleLbl="node3" presStyleIdx="5" presStyleCnt="14">
+      <dgm:prSet presAssocID="{20E05D4E-98E9-E24C-ABB9-4885743272E0}" presName="rootText" presStyleLbl="node3" presStyleIdx="4" presStyleCnt="12">
         <dgm:presLayoutVars>
           <dgm:chPref val="3"/>
         </dgm:presLayoutVars>
@@ -10581,7 +10613,7 @@
       <dgm:spPr/>
     </dgm:pt>
     <dgm:pt modelId="{95E603AB-EF2D-684E-B0E1-8417DFD08B2F}" type="pres">
-      <dgm:prSet presAssocID="{20E05D4E-98E9-E24C-ABB9-4885743272E0}" presName="rootConnector" presStyleLbl="node3" presStyleIdx="5" presStyleCnt="14"/>
+      <dgm:prSet presAssocID="{20E05D4E-98E9-E24C-ABB9-4885743272E0}" presName="rootConnector" presStyleLbl="node3" presStyleIdx="4" presStyleCnt="12"/>
       <dgm:spPr/>
     </dgm:pt>
     <dgm:pt modelId="{2B74FF78-194B-FE4A-AFAD-DCE0E1D7600E}" type="pres">
@@ -10593,7 +10625,7 @@
       <dgm:spPr/>
     </dgm:pt>
     <dgm:pt modelId="{312D0D41-5CF4-D342-8F48-0FDFFD86B1F0}" type="pres">
-      <dgm:prSet presAssocID="{19753DD7-E254-CE41-9100-5960C71E940D}" presName="Name37" presStyleLbl="parChTrans1D3" presStyleIdx="6" presStyleCnt="14"/>
+      <dgm:prSet presAssocID="{19753DD7-E254-CE41-9100-5960C71E940D}" presName="Name37" presStyleLbl="parChTrans1D3" presStyleIdx="5" presStyleCnt="12"/>
       <dgm:spPr/>
     </dgm:pt>
     <dgm:pt modelId="{946BCB4D-E53E-5744-AA7C-24220DA9A837}" type="pres">
@@ -10609,7 +10641,7 @@
       <dgm:spPr/>
     </dgm:pt>
     <dgm:pt modelId="{10EC097E-C088-3548-A227-78CEAF79AF9A}" type="pres">
-      <dgm:prSet presAssocID="{1A03B561-FF95-3B42-B502-FB51ADC4004F}" presName="rootText" presStyleLbl="node3" presStyleIdx="6" presStyleCnt="14">
+      <dgm:prSet presAssocID="{1A03B561-FF95-3B42-B502-FB51ADC4004F}" presName="rootText" presStyleLbl="node3" presStyleIdx="5" presStyleCnt="12">
         <dgm:presLayoutVars>
           <dgm:chPref val="3"/>
         </dgm:presLayoutVars>
@@ -10617,7 +10649,7 @@
       <dgm:spPr/>
     </dgm:pt>
     <dgm:pt modelId="{A4EBA3CA-7678-1648-9BAE-ECFB5D274C92}" type="pres">
-      <dgm:prSet presAssocID="{1A03B561-FF95-3B42-B502-FB51ADC4004F}" presName="rootConnector" presStyleLbl="node3" presStyleIdx="6" presStyleCnt="14"/>
+      <dgm:prSet presAssocID="{1A03B561-FF95-3B42-B502-FB51ADC4004F}" presName="rootConnector" presStyleLbl="node3" presStyleIdx="5" presStyleCnt="12"/>
       <dgm:spPr/>
     </dgm:pt>
     <dgm:pt modelId="{E82CF4D2-2390-244C-8FFE-E09529A6DD79}" type="pres">
@@ -10665,7 +10697,7 @@
       <dgm:spPr/>
     </dgm:pt>
     <dgm:pt modelId="{97D043BA-F485-3A42-B37A-A45D562BFC64}" type="pres">
-      <dgm:prSet presAssocID="{0C9B8537-19E5-B042-B51E-6C91397E138A}" presName="Name37" presStyleLbl="parChTrans1D3" presStyleIdx="7" presStyleCnt="14"/>
+      <dgm:prSet presAssocID="{0C9B8537-19E5-B042-B51E-6C91397E138A}" presName="Name37" presStyleLbl="parChTrans1D3" presStyleIdx="6" presStyleCnt="12"/>
       <dgm:spPr/>
     </dgm:pt>
     <dgm:pt modelId="{8F6C1744-95A5-E141-B1F0-9353D4C4474B}" type="pres">
@@ -10681,7 +10713,7 @@
       <dgm:spPr/>
     </dgm:pt>
     <dgm:pt modelId="{9CA0242D-AB72-1B40-9E0B-6B6501A6D36F}" type="pres">
-      <dgm:prSet presAssocID="{02F0CF91-8124-EC41-9A25-69CB3C58E489}" presName="rootText" presStyleLbl="node3" presStyleIdx="7" presStyleCnt="14">
+      <dgm:prSet presAssocID="{02F0CF91-8124-EC41-9A25-69CB3C58E489}" presName="rootText" presStyleLbl="node3" presStyleIdx="6" presStyleCnt="12">
         <dgm:presLayoutVars>
           <dgm:chPref val="3"/>
         </dgm:presLayoutVars>
@@ -10689,7 +10721,7 @@
       <dgm:spPr/>
     </dgm:pt>
     <dgm:pt modelId="{E99BD300-EF63-9948-976D-0CF2D7F04A8C}" type="pres">
-      <dgm:prSet presAssocID="{02F0CF91-8124-EC41-9A25-69CB3C58E489}" presName="rootConnector" presStyleLbl="node3" presStyleIdx="7" presStyleCnt="14"/>
+      <dgm:prSet presAssocID="{02F0CF91-8124-EC41-9A25-69CB3C58E489}" presName="rootConnector" presStyleLbl="node3" presStyleIdx="6" presStyleCnt="12"/>
       <dgm:spPr/>
     </dgm:pt>
     <dgm:pt modelId="{6190F32A-C0BE-4F4D-9CB0-204A0F2ADD9B}" type="pres">
@@ -10701,7 +10733,7 @@
       <dgm:spPr/>
     </dgm:pt>
     <dgm:pt modelId="{F0AB9FDC-589E-184C-BBA0-4828E9C7B3F5}" type="pres">
-      <dgm:prSet presAssocID="{B2BEFB14-5935-9C41-B4AF-57AA90A522FA}" presName="Name37" presStyleLbl="parChTrans1D3" presStyleIdx="8" presStyleCnt="14"/>
+      <dgm:prSet presAssocID="{B2BEFB14-5935-9C41-B4AF-57AA90A522FA}" presName="Name37" presStyleLbl="parChTrans1D3" presStyleIdx="7" presStyleCnt="12"/>
       <dgm:spPr/>
     </dgm:pt>
     <dgm:pt modelId="{CABD1A8B-2DF9-EE4D-B78A-926A63C4B229}" type="pres">
@@ -10717,7 +10749,7 @@
       <dgm:spPr/>
     </dgm:pt>
     <dgm:pt modelId="{B5F42C35-0833-CA41-83C3-29A41F7BF946}" type="pres">
-      <dgm:prSet presAssocID="{BE9B5BE9-FB17-3049-A863-F58B20DBB129}" presName="rootText" presStyleLbl="node3" presStyleIdx="8" presStyleCnt="14">
+      <dgm:prSet presAssocID="{BE9B5BE9-FB17-3049-A863-F58B20DBB129}" presName="rootText" presStyleLbl="node3" presStyleIdx="7" presStyleCnt="12">
         <dgm:presLayoutVars>
           <dgm:chPref val="3"/>
         </dgm:presLayoutVars>
@@ -10725,7 +10757,7 @@
       <dgm:spPr/>
     </dgm:pt>
     <dgm:pt modelId="{C989ADDF-38F5-2C47-878B-4B873890C484}" type="pres">
-      <dgm:prSet presAssocID="{BE9B5BE9-FB17-3049-A863-F58B20DBB129}" presName="rootConnector" presStyleLbl="node3" presStyleIdx="8" presStyleCnt="14"/>
+      <dgm:prSet presAssocID="{BE9B5BE9-FB17-3049-A863-F58B20DBB129}" presName="rootConnector" presStyleLbl="node3" presStyleIdx="7" presStyleCnt="12"/>
       <dgm:spPr/>
     </dgm:pt>
     <dgm:pt modelId="{B0A2E8D9-3D22-4E42-A76E-BDA1737BC7F1}" type="pres">
@@ -10737,7 +10769,7 @@
       <dgm:spPr/>
     </dgm:pt>
     <dgm:pt modelId="{D853EF29-5940-0048-BE61-7B42C478CBE1}" type="pres">
-      <dgm:prSet presAssocID="{FE50A543-E971-E349-BDE1-1EE668E773B2}" presName="Name37" presStyleLbl="parChTrans1D3" presStyleIdx="9" presStyleCnt="14"/>
+      <dgm:prSet presAssocID="{FE50A543-E971-E349-BDE1-1EE668E773B2}" presName="Name37" presStyleLbl="parChTrans1D3" presStyleIdx="8" presStyleCnt="12"/>
       <dgm:spPr/>
     </dgm:pt>
     <dgm:pt modelId="{1E95B18E-748B-0F40-A53A-185658C04B0E}" type="pres">
@@ -10753,7 +10785,7 @@
       <dgm:spPr/>
     </dgm:pt>
     <dgm:pt modelId="{5F9D470D-2E93-1A4F-A151-DB3503B42AC1}" type="pres">
-      <dgm:prSet presAssocID="{0C042B71-0923-2547-B23C-7ED585EE23A3}" presName="rootText" presStyleLbl="node3" presStyleIdx="9" presStyleCnt="14">
+      <dgm:prSet presAssocID="{0C042B71-0923-2547-B23C-7ED585EE23A3}" presName="rootText" presStyleLbl="node3" presStyleIdx="8" presStyleCnt="12">
         <dgm:presLayoutVars>
           <dgm:chPref val="3"/>
         </dgm:presLayoutVars>
@@ -10761,7 +10793,7 @@
       <dgm:spPr/>
     </dgm:pt>
     <dgm:pt modelId="{DED0E13F-6011-354E-AAE0-96EE93BD4BCB}" type="pres">
-      <dgm:prSet presAssocID="{0C042B71-0923-2547-B23C-7ED585EE23A3}" presName="rootConnector" presStyleLbl="node3" presStyleIdx="9" presStyleCnt="14"/>
+      <dgm:prSet presAssocID="{0C042B71-0923-2547-B23C-7ED585EE23A3}" presName="rootConnector" presStyleLbl="node3" presStyleIdx="8" presStyleCnt="12"/>
       <dgm:spPr/>
     </dgm:pt>
     <dgm:pt modelId="{4D41ECE1-55F6-6B41-8C87-4DDBC0A9527F}" type="pres">
@@ -10798,7 +10830,15 @@
           <dgm:chPref val="3"/>
         </dgm:presLayoutVars>
       </dgm:prSet>
-      <dgm:spPr/>
+      <dgm:spPr>
+        <a:xfrm>
+          <a:off x="5500881" y="763874"/>
+          <a:ext cx="1073608" cy="536804"/>
+        </a:xfrm>
+        <a:prstGeom prst="rect">
+          <a:avLst/>
+        </a:prstGeom>
+      </dgm:spPr>
     </dgm:pt>
     <dgm:pt modelId="{EE1BADF2-CCB8-6444-AE00-D2E28DEAA876}" type="pres">
       <dgm:prSet presAssocID="{4C749A2A-4F8A-4344-BD8A-5B145FF9724F}" presName="rootConnector" presStyleLbl="node2" presStyleIdx="3" presStyleCnt="4"/>
@@ -10809,7 +10849,7 @@
       <dgm:spPr/>
     </dgm:pt>
     <dgm:pt modelId="{5A561D9C-6FF4-2D4D-AAD5-1B8EDDE0E211}" type="pres">
-      <dgm:prSet presAssocID="{6514C3FA-C101-5A4E-9CC7-6510BB97E6DE}" presName="Name37" presStyleLbl="parChTrans1D3" presStyleIdx="10" presStyleCnt="14"/>
+      <dgm:prSet presAssocID="{6514C3FA-C101-5A4E-9CC7-6510BB97E6DE}" presName="Name37" presStyleLbl="parChTrans1D3" presStyleIdx="9" presStyleCnt="12"/>
       <dgm:spPr/>
     </dgm:pt>
     <dgm:pt modelId="{CA52AD83-8DB5-B146-A0A6-CB23B7EBD3C5}" type="pres">
@@ -10825,15 +10865,23 @@
       <dgm:spPr/>
     </dgm:pt>
     <dgm:pt modelId="{183D34E5-9A2F-A743-A8A5-F2E99BB2365A}" type="pres">
-      <dgm:prSet presAssocID="{13BF24AD-60EE-D742-9990-C37E55094BEC}" presName="rootText" presStyleLbl="node3" presStyleIdx="10" presStyleCnt="14">
+      <dgm:prSet presAssocID="{13BF24AD-60EE-D742-9990-C37E55094BEC}" presName="rootText" presStyleLbl="node3" presStyleIdx="9" presStyleCnt="12">
         <dgm:presLayoutVars>
           <dgm:chPref val="3"/>
         </dgm:presLayoutVars>
       </dgm:prSet>
-      <dgm:spPr/>
+      <dgm:spPr>
+        <a:xfrm>
+          <a:off x="5769283" y="1526136"/>
+          <a:ext cx="1073608" cy="536804"/>
+        </a:xfrm>
+        <a:prstGeom prst="rect">
+          <a:avLst/>
+        </a:prstGeom>
+      </dgm:spPr>
     </dgm:pt>
     <dgm:pt modelId="{20C5D1BB-93C4-B64D-AE45-97B1A533D91C}" type="pres">
-      <dgm:prSet presAssocID="{13BF24AD-60EE-D742-9990-C37E55094BEC}" presName="rootConnector" presStyleLbl="node3" presStyleIdx="10" presStyleCnt="14"/>
+      <dgm:prSet presAssocID="{13BF24AD-60EE-D742-9990-C37E55094BEC}" presName="rootConnector" presStyleLbl="node3" presStyleIdx="9" presStyleCnt="12"/>
       <dgm:spPr/>
     </dgm:pt>
     <dgm:pt modelId="{C3AD2CDE-8B9D-294C-AB2C-72120BE3059B}" type="pres">
@@ -10845,7 +10893,7 @@
       <dgm:spPr/>
     </dgm:pt>
     <dgm:pt modelId="{375C9D02-BD9C-954E-950E-F2A97E1197D5}" type="pres">
-      <dgm:prSet presAssocID="{78C3177A-07BF-5F4D-B07F-FBE77165E7EB}" presName="Name37" presStyleLbl="parChTrans1D3" presStyleIdx="11" presStyleCnt="14"/>
+      <dgm:prSet presAssocID="{78C3177A-07BF-5F4D-B07F-FBE77165E7EB}" presName="Name37" presStyleLbl="parChTrans1D3" presStyleIdx="10" presStyleCnt="12"/>
       <dgm:spPr/>
     </dgm:pt>
     <dgm:pt modelId="{C27D2498-2FAC-7840-9A2B-E525FD1A3AA9}" type="pres">
@@ -10861,15 +10909,23 @@
       <dgm:spPr/>
     </dgm:pt>
     <dgm:pt modelId="{49ED93F1-9B12-104A-8FFC-B4148C0AC09A}" type="pres">
-      <dgm:prSet presAssocID="{2E116487-51F5-3049-BB04-F79D0F6A202F}" presName="rootText" presStyleLbl="node3" presStyleIdx="11" presStyleCnt="14">
+      <dgm:prSet presAssocID="{2E116487-51F5-3049-BB04-F79D0F6A202F}" presName="rootText" presStyleLbl="node3" presStyleIdx="10" presStyleCnt="12">
         <dgm:presLayoutVars>
           <dgm:chPref val="3"/>
         </dgm:presLayoutVars>
       </dgm:prSet>
-      <dgm:spPr/>
+      <dgm:spPr>
+        <a:xfrm>
+          <a:off x="5769283" y="2288397"/>
+          <a:ext cx="1073608" cy="536804"/>
+        </a:xfrm>
+        <a:prstGeom prst="rect">
+          <a:avLst/>
+        </a:prstGeom>
+      </dgm:spPr>
     </dgm:pt>
     <dgm:pt modelId="{49D95D63-EF35-E24D-A60E-3CF6E3E58A0B}" type="pres">
-      <dgm:prSet presAssocID="{2E116487-51F5-3049-BB04-F79D0F6A202F}" presName="rootConnector" presStyleLbl="node3" presStyleIdx="11" presStyleCnt="14"/>
+      <dgm:prSet presAssocID="{2E116487-51F5-3049-BB04-F79D0F6A202F}" presName="rootConnector" presStyleLbl="node3" presStyleIdx="10" presStyleCnt="12"/>
       <dgm:spPr/>
     </dgm:pt>
     <dgm:pt modelId="{8D3ECF15-8DFE-2441-8735-737E96B35B2E}" type="pres">
@@ -10881,7 +10937,7 @@
       <dgm:spPr/>
     </dgm:pt>
     <dgm:pt modelId="{7B6C085B-F4E7-5C41-82A9-EC78F238545F}" type="pres">
-      <dgm:prSet presAssocID="{905E0B22-0EBE-9741-B290-914AA1E9108C}" presName="Name37" presStyleLbl="parChTrans1D3" presStyleIdx="12" presStyleCnt="14"/>
+      <dgm:prSet presAssocID="{905E0B22-0EBE-9741-B290-914AA1E9108C}" presName="Name37" presStyleLbl="parChTrans1D3" presStyleIdx="11" presStyleCnt="12"/>
       <dgm:spPr/>
     </dgm:pt>
     <dgm:pt modelId="{42C80907-CD8D-D840-8F3D-78257FF43BE4}" type="pres">
@@ -10897,7 +10953,7 @@
       <dgm:spPr/>
     </dgm:pt>
     <dgm:pt modelId="{A4A35E8B-1CCA-534E-BB27-D5BAF397E36D}" type="pres">
-      <dgm:prSet presAssocID="{8C80F96B-F9BC-6841-8498-C51D7900AF94}" presName="rootText" presStyleLbl="node3" presStyleIdx="12" presStyleCnt="14">
+      <dgm:prSet presAssocID="{8C80F96B-F9BC-6841-8498-C51D7900AF94}" presName="rootText" presStyleLbl="node3" presStyleIdx="11" presStyleCnt="12">
         <dgm:presLayoutVars>
           <dgm:chPref val="3"/>
         </dgm:presLayoutVars>
@@ -10905,7 +10961,7 @@
       <dgm:spPr/>
     </dgm:pt>
     <dgm:pt modelId="{F4BA1DCD-BD2A-C84A-B438-E4C211AD50BC}" type="pres">
-      <dgm:prSet presAssocID="{8C80F96B-F9BC-6841-8498-C51D7900AF94}" presName="rootConnector" presStyleLbl="node3" presStyleIdx="12" presStyleCnt="14"/>
+      <dgm:prSet presAssocID="{8C80F96B-F9BC-6841-8498-C51D7900AF94}" presName="rootConnector" presStyleLbl="node3" presStyleIdx="11" presStyleCnt="12"/>
       <dgm:spPr/>
     </dgm:pt>
     <dgm:pt modelId="{2A63A85F-4AA4-5A41-9396-80624B500300}" type="pres">
@@ -10914,42 +10970,6 @@
     </dgm:pt>
     <dgm:pt modelId="{EA2CACAB-A8B0-F241-B446-A286D7D7C151}" type="pres">
       <dgm:prSet presAssocID="{8C80F96B-F9BC-6841-8498-C51D7900AF94}" presName="hierChild5" presStyleCnt="0"/>
-      <dgm:spPr/>
-    </dgm:pt>
-    <dgm:pt modelId="{93434206-6A0F-E044-A5FD-08F3D4D79959}" type="pres">
-      <dgm:prSet presAssocID="{5602BEBE-7968-F84B-B194-03D4C8122D84}" presName="Name37" presStyleLbl="parChTrans1D3" presStyleIdx="13" presStyleCnt="14"/>
-      <dgm:spPr/>
-    </dgm:pt>
-    <dgm:pt modelId="{122006E0-A6B3-1942-99A5-CD5923F39ED6}" type="pres">
-      <dgm:prSet presAssocID="{EFCC6E3E-881F-4C44-8121-71DEAE61C0BB}" presName="hierRoot2" presStyleCnt="0">
-        <dgm:presLayoutVars>
-          <dgm:hierBranch val="init"/>
-        </dgm:presLayoutVars>
-      </dgm:prSet>
-      <dgm:spPr/>
-    </dgm:pt>
-    <dgm:pt modelId="{48BE5BC6-1536-BE4C-8EC4-13D6ACE11146}" type="pres">
-      <dgm:prSet presAssocID="{EFCC6E3E-881F-4C44-8121-71DEAE61C0BB}" presName="rootComposite" presStyleCnt="0"/>
-      <dgm:spPr/>
-    </dgm:pt>
-    <dgm:pt modelId="{7D39AB92-3834-464D-AC65-5C7E5337B454}" type="pres">
-      <dgm:prSet presAssocID="{EFCC6E3E-881F-4C44-8121-71DEAE61C0BB}" presName="rootText" presStyleLbl="node3" presStyleIdx="13" presStyleCnt="14">
-        <dgm:presLayoutVars>
-          <dgm:chPref val="3"/>
-        </dgm:presLayoutVars>
-      </dgm:prSet>
-      <dgm:spPr/>
-    </dgm:pt>
-    <dgm:pt modelId="{0D715EC3-9E5A-1C48-8675-A113AB7386EC}" type="pres">
-      <dgm:prSet presAssocID="{EFCC6E3E-881F-4C44-8121-71DEAE61C0BB}" presName="rootConnector" presStyleLbl="node3" presStyleIdx="13" presStyleCnt="14"/>
-      <dgm:spPr/>
-    </dgm:pt>
-    <dgm:pt modelId="{870A7B83-8A6B-CD47-9BE0-27E1BE49DA7E}" type="pres">
-      <dgm:prSet presAssocID="{EFCC6E3E-881F-4C44-8121-71DEAE61C0BB}" presName="hierChild4" presStyleCnt="0"/>
-      <dgm:spPr/>
-    </dgm:pt>
-    <dgm:pt modelId="{BC350772-8AE8-624E-9146-F8855C2F7D11}" type="pres">
-      <dgm:prSet presAssocID="{EFCC6E3E-881F-4C44-8121-71DEAE61C0BB}" presName="hierChild5" presStyleCnt="0"/>
       <dgm:spPr/>
     </dgm:pt>
     <dgm:pt modelId="{34251A62-31B3-8247-BCE4-069E50426A93}" type="pres">
@@ -10967,7 +10987,6 @@
     <dgm:cxn modelId="{F5EC5B03-F376-3B47-B780-07E5BFD98C75}" srcId="{4C749A2A-4F8A-4344-BD8A-5B145FF9724F}" destId="{13BF24AD-60EE-D742-9990-C37E55094BEC}" srcOrd="0" destOrd="0" parTransId="{6514C3FA-C101-5A4E-9CC7-6510BB97E6DE}" sibTransId="{217F165A-8319-2F4C-86B3-A50B72AB12C6}"/>
     <dgm:cxn modelId="{30EEAF0F-29B4-C545-9031-D37A63F6961B}" srcId="{4C749A2A-4F8A-4344-BD8A-5B145FF9724F}" destId="{2E116487-51F5-3049-BB04-F79D0F6A202F}" srcOrd="1" destOrd="0" parTransId="{78C3177A-07BF-5F4D-B07F-FBE77165E7EB}" sibTransId="{52A0564F-05C2-8740-93E6-6D4B7D0A91C8}"/>
     <dgm:cxn modelId="{1EBC6C10-2481-E348-B64E-6DEE6A3E4018}" type="presOf" srcId="{20E05D4E-98E9-E24C-ABB9-4885743272E0}" destId="{06395E12-08EB-C642-A2A2-1B2FCE15A2D0}" srcOrd="0" destOrd="0" presId="urn:microsoft.com/office/officeart/2005/8/layout/orgChart1"/>
-    <dgm:cxn modelId="{4C9DA413-E6A3-A649-A41A-0CCDB71CA700}" srcId="{6FE3417F-F91D-D644-AF7D-338F6D3CA7FD}" destId="{583E99C7-946B-EE42-AE39-11379FBA8E65}" srcOrd="2" destOrd="0" parTransId="{94B55DD1-1CE9-9044-A8ED-288842793FCA}" sibTransId="{AC6AA048-0CF0-F946-B7EC-37782FA9FBFF}"/>
     <dgm:cxn modelId="{572D9B1D-CF4B-824C-9B2A-ED98D4F94EAA}" srcId="{C4E70CFE-787B-DD4C-A169-E88362EA1644}" destId="{02F0CF91-8124-EC41-9A25-69CB3C58E489}" srcOrd="0" destOrd="0" parTransId="{0C9B8537-19E5-B042-B51E-6C91397E138A}" sibTransId="{C6621571-42BA-DA4A-8F5C-41F77F9033B3}"/>
     <dgm:cxn modelId="{4B82AB20-1355-314B-B33E-2AA99B318BC4}" type="presOf" srcId="{BE9B5BE9-FB17-3049-A863-F58B20DBB129}" destId="{C989ADDF-38F5-2C47-878B-4B873890C484}" srcOrd="1" destOrd="0" presId="urn:microsoft.com/office/officeart/2005/8/layout/orgChart1"/>
     <dgm:cxn modelId="{2E83B421-A52C-D549-8182-BCEC96B62DF5}" type="presOf" srcId="{70835A8D-3044-414D-B196-A92445686440}" destId="{2DEFAA7D-5F4C-4B4A-852C-591FF258C4BC}" srcOrd="1" destOrd="0" presId="urn:microsoft.com/office/officeart/2005/8/layout/orgChart1"/>
@@ -10980,7 +10999,6 @@
     <dgm:cxn modelId="{D0595D3C-ADB2-5C4E-B429-2AADCC48A8B1}" type="presOf" srcId="{0F11A655-1027-D84C-A363-B6A141A602B5}" destId="{57F2F2F1-DECF-A044-B0A4-203A150C93AF}" srcOrd="0" destOrd="0" presId="urn:microsoft.com/office/officeart/2005/8/layout/orgChart1"/>
     <dgm:cxn modelId="{0E43923C-BC76-0E4F-9ECF-F2294491548B}" type="presOf" srcId="{0C042B71-0923-2547-B23C-7ED585EE23A3}" destId="{5F9D470D-2E93-1A4F-A151-DB3503B42AC1}" srcOrd="0" destOrd="0" presId="urn:microsoft.com/office/officeart/2005/8/layout/orgChart1"/>
     <dgm:cxn modelId="{6745923C-91F2-2147-8C39-7FC799AA0F95}" srcId="{0F11A655-1027-D84C-A363-B6A141A602B5}" destId="{FDB830E1-9116-A744-8567-B1CCDE622A6C}" srcOrd="0" destOrd="0" parTransId="{60F15EA2-3AB4-E040-ADC1-5801CCE9606D}" sibTransId="{CE4FA64F-C7D6-E846-A42A-362FB4FB73C3}"/>
-    <dgm:cxn modelId="{F2D3EE3E-371F-DA4E-88CA-1278453AB731}" type="presOf" srcId="{583E99C7-946B-EE42-AE39-11379FBA8E65}" destId="{A46BB13F-E69A-014E-B900-FCA1999979D3}" srcOrd="1" destOrd="0" presId="urn:microsoft.com/office/officeart/2005/8/layout/orgChart1"/>
     <dgm:cxn modelId="{29E59644-49D6-0E4C-9CF6-0D08870363C9}" type="presOf" srcId="{B2BEFB14-5935-9C41-B4AF-57AA90A522FA}" destId="{F0AB9FDC-589E-184C-BBA0-4828E9C7B3F5}" srcOrd="0" destOrd="0" presId="urn:microsoft.com/office/officeart/2005/8/layout/orgChart1"/>
     <dgm:cxn modelId="{311E8C4B-9028-E944-BD79-FEDEE82D4D61}" srcId="{0F11A655-1027-D84C-A363-B6A141A602B5}" destId="{20E05D4E-98E9-E24C-ABB9-4885743272E0}" srcOrd="1" destOrd="0" parTransId="{B5A8548A-BDE5-1A48-BACF-30D3A7AADA22}" sibTransId="{07335A66-D010-5049-A8C6-BB10E6973D13}"/>
     <dgm:cxn modelId="{52DF884C-2743-FE42-A886-E6BB390EC2DF}" type="presOf" srcId="{70835A8D-3044-414D-B196-A92445686440}" destId="{9BD1E258-8689-464A-A587-4EB3F5827A63}" srcOrd="0" destOrd="0" presId="urn:microsoft.com/office/officeart/2005/8/layout/orgChart1"/>
@@ -10997,7 +11015,6 @@
     <dgm:cxn modelId="{B8FE2377-06D5-4540-9E54-568C37A45A9C}" srcId="{93074DCF-CBC6-FB49-BD1F-49034690B770}" destId="{99AF803C-C935-7D4F-B412-B037E709BF3B}" srcOrd="0" destOrd="0" parTransId="{988767BE-A250-C24C-A0FD-83B236774624}" sibTransId="{31891866-28A5-5E40-9FA3-84E288C60473}"/>
     <dgm:cxn modelId="{5C40617C-8823-1045-9F0F-528186CB47EB}" type="presOf" srcId="{CC4E38D3-1D78-B145-880E-CF8A469C0C7A}" destId="{A731BC4F-EE78-524B-B75A-91DBE4DA6D06}" srcOrd="0" destOrd="0" presId="urn:microsoft.com/office/officeart/2005/8/layout/orgChart1"/>
     <dgm:cxn modelId="{DAB44E85-EBFE-784C-89C4-D61121EA5F3E}" type="presOf" srcId="{93074DCF-CBC6-FB49-BD1F-49034690B770}" destId="{706D4285-8E13-EE42-BA94-1FAADDF543B8}" srcOrd="0" destOrd="0" presId="urn:microsoft.com/office/officeart/2005/8/layout/orgChart1"/>
-    <dgm:cxn modelId="{D78B6085-0D71-2042-8042-932F4145806E}" type="presOf" srcId="{EFCC6E3E-881F-4C44-8121-71DEAE61C0BB}" destId="{0D715EC3-9E5A-1C48-8675-A113AB7386EC}" srcOrd="1" destOrd="0" presId="urn:microsoft.com/office/officeart/2005/8/layout/orgChart1"/>
     <dgm:cxn modelId="{5BD79E89-B928-F34C-A6AC-05294B314C64}" type="presOf" srcId="{13BF24AD-60EE-D742-9990-C37E55094BEC}" destId="{183D34E5-9A2F-A743-A8A5-F2E99BB2365A}" srcOrd="0" destOrd="0" presId="urn:microsoft.com/office/officeart/2005/8/layout/orgChart1"/>
     <dgm:cxn modelId="{43CEB58B-0374-EB4B-A70E-E304555EDC53}" type="presOf" srcId="{1A03B561-FF95-3B42-B502-FB51ADC4004F}" destId="{A4EBA3CA-7678-1648-9BAE-ECFB5D274C92}" srcOrd="1" destOrd="0" presId="urn:microsoft.com/office/officeart/2005/8/layout/orgChart1"/>
     <dgm:cxn modelId="{C522668C-D62E-B84D-A855-0F3F2CA03385}" type="presOf" srcId="{6FE3417F-F91D-D644-AF7D-338F6D3CA7FD}" destId="{A1DCC881-6B5A-2748-8DBB-3929CDCBCD66}" srcOrd="0" destOrd="0" presId="urn:microsoft.com/office/officeart/2005/8/layout/orgChart1"/>
@@ -11011,33 +11028,28 @@
     <dgm:cxn modelId="{36372CA5-3BD7-1241-942F-847A5822C0C9}" type="presOf" srcId="{2E116487-51F5-3049-BB04-F79D0F6A202F}" destId="{49D95D63-EF35-E24D-A60E-3CF6E3E58A0B}" srcOrd="1" destOrd="0" presId="urn:microsoft.com/office/officeart/2005/8/layout/orgChart1"/>
     <dgm:cxn modelId="{1ECE5CA6-9680-D045-8D24-6D5B04C2F379}" type="presOf" srcId="{64D358D9-825E-8A48-8B72-08A3352E40A5}" destId="{F0EC5A6C-12AE-6E44-B761-CF66AE16A88B}" srcOrd="0" destOrd="0" presId="urn:microsoft.com/office/officeart/2005/8/layout/orgChart1"/>
     <dgm:cxn modelId="{265EB2A6-111E-9249-8C46-7DE9D8C9184B}" srcId="{4C749A2A-4F8A-4344-BD8A-5B145FF9724F}" destId="{8C80F96B-F9BC-6841-8498-C51D7900AF94}" srcOrd="2" destOrd="0" parTransId="{905E0B22-0EBE-9741-B290-914AA1E9108C}" sibTransId="{179F05F7-A08C-2349-A95D-6DE3B735271F}"/>
-    <dgm:cxn modelId="{D7478DA8-1CBA-1C4B-9F9D-AFD8CF9ACC00}" srcId="{4C749A2A-4F8A-4344-BD8A-5B145FF9724F}" destId="{EFCC6E3E-881F-4C44-8121-71DEAE61C0BB}" srcOrd="3" destOrd="0" parTransId="{5602BEBE-7968-F84B-B194-03D4C8122D84}" sibTransId="{3C329676-A86D-834B-8145-31389A380D91}"/>
     <dgm:cxn modelId="{017FA2AD-679A-D444-AE97-39658E8B685C}" srcId="{C4E70CFE-787B-DD4C-A169-E88362EA1644}" destId="{0C042B71-0923-2547-B23C-7ED585EE23A3}" srcOrd="2" destOrd="0" parTransId="{FE50A543-E971-E349-BDE1-1EE668E773B2}" sibTransId="{8118E194-DB20-D24B-9010-2420E64F6C97}"/>
-    <dgm:cxn modelId="{094575AF-D768-1A40-B9CE-63FFA1D9B06F}" type="presOf" srcId="{5602BEBE-7968-F84B-B194-03D4C8122D84}" destId="{93434206-6A0F-E044-A5FD-08F3D4D79959}" srcOrd="0" destOrd="0" presId="urn:microsoft.com/office/officeart/2005/8/layout/orgChart1"/>
     <dgm:cxn modelId="{16A2BBB2-5A96-2C46-8BB2-E0D99927B94D}" srcId="{99AF803C-C935-7D4F-B412-B037E709BF3B}" destId="{C4E70CFE-787B-DD4C-A169-E88362EA1644}" srcOrd="2" destOrd="0" parTransId="{3574244C-8085-1047-8DCD-F4DD84F950B0}" sibTransId="{8E0CF893-A3A2-844A-8632-BD676A5E2B89}"/>
     <dgm:cxn modelId="{647244B3-306A-D648-AD65-2D3A154F310B}" type="presOf" srcId="{13BF24AD-60EE-D742-9990-C37E55094BEC}" destId="{20C5D1BB-93C4-B64D-AE45-97B1A533D91C}" srcOrd="1" destOrd="0" presId="urn:microsoft.com/office/officeart/2005/8/layout/orgChart1"/>
     <dgm:cxn modelId="{300B8DB3-B87F-F849-80B5-D4B116D8DF0E}" type="presOf" srcId="{905E0B22-0EBE-9741-B290-914AA1E9108C}" destId="{7B6C085B-F4E7-5C41-82A9-EC78F238545F}" srcOrd="0" destOrd="0" presId="urn:microsoft.com/office/officeart/2005/8/layout/orgChart1"/>
     <dgm:cxn modelId="{F14BE9B8-B0EF-5944-8ED9-651B9B6E7507}" srcId="{0F11A655-1027-D84C-A363-B6A141A602B5}" destId="{1A03B561-FF95-3B42-B502-FB51ADC4004F}" srcOrd="2" destOrd="0" parTransId="{19753DD7-E254-CE41-9100-5960C71E940D}" sibTransId="{E9870684-7034-774A-AA59-EBE59485386B}"/>
     <dgm:cxn modelId="{F568FBBC-2E1F-7542-BCF8-647D352756D8}" type="presOf" srcId="{42394E76-EF2A-4143-B166-737AF9634EE2}" destId="{5B7F08E5-1124-2143-9E15-06A29F73FB9F}" srcOrd="0" destOrd="0" presId="urn:microsoft.com/office/officeart/2005/8/layout/orgChart1"/>
-    <dgm:cxn modelId="{508E19C5-CB69-6D48-8BD8-242AC1681A32}" type="presOf" srcId="{EFCC6E3E-881F-4C44-8121-71DEAE61C0BB}" destId="{7D39AB92-3834-464D-AC65-5C7E5337B454}" srcOrd="0" destOrd="0" presId="urn:microsoft.com/office/officeart/2005/8/layout/orgChart1"/>
     <dgm:cxn modelId="{EE0706D8-8C7B-6143-83D7-17CA946DE80F}" type="presOf" srcId="{FDB830E1-9116-A744-8567-B1CCDE622A6C}" destId="{A19848DA-1684-694E-8AB2-37795844922E}" srcOrd="0" destOrd="0" presId="urn:microsoft.com/office/officeart/2005/8/layout/orgChart1"/>
     <dgm:cxn modelId="{67A820D9-81CA-464E-B9C8-2D35A6A802EA}" type="presOf" srcId="{0DCF37D1-3272-5E40-AC92-21E2A3DF27AF}" destId="{BF9C65A5-C5F5-0E46-9055-AC2648C002EE}" srcOrd="0" destOrd="0" presId="urn:microsoft.com/office/officeart/2005/8/layout/orgChart1"/>
     <dgm:cxn modelId="{F941AAD9-9783-AE48-A4C4-52D8CA8BD8FE}" type="presOf" srcId="{6514C3FA-C101-5A4E-9CC7-6510BB97E6DE}" destId="{5A561D9C-6FF4-2D4D-AAD5-1B8EDDE0E211}" srcOrd="0" destOrd="0" presId="urn:microsoft.com/office/officeart/2005/8/layout/orgChart1"/>
     <dgm:cxn modelId="{B47A03DB-43CF-5048-BE4C-B2FBD7584263}" type="presOf" srcId="{8C80F96B-F9BC-6841-8498-C51D7900AF94}" destId="{F4BA1DCD-BD2A-C84A-B438-E4C211AD50BC}" srcOrd="1" destOrd="0" presId="urn:microsoft.com/office/officeart/2005/8/layout/orgChart1"/>
     <dgm:cxn modelId="{AF1D39E0-0033-9649-9927-850B8E0248C0}" type="presOf" srcId="{0F11A655-1027-D84C-A363-B6A141A602B5}" destId="{AAE15651-EA49-5848-9172-5839D0C2255A}" srcOrd="1" destOrd="0" presId="urn:microsoft.com/office/officeart/2005/8/layout/orgChart1"/>
-    <dgm:cxn modelId="{BA9C11E3-77FB-714C-9693-DB67DACF0121}" srcId="{6FE3417F-F91D-D644-AF7D-338F6D3CA7FD}" destId="{42394E76-EF2A-4143-B166-737AF9634EE2}" srcOrd="3" destOrd="0" parTransId="{64D358D9-825E-8A48-8B72-08A3352E40A5}" sibTransId="{57343CD7-8F1D-D749-BCBA-EA40186B1C0B}"/>
+    <dgm:cxn modelId="{BA9C11E3-77FB-714C-9693-DB67DACF0121}" srcId="{6FE3417F-F91D-D644-AF7D-338F6D3CA7FD}" destId="{42394E76-EF2A-4143-B166-737AF9634EE2}" srcOrd="2" destOrd="0" parTransId="{64D358D9-825E-8A48-8B72-08A3352E40A5}" sibTransId="{57343CD7-8F1D-D749-BCBA-EA40186B1C0B}"/>
     <dgm:cxn modelId="{513DB2E3-B7D4-3844-BDF0-DB0CFEBC0267}" type="presOf" srcId="{78C3177A-07BF-5F4D-B07F-FBE77165E7EB}" destId="{375C9D02-BD9C-954E-950E-F2A97E1197D5}" srcOrd="0" destOrd="0" presId="urn:microsoft.com/office/officeart/2005/8/layout/orgChart1"/>
     <dgm:cxn modelId="{AB4C00EB-8637-D34F-8266-DEA82CB40B3B}" type="presOf" srcId="{6FE3417F-F91D-D644-AF7D-338F6D3CA7FD}" destId="{3B18D46F-AEB1-E343-B946-B1473EFA9529}" srcOrd="1" destOrd="0" presId="urn:microsoft.com/office/officeart/2005/8/layout/orgChart1"/>
     <dgm:cxn modelId="{5B3003F0-C8B4-AA4D-8012-835F4C80C4DB}" type="presOf" srcId="{8C80F96B-F9BC-6841-8498-C51D7900AF94}" destId="{A4A35E8B-1CCA-534E-BB27-D5BAF397E36D}" srcOrd="0" destOrd="0" presId="urn:microsoft.com/office/officeart/2005/8/layout/orgChart1"/>
     <dgm:cxn modelId="{79587FF0-80A3-6A4E-823A-E5391228A5B6}" type="presOf" srcId="{9CB8F260-79F1-CE4A-9FA8-99E9F1BE867B}" destId="{89A41B80-14D7-2443-88A1-A7907013552A}" srcOrd="0" destOrd="0" presId="urn:microsoft.com/office/officeart/2005/8/layout/orgChart1"/>
     <dgm:cxn modelId="{F6F3B9F2-3855-CF4E-85F4-79A9228BC0CE}" type="presOf" srcId="{2E116487-51F5-3049-BB04-F79D0F6A202F}" destId="{49ED93F1-9B12-104A-8FFC-B4148C0AC09A}" srcOrd="0" destOrd="0" presId="urn:microsoft.com/office/officeart/2005/8/layout/orgChart1"/>
     <dgm:cxn modelId="{D7A85DF3-1605-1E4B-ABA5-76FDF0FAE234}" type="presOf" srcId="{19753DD7-E254-CE41-9100-5960C71E940D}" destId="{312D0D41-5CF4-D342-8F48-0FDFFD86B1F0}" srcOrd="0" destOrd="0" presId="urn:microsoft.com/office/officeart/2005/8/layout/orgChart1"/>
-    <dgm:cxn modelId="{19E034F4-C298-3943-9EF9-41258A5BA745}" type="presOf" srcId="{583E99C7-946B-EE42-AE39-11379FBA8E65}" destId="{B985F0D8-2D18-A443-9D85-FB596BA7D682}" srcOrd="0" destOrd="0" presId="urn:microsoft.com/office/officeart/2005/8/layout/orgChart1"/>
     <dgm:cxn modelId="{4C7D5BF7-BB6A-2D4E-9B3C-B8B1CB5C0C31}" type="presOf" srcId="{B5A8548A-BDE5-1A48-BACF-30D3A7AADA22}" destId="{C387BB6B-C6A7-1140-AB3E-D359B07E2050}" srcOrd="0" destOrd="0" presId="urn:microsoft.com/office/officeart/2005/8/layout/orgChart1"/>
     <dgm:cxn modelId="{E08E67F7-64DB-6A44-A279-750B56D8E2E0}" type="presOf" srcId="{8914EC3B-4275-B441-ADD2-D7B06D735F07}" destId="{6AFC0196-01F6-0240-99F1-2361465AF458}" srcOrd="0" destOrd="0" presId="urn:microsoft.com/office/officeart/2005/8/layout/orgChart1"/>
     <dgm:cxn modelId="{A1BF38F9-70CD-BD49-842D-7B9C0A4E2964}" type="presOf" srcId="{99AF803C-C935-7D4F-B412-B037E709BF3B}" destId="{87CB75FF-A3C9-1C43-83C1-729B235B27AF}" srcOrd="0" destOrd="0" presId="urn:microsoft.com/office/officeart/2005/8/layout/orgChart1"/>
     <dgm:cxn modelId="{BD120FFA-5790-AD43-9484-DCACE84DF1D6}" type="presOf" srcId="{4C749A2A-4F8A-4344-BD8A-5B145FF9724F}" destId="{EE1BADF2-CCB8-6444-AE00-D2E28DEAA876}" srcOrd="1" destOrd="0" presId="urn:microsoft.com/office/officeart/2005/8/layout/orgChart1"/>
-    <dgm:cxn modelId="{0CC84AFE-FC5B-4B45-9E0E-5891B996D987}" type="presOf" srcId="{94B55DD1-1CE9-9044-A8ED-288842793FCA}" destId="{5F428E68-6D3A-5748-9985-4CB72225EF95}" srcOrd="0" destOrd="0" presId="urn:microsoft.com/office/officeart/2005/8/layout/orgChart1"/>
     <dgm:cxn modelId="{FFE26B5B-F95F-CC47-85F5-9A16F293ECE0}" type="presParOf" srcId="{706D4285-8E13-EE42-BA94-1FAADDF543B8}" destId="{C5723390-9311-CA4B-8565-44124A2A159E}" srcOrd="0" destOrd="0" presId="urn:microsoft.com/office/officeart/2005/8/layout/orgChart1"/>
     <dgm:cxn modelId="{28284DE7-553B-FD4B-BBB9-29CA300283C0}" type="presParOf" srcId="{C5723390-9311-CA4B-8565-44124A2A159E}" destId="{C9CC2C01-8D29-5D4F-A697-4D3F7F908967}" srcOrd="0" destOrd="0" presId="urn:microsoft.com/office/officeart/2005/8/layout/orgChart1"/>
     <dgm:cxn modelId="{94051C7E-CF34-D843-900E-22163D119B75}" type="presParOf" srcId="{C9CC2C01-8D29-5D4F-A697-4D3F7F908967}" destId="{87CB75FF-A3C9-1C43-83C1-729B235B27AF}" srcOrd="0" destOrd="0" presId="urn:microsoft.com/office/officeart/2005/8/layout/orgChart1"/>
@@ -11063,15 +11075,8 @@
     <dgm:cxn modelId="{55D6D78D-EFB1-8D4A-AD30-0E66127B0B6A}" type="presParOf" srcId="{386AA830-DE67-494B-B12F-F952939A4FC4}" destId="{2DEFAA7D-5F4C-4B4A-852C-591FF258C4BC}" srcOrd="1" destOrd="0" presId="urn:microsoft.com/office/officeart/2005/8/layout/orgChart1"/>
     <dgm:cxn modelId="{023E913C-06CB-9F43-A147-CA74E839DB3B}" type="presParOf" srcId="{7FCED045-48CA-1744-8DAE-7285446C89E5}" destId="{243B5B82-3A3F-7E42-92BE-179FF9327CC0}" srcOrd="1" destOrd="0" presId="urn:microsoft.com/office/officeart/2005/8/layout/orgChart1"/>
     <dgm:cxn modelId="{ACC1059F-7EF2-B544-9115-F834A8BD64BB}" type="presParOf" srcId="{7FCED045-48CA-1744-8DAE-7285446C89E5}" destId="{910043CB-7683-1243-9479-9D8578B5E0BF}" srcOrd="2" destOrd="0" presId="urn:microsoft.com/office/officeart/2005/8/layout/orgChart1"/>
-    <dgm:cxn modelId="{96F11F3B-2E81-5B40-A858-7DD2F97838B7}" type="presParOf" srcId="{A9261BAE-5F1D-3E40-9BB1-34D64F820486}" destId="{5F428E68-6D3A-5748-9985-4CB72225EF95}" srcOrd="4" destOrd="0" presId="urn:microsoft.com/office/officeart/2005/8/layout/orgChart1"/>
-    <dgm:cxn modelId="{830BC6CB-02EA-9A4D-8031-8905246CF058}" type="presParOf" srcId="{A9261BAE-5F1D-3E40-9BB1-34D64F820486}" destId="{ECD20306-7E01-D147-A785-5B1883103868}" srcOrd="5" destOrd="0" presId="urn:microsoft.com/office/officeart/2005/8/layout/orgChart1"/>
-    <dgm:cxn modelId="{76DAE37F-50F8-474B-9431-3F3D5C27C27E}" type="presParOf" srcId="{ECD20306-7E01-D147-A785-5B1883103868}" destId="{EB64934C-ED0E-D440-AE99-6A319E8E5761}" srcOrd="0" destOrd="0" presId="urn:microsoft.com/office/officeart/2005/8/layout/orgChart1"/>
-    <dgm:cxn modelId="{59B1B4E4-E482-2246-A058-9A84DB8F56E0}" type="presParOf" srcId="{EB64934C-ED0E-D440-AE99-6A319E8E5761}" destId="{B985F0D8-2D18-A443-9D85-FB596BA7D682}" srcOrd="0" destOrd="0" presId="urn:microsoft.com/office/officeart/2005/8/layout/orgChart1"/>
-    <dgm:cxn modelId="{7BE5ACC8-84E7-8641-B5BD-BAB3B06367E1}" type="presParOf" srcId="{EB64934C-ED0E-D440-AE99-6A319E8E5761}" destId="{A46BB13F-E69A-014E-B900-FCA1999979D3}" srcOrd="1" destOrd="0" presId="urn:microsoft.com/office/officeart/2005/8/layout/orgChart1"/>
-    <dgm:cxn modelId="{20C9D883-B7FE-BA47-9C0A-32EFD9068BA0}" type="presParOf" srcId="{ECD20306-7E01-D147-A785-5B1883103868}" destId="{A6C50259-5036-674A-B577-24AC199ECDE1}" srcOrd="1" destOrd="0" presId="urn:microsoft.com/office/officeart/2005/8/layout/orgChart1"/>
-    <dgm:cxn modelId="{3C3108BD-2A16-EF43-B782-3E652BE3FDA8}" type="presParOf" srcId="{ECD20306-7E01-D147-A785-5B1883103868}" destId="{092F4CA8-1751-5844-89E4-19E1193E6797}" srcOrd="2" destOrd="0" presId="urn:microsoft.com/office/officeart/2005/8/layout/orgChart1"/>
-    <dgm:cxn modelId="{4267A82F-7CA3-8347-BC13-6C24AACB7E36}" type="presParOf" srcId="{A9261BAE-5F1D-3E40-9BB1-34D64F820486}" destId="{F0EC5A6C-12AE-6E44-B761-CF66AE16A88B}" srcOrd="6" destOrd="0" presId="urn:microsoft.com/office/officeart/2005/8/layout/orgChart1"/>
-    <dgm:cxn modelId="{2A976924-88C4-934E-9051-A5057DBAFA9B}" type="presParOf" srcId="{A9261BAE-5F1D-3E40-9BB1-34D64F820486}" destId="{E35D02FA-5824-8D44-90B4-F890555E7387}" srcOrd="7" destOrd="0" presId="urn:microsoft.com/office/officeart/2005/8/layout/orgChart1"/>
+    <dgm:cxn modelId="{4267A82F-7CA3-8347-BC13-6C24AACB7E36}" type="presParOf" srcId="{A9261BAE-5F1D-3E40-9BB1-34D64F820486}" destId="{F0EC5A6C-12AE-6E44-B761-CF66AE16A88B}" srcOrd="4" destOrd="0" presId="urn:microsoft.com/office/officeart/2005/8/layout/orgChart1"/>
+    <dgm:cxn modelId="{2A976924-88C4-934E-9051-A5057DBAFA9B}" type="presParOf" srcId="{A9261BAE-5F1D-3E40-9BB1-34D64F820486}" destId="{E35D02FA-5824-8D44-90B4-F890555E7387}" srcOrd="5" destOrd="0" presId="urn:microsoft.com/office/officeart/2005/8/layout/orgChart1"/>
     <dgm:cxn modelId="{224C81EF-0041-CA40-9D49-4B156EF3D141}" type="presParOf" srcId="{E35D02FA-5824-8D44-90B4-F890555E7387}" destId="{B496C7D4-CFFD-B04A-A338-E6DFE5F1361C}" srcOrd="0" destOrd="0" presId="urn:microsoft.com/office/officeart/2005/8/layout/orgChart1"/>
     <dgm:cxn modelId="{0A8DB9BB-03F5-D742-82DD-06A71E9A036F}" type="presParOf" srcId="{B496C7D4-CFFD-B04A-A338-E6DFE5F1361C}" destId="{5B7F08E5-1124-2143-9E15-06A29F73FB9F}" srcOrd="0" destOrd="0" presId="urn:microsoft.com/office/officeart/2005/8/layout/orgChart1"/>
     <dgm:cxn modelId="{8066AEFE-E6A7-EC4F-870B-F38D038713B4}" type="presParOf" srcId="{B496C7D4-CFFD-B04A-A338-E6DFE5F1361C}" destId="{0BE51898-DC41-8F4A-A169-E72F348BC634}" srcOrd="1" destOrd="0" presId="urn:microsoft.com/office/officeart/2005/8/layout/orgChart1"/>
@@ -11161,13 +11166,6 @@
     <dgm:cxn modelId="{C2877489-368E-3644-B827-1742A27F9935}" type="presParOf" srcId="{B65829C7-442C-7D4D-BA28-A405E6D5B86B}" destId="{F4BA1DCD-BD2A-C84A-B438-E4C211AD50BC}" srcOrd="1" destOrd="0" presId="urn:microsoft.com/office/officeart/2005/8/layout/orgChart1"/>
     <dgm:cxn modelId="{CD3E64E4-BC84-2A4A-8771-387C474AE2B2}" type="presParOf" srcId="{42C80907-CD8D-D840-8F3D-78257FF43BE4}" destId="{2A63A85F-4AA4-5A41-9396-80624B500300}" srcOrd="1" destOrd="0" presId="urn:microsoft.com/office/officeart/2005/8/layout/orgChart1"/>
     <dgm:cxn modelId="{F715FFAC-79B2-6E45-8AB8-336B4A50103F}" type="presParOf" srcId="{42C80907-CD8D-D840-8F3D-78257FF43BE4}" destId="{EA2CACAB-A8B0-F241-B446-A286D7D7C151}" srcOrd="2" destOrd="0" presId="urn:microsoft.com/office/officeart/2005/8/layout/orgChart1"/>
-    <dgm:cxn modelId="{A6EE7D30-8D25-3E4F-8EE2-34EA6B68486E}" type="presParOf" srcId="{13AC6732-CAE9-ED48-A165-789264403B84}" destId="{93434206-6A0F-E044-A5FD-08F3D4D79959}" srcOrd="6" destOrd="0" presId="urn:microsoft.com/office/officeart/2005/8/layout/orgChart1"/>
-    <dgm:cxn modelId="{5B8C59E5-1FC1-924B-ABB6-94F286828DAD}" type="presParOf" srcId="{13AC6732-CAE9-ED48-A165-789264403B84}" destId="{122006E0-A6B3-1942-99A5-CD5923F39ED6}" srcOrd="7" destOrd="0" presId="urn:microsoft.com/office/officeart/2005/8/layout/orgChart1"/>
-    <dgm:cxn modelId="{70BEC8C3-1CBC-DE4E-AB0B-C6E7F1747A51}" type="presParOf" srcId="{122006E0-A6B3-1942-99A5-CD5923F39ED6}" destId="{48BE5BC6-1536-BE4C-8EC4-13D6ACE11146}" srcOrd="0" destOrd="0" presId="urn:microsoft.com/office/officeart/2005/8/layout/orgChart1"/>
-    <dgm:cxn modelId="{F16726B5-7FB8-2147-A5F9-9D8071E9C330}" type="presParOf" srcId="{48BE5BC6-1536-BE4C-8EC4-13D6ACE11146}" destId="{7D39AB92-3834-464D-AC65-5C7E5337B454}" srcOrd="0" destOrd="0" presId="urn:microsoft.com/office/officeart/2005/8/layout/orgChart1"/>
-    <dgm:cxn modelId="{817C4671-1BFE-2E4D-9522-58F8B4E8F88C}" type="presParOf" srcId="{48BE5BC6-1536-BE4C-8EC4-13D6ACE11146}" destId="{0D715EC3-9E5A-1C48-8675-A113AB7386EC}" srcOrd="1" destOrd="0" presId="urn:microsoft.com/office/officeart/2005/8/layout/orgChart1"/>
-    <dgm:cxn modelId="{63274EF4-DC45-5B48-9E4A-548E040B34E7}" type="presParOf" srcId="{122006E0-A6B3-1942-99A5-CD5923F39ED6}" destId="{870A7B83-8A6B-CD47-9BE0-27E1BE49DA7E}" srcOrd="1" destOrd="0" presId="urn:microsoft.com/office/officeart/2005/8/layout/orgChart1"/>
-    <dgm:cxn modelId="{1B513B4F-29FD-4B40-BADE-F7D8C25EB1F3}" type="presParOf" srcId="{122006E0-A6B3-1942-99A5-CD5923F39ED6}" destId="{BC350772-8AE8-624E-9146-F8855C2F7D11}" srcOrd="2" destOrd="0" presId="urn:microsoft.com/office/officeart/2005/8/layout/orgChart1"/>
     <dgm:cxn modelId="{3D31FC56-8B2F-014B-B61A-B87F9991CA96}" type="presParOf" srcId="{437CD625-EC36-E642-8962-ECD230AFB9D2}" destId="{34251A62-31B3-8247-BCE4-069E50426A93}" srcOrd="2" destOrd="0" presId="urn:microsoft.com/office/officeart/2005/8/layout/orgChart1"/>
     <dgm:cxn modelId="{AB2862A9-09B5-C842-B009-5B390012C210}" type="presParOf" srcId="{C5723390-9311-CA4B-8565-44124A2A159E}" destId="{8EED106A-8A8F-0045-B156-2A5C5B9107F9}" srcOrd="2" destOrd="0" presId="urn:microsoft.com/office/officeart/2005/8/layout/orgChart1"/>
   </dgm:cxnLst>
@@ -19150,12 +19148,12 @@
         </a:fontRef>
       </dsp:style>
       <dsp:txBody>
-        <a:bodyPr spcFirstLastPara="0" vert="horz" wrap="square" lIns="6350" tIns="6350" rIns="6350" bIns="6350" numCol="1" spcCol="1270" anchor="ctr" anchorCtr="0">
+        <a:bodyPr spcFirstLastPara="0" vert="horz" wrap="square" lIns="8890" tIns="8890" rIns="8890" bIns="8890" numCol="1" spcCol="1270" anchor="ctr" anchorCtr="0">
           <a:noAutofit/>
         </a:bodyPr>
         <a:lstStyle/>
         <a:p>
-          <a:pPr marL="0" lvl="0" indent="0" algn="ctr" defTabSz="444500">
+          <a:pPr marL="0" lvl="0" indent="0" algn="ctr" defTabSz="622300">
             <a:lnSpc>
               <a:spcPct val="90000"/>
             </a:lnSpc>
@@ -19168,10 +19166,10 @@
             <a:buNone/>
           </a:pPr>
           <a:r>
-            <a:rPr lang="en-US" altLang="zh-TW" sz="1000" kern="1200" dirty="0"/>
+            <a:rPr lang="en-US" altLang="zh-TW" sz="1400" kern="1200" dirty="0"/>
             <a:t>Frequency Counting</a:t>
           </a:r>
-          <a:endParaRPr lang="zh-TW" altLang="en-US" sz="1000" kern="1200" dirty="0"/>
+          <a:endParaRPr lang="zh-TW" altLang="en-US" sz="1400" kern="1200" dirty="0"/>
         </a:p>
       </dsp:txBody>
       <dsp:txXfrm>
@@ -19229,12 +19227,12 @@
         </a:fontRef>
       </dsp:style>
       <dsp:txBody>
-        <a:bodyPr spcFirstLastPara="0" vert="horz" wrap="square" lIns="6350" tIns="6350" rIns="6350" bIns="6350" numCol="1" spcCol="1270" anchor="ctr" anchorCtr="0">
+        <a:bodyPr spcFirstLastPara="0" vert="horz" wrap="square" lIns="8890" tIns="8890" rIns="8890" bIns="8890" numCol="1" spcCol="1270" anchor="ctr" anchorCtr="0">
           <a:noAutofit/>
         </a:bodyPr>
         <a:lstStyle/>
         <a:p>
-          <a:pPr marL="0" lvl="0" indent="0" algn="ctr" defTabSz="444500">
+          <a:pPr marL="0" lvl="0" indent="0" algn="ctr" defTabSz="622300">
             <a:lnSpc>
               <a:spcPct val="90000"/>
             </a:lnSpc>
@@ -19247,10 +19245,10 @@
             <a:buNone/>
           </a:pPr>
           <a:r>
-            <a:rPr lang="en-US" altLang="zh-TW" sz="1000" kern="1200" dirty="0"/>
+            <a:rPr lang="en-US" altLang="zh-TW" sz="1400" kern="1200" dirty="0"/>
             <a:t>Two-sum</a:t>
           </a:r>
-          <a:endParaRPr lang="zh-TW" altLang="en-US" sz="1000" kern="1200" dirty="0"/>
+          <a:endParaRPr lang="zh-TW" altLang="en-US" sz="1400" kern="1200" dirty="0"/>
         </a:p>
       </dsp:txBody>
       <dsp:txXfrm>
@@ -19272,21 +19270,18 @@
           <a:avLst/>
         </a:prstGeom>
         <a:solidFill>
-          <a:schemeClr val="accent1">
-            <a:hueOff val="0"/>
-            <a:satOff val="0"/>
-            <a:lumOff val="0"/>
-            <a:alphaOff val="0"/>
-          </a:schemeClr>
+          <a:prstClr val="white">
+            <a:lumMod val="75000"/>
+          </a:prstClr>
         </a:solidFill>
         <a:ln w="19050" cap="flat" cmpd="sng" algn="ctr">
           <a:solidFill>
-            <a:schemeClr val="lt1">
+            <a:prstClr val="white">
               <a:hueOff val="0"/>
               <a:satOff val="0"/>
               <a:lumOff val="0"/>
               <a:alphaOff val="0"/>
-            </a:schemeClr>
+            </a:prstClr>
           </a:solidFill>
           <a:prstDash val="solid"/>
           <a:miter lim="800000"/>
@@ -19326,10 +19321,24 @@
             <a:buNone/>
           </a:pPr>
           <a:r>
-            <a:rPr lang="en-US" altLang="zh-TW" sz="1000" kern="1200" dirty="0"/>
+            <a:rPr lang="en-US" altLang="zh-TW" sz="1000" kern="1200" dirty="0">
+              <a:solidFill>
+                <a:prstClr val="white"/>
+              </a:solidFill>
+              <a:latin typeface="Arial" panose="020B0604020202020204" pitchFamily="34" charset="0"/>
+              <a:ea typeface="新細明體" panose="02020500000000000000" pitchFamily="18" charset="-120"/>
+              <a:cs typeface="Arial" panose="020B0604020202020204" pitchFamily="34" charset="0"/>
+            </a:rPr>
             <a:t>Deduplication</a:t>
           </a:r>
-          <a:endParaRPr lang="zh-TW" altLang="en-US" sz="1000" kern="1200" dirty="0"/>
+          <a:endParaRPr lang="zh-TW" altLang="en-US" sz="1000" kern="1200" dirty="0">
+            <a:solidFill>
+              <a:prstClr val="white"/>
+            </a:solidFill>
+            <a:latin typeface="Arial" panose="020B0604020202020204" pitchFamily="34" charset="0"/>
+            <a:ea typeface="新細明體" panose="02020500000000000000" pitchFamily="18" charset="-120"/>
+            <a:cs typeface="Arial" panose="020B0604020202020204" pitchFamily="34" charset="0"/>
+          </a:endParaRPr>
         </a:p>
       </dsp:txBody>
       <dsp:txXfrm>
@@ -20201,15 +20210,15 @@
       <dsp:cNvGrpSpPr/>
     </dsp:nvGrpSpPr>
     <dsp:grpSpPr/>
-    <dsp:sp modelId="{93434206-6A0F-E044-A5FD-08F3D4D79959}">
+    <dsp:sp modelId="{7B6C085B-F4E7-5C41-82A9-EC78F238545F}">
       <dsp:nvSpPr>
         <dsp:cNvPr id="0" name=""/>
         <dsp:cNvSpPr/>
       </dsp:nvSpPr>
       <dsp:spPr>
         <a:xfrm>
-          <a:off x="5608242" y="1300678"/>
-          <a:ext cx="161041" cy="2780644"/>
+          <a:off x="5902524" y="1576871"/>
+          <a:ext cx="195260" cy="2447259"/>
         </a:xfrm>
         <a:custGeom>
           <a:avLst/>
@@ -20223,10 +20232,10 @@
                 <a:pt x="0" y="0"/>
               </a:moveTo>
               <a:lnTo>
-                <a:pt x="0" y="2780644"/>
+                <a:pt x="0" y="2447259"/>
               </a:lnTo>
               <a:lnTo>
-                <a:pt x="161041" y="2780644"/>
+                <a:pt x="195260" y="2447259"/>
               </a:lnTo>
             </a:path>
           </a:pathLst>
@@ -20260,15 +20269,15 @@
         <a:fontRef idx="minor"/>
       </dsp:style>
     </dsp:sp>
-    <dsp:sp modelId="{7B6C085B-F4E7-5C41-82A9-EC78F238545F}">
+    <dsp:sp modelId="{375C9D02-BD9C-954E-950E-F2A97E1197D5}">
       <dsp:nvSpPr>
         <dsp:cNvPr id="0" name=""/>
         <dsp:cNvSpPr/>
       </dsp:nvSpPr>
       <dsp:spPr>
         <a:xfrm>
-          <a:off x="5608242" y="1300678"/>
-          <a:ext cx="161041" cy="2018383"/>
+          <a:off x="5902524" y="1576871"/>
+          <a:ext cx="195260" cy="1523028"/>
         </a:xfrm>
         <a:custGeom>
           <a:avLst/>
@@ -20282,10 +20291,10 @@
                 <a:pt x="0" y="0"/>
               </a:moveTo>
               <a:lnTo>
-                <a:pt x="0" y="2018383"/>
+                <a:pt x="0" y="1523028"/>
               </a:lnTo>
               <a:lnTo>
-                <a:pt x="161041" y="2018383"/>
+                <a:pt x="195260" y="1523028"/>
               </a:lnTo>
             </a:path>
           </a:pathLst>
@@ -20319,15 +20328,15 @@
         <a:fontRef idx="minor"/>
       </dsp:style>
     </dsp:sp>
-    <dsp:sp modelId="{375C9D02-BD9C-954E-950E-F2A97E1197D5}">
+    <dsp:sp modelId="{5A561D9C-6FF4-2D4D-AAD5-1B8EDDE0E211}">
       <dsp:nvSpPr>
         <dsp:cNvPr id="0" name=""/>
         <dsp:cNvSpPr/>
       </dsp:nvSpPr>
       <dsp:spPr>
         <a:xfrm>
-          <a:off x="5608242" y="1300678"/>
-          <a:ext cx="161041" cy="1256121"/>
+          <a:off x="5902524" y="1576871"/>
+          <a:ext cx="195260" cy="598797"/>
         </a:xfrm>
         <a:custGeom>
           <a:avLst/>
@@ -20341,10 +20350,10 @@
                 <a:pt x="0" y="0"/>
               </a:moveTo>
               <a:lnTo>
-                <a:pt x="0" y="1256121"/>
+                <a:pt x="0" y="598797"/>
               </a:lnTo>
               <a:lnTo>
-                <a:pt x="161041" y="1256121"/>
+                <a:pt x="195260" y="598797"/>
               </a:lnTo>
             </a:path>
           </a:pathLst>
@@ -20378,15 +20387,15 @@
         <a:fontRef idx="minor"/>
       </dsp:style>
     </dsp:sp>
-    <dsp:sp modelId="{5A561D9C-6FF4-2D4D-AAD5-1B8EDDE0E211}">
+    <dsp:sp modelId="{89A41B80-14D7-2443-88A1-A7907013552A}">
       <dsp:nvSpPr>
         <dsp:cNvPr id="0" name=""/>
         <dsp:cNvSpPr/>
       </dsp:nvSpPr>
       <dsp:spPr>
         <a:xfrm>
-          <a:off x="5608242" y="1300678"/>
-          <a:ext cx="161041" cy="493859"/>
+          <a:off x="4060571" y="652640"/>
+          <a:ext cx="2362646" cy="273364"/>
         </a:xfrm>
         <a:custGeom>
           <a:avLst/>
@@ -20400,10 +20409,72 @@
                 <a:pt x="0" y="0"/>
               </a:moveTo>
               <a:lnTo>
-                <a:pt x="0" y="493859"/>
+                <a:pt x="0" y="136682"/>
               </a:lnTo>
               <a:lnTo>
-                <a:pt x="161041" y="493859"/>
+                <a:pt x="2362646" y="136682"/>
+              </a:lnTo>
+              <a:lnTo>
+                <a:pt x="2362646" y="273364"/>
+              </a:lnTo>
+            </a:path>
+          </a:pathLst>
+        </a:custGeom>
+        <a:noFill/>
+        <a:ln w="19050" cap="flat" cmpd="sng" algn="ctr">
+          <a:solidFill>
+            <a:schemeClr val="accent1">
+              <a:shade val="60000"/>
+              <a:hueOff val="0"/>
+              <a:satOff val="0"/>
+              <a:lumOff val="0"/>
+              <a:alphaOff val="0"/>
+            </a:schemeClr>
+          </a:solidFill>
+          <a:prstDash val="solid"/>
+          <a:miter lim="800000"/>
+        </a:ln>
+        <a:effectLst/>
+      </dsp:spPr>
+      <dsp:style>
+        <a:lnRef idx="2">
+          <a:scrgbClr r="0" g="0" b="0"/>
+        </a:lnRef>
+        <a:fillRef idx="0">
+          <a:scrgbClr r="0" g="0" b="0"/>
+        </a:fillRef>
+        <a:effectRef idx="0">
+          <a:scrgbClr r="0" g="0" b="0"/>
+        </a:effectRef>
+        <a:fontRef idx="minor"/>
+      </dsp:style>
+    </dsp:sp>
+    <dsp:sp modelId="{D853EF29-5940-0048-BE61-7B42C478CBE1}">
+      <dsp:nvSpPr>
+        <dsp:cNvPr id="0" name=""/>
+        <dsp:cNvSpPr/>
+      </dsp:nvSpPr>
+      <dsp:spPr>
+        <a:xfrm>
+          <a:off x="4327426" y="1576871"/>
+          <a:ext cx="195260" cy="2447259"/>
+        </a:xfrm>
+        <a:custGeom>
+          <a:avLst/>
+          <a:gdLst/>
+          <a:ahLst/>
+          <a:cxnLst/>
+          <a:rect l="0" t="0" r="0" b="0"/>
+          <a:pathLst>
+            <a:path>
+              <a:moveTo>
+                <a:pt x="0" y="0"/>
+              </a:moveTo>
+              <a:lnTo>
+                <a:pt x="0" y="2447259"/>
+              </a:lnTo>
+              <a:lnTo>
+                <a:pt x="195260" y="2447259"/>
               </a:lnTo>
             </a:path>
           </a:pathLst>
@@ -20437,15 +20508,15 @@
         <a:fontRef idx="minor"/>
       </dsp:style>
     </dsp:sp>
-    <dsp:sp modelId="{89A41B80-14D7-2443-88A1-A7907013552A}">
+    <dsp:sp modelId="{F0AB9FDC-589E-184C-BBA0-4828E9C7B3F5}">
       <dsp:nvSpPr>
         <dsp:cNvPr id="0" name=""/>
         <dsp:cNvSpPr/>
       </dsp:nvSpPr>
       <dsp:spPr>
         <a:xfrm>
-          <a:off x="4089086" y="538416"/>
-          <a:ext cx="1948598" cy="225457"/>
+          <a:off x="4327426" y="1576871"/>
+          <a:ext cx="195260" cy="1523028"/>
         </a:xfrm>
         <a:custGeom>
           <a:avLst/>
@@ -20459,13 +20530,131 @@
                 <a:pt x="0" y="0"/>
               </a:moveTo>
               <a:lnTo>
-                <a:pt x="0" y="112728"/>
+                <a:pt x="0" y="1523028"/>
               </a:lnTo>
               <a:lnTo>
-                <a:pt x="1948598" y="112728"/>
+                <a:pt x="195260" y="1523028"/>
+              </a:lnTo>
+            </a:path>
+          </a:pathLst>
+        </a:custGeom>
+        <a:noFill/>
+        <a:ln w="19050" cap="flat" cmpd="sng" algn="ctr">
+          <a:solidFill>
+            <a:schemeClr val="accent1">
+              <a:shade val="80000"/>
+              <a:hueOff val="0"/>
+              <a:satOff val="0"/>
+              <a:lumOff val="0"/>
+              <a:alphaOff val="0"/>
+            </a:schemeClr>
+          </a:solidFill>
+          <a:prstDash val="solid"/>
+          <a:miter lim="800000"/>
+        </a:ln>
+        <a:effectLst/>
+      </dsp:spPr>
+      <dsp:style>
+        <a:lnRef idx="2">
+          <a:scrgbClr r="0" g="0" b="0"/>
+        </a:lnRef>
+        <a:fillRef idx="0">
+          <a:scrgbClr r="0" g="0" b="0"/>
+        </a:fillRef>
+        <a:effectRef idx="0">
+          <a:scrgbClr r="0" g="0" b="0"/>
+        </a:effectRef>
+        <a:fontRef idx="minor"/>
+      </dsp:style>
+    </dsp:sp>
+    <dsp:sp modelId="{97D043BA-F485-3A42-B37A-A45D562BFC64}">
+      <dsp:nvSpPr>
+        <dsp:cNvPr id="0" name=""/>
+        <dsp:cNvSpPr/>
+      </dsp:nvSpPr>
+      <dsp:spPr>
+        <a:xfrm>
+          <a:off x="4327426" y="1576871"/>
+          <a:ext cx="195260" cy="598797"/>
+        </a:xfrm>
+        <a:custGeom>
+          <a:avLst/>
+          <a:gdLst/>
+          <a:ahLst/>
+          <a:cxnLst/>
+          <a:rect l="0" t="0" r="0" b="0"/>
+          <a:pathLst>
+            <a:path>
+              <a:moveTo>
+                <a:pt x="0" y="0"/>
+              </a:moveTo>
+              <a:lnTo>
+                <a:pt x="0" y="598797"/>
               </a:lnTo>
               <a:lnTo>
-                <a:pt x="1948598" y="225457"/>
+                <a:pt x="195260" y="598797"/>
+              </a:lnTo>
+            </a:path>
+          </a:pathLst>
+        </a:custGeom>
+        <a:noFill/>
+        <a:ln w="19050" cap="flat" cmpd="sng" algn="ctr">
+          <a:solidFill>
+            <a:schemeClr val="accent1">
+              <a:shade val="80000"/>
+              <a:hueOff val="0"/>
+              <a:satOff val="0"/>
+              <a:lumOff val="0"/>
+              <a:alphaOff val="0"/>
+            </a:schemeClr>
+          </a:solidFill>
+          <a:prstDash val="solid"/>
+          <a:miter lim="800000"/>
+        </a:ln>
+        <a:effectLst/>
+      </dsp:spPr>
+      <dsp:style>
+        <a:lnRef idx="2">
+          <a:scrgbClr r="0" g="0" b="0"/>
+        </a:lnRef>
+        <a:fillRef idx="0">
+          <a:scrgbClr r="0" g="0" b="0"/>
+        </a:fillRef>
+        <a:effectRef idx="0">
+          <a:scrgbClr r="0" g="0" b="0"/>
+        </a:effectRef>
+        <a:fontRef idx="minor"/>
+      </dsp:style>
+    </dsp:sp>
+    <dsp:sp modelId="{3CB410B5-B416-7849-B459-5A962C9E8CAE}">
+      <dsp:nvSpPr>
+        <dsp:cNvPr id="0" name=""/>
+        <dsp:cNvSpPr/>
+      </dsp:nvSpPr>
+      <dsp:spPr>
+        <a:xfrm>
+          <a:off x="4060571" y="652640"/>
+          <a:ext cx="787548" cy="273364"/>
+        </a:xfrm>
+        <a:custGeom>
+          <a:avLst/>
+          <a:gdLst/>
+          <a:ahLst/>
+          <a:cxnLst/>
+          <a:rect l="0" t="0" r="0" b="0"/>
+          <a:pathLst>
+            <a:path>
+              <a:moveTo>
+                <a:pt x="0" y="0"/>
+              </a:moveTo>
+              <a:lnTo>
+                <a:pt x="0" y="136682"/>
+              </a:lnTo>
+              <a:lnTo>
+                <a:pt x="787548" y="136682"/>
+              </a:lnTo>
+              <a:lnTo>
+                <a:pt x="787548" y="273364"/>
               </a:lnTo>
             </a:path>
           </a:pathLst>
@@ -20499,15 +20688,15 @@
         <a:fontRef idx="minor"/>
       </dsp:style>
     </dsp:sp>
-    <dsp:sp modelId="{D853EF29-5940-0048-BE61-7B42C478CBE1}">
+    <dsp:sp modelId="{312D0D41-5CF4-D342-8F48-0FDFFD86B1F0}">
       <dsp:nvSpPr>
         <dsp:cNvPr id="0" name=""/>
         <dsp:cNvSpPr/>
       </dsp:nvSpPr>
       <dsp:spPr>
         <a:xfrm>
-          <a:off x="4309176" y="1300678"/>
-          <a:ext cx="161041" cy="2018383"/>
+          <a:off x="2752328" y="1576871"/>
+          <a:ext cx="195260" cy="2447259"/>
         </a:xfrm>
         <a:custGeom>
           <a:avLst/>
@@ -20521,10 +20710,10 @@
                 <a:pt x="0" y="0"/>
               </a:moveTo>
               <a:lnTo>
-                <a:pt x="0" y="2018383"/>
+                <a:pt x="0" y="2447259"/>
               </a:lnTo>
               <a:lnTo>
-                <a:pt x="161041" y="2018383"/>
+                <a:pt x="195260" y="2447259"/>
               </a:lnTo>
             </a:path>
           </a:pathLst>
@@ -20558,15 +20747,15 @@
         <a:fontRef idx="minor"/>
       </dsp:style>
     </dsp:sp>
-    <dsp:sp modelId="{F0AB9FDC-589E-184C-BBA0-4828E9C7B3F5}">
+    <dsp:sp modelId="{C387BB6B-C6A7-1140-AB3E-D359B07E2050}">
       <dsp:nvSpPr>
         <dsp:cNvPr id="0" name=""/>
         <dsp:cNvSpPr/>
       </dsp:nvSpPr>
       <dsp:spPr>
         <a:xfrm>
-          <a:off x="4309176" y="1300678"/>
-          <a:ext cx="161041" cy="1256121"/>
+          <a:off x="2752328" y="1576871"/>
+          <a:ext cx="195260" cy="1523028"/>
         </a:xfrm>
         <a:custGeom>
           <a:avLst/>
@@ -20580,10 +20769,10 @@
                 <a:pt x="0" y="0"/>
               </a:moveTo>
               <a:lnTo>
-                <a:pt x="0" y="1256121"/>
+                <a:pt x="0" y="1523028"/>
               </a:lnTo>
               <a:lnTo>
-                <a:pt x="161041" y="1256121"/>
+                <a:pt x="195260" y="1523028"/>
               </a:lnTo>
             </a:path>
           </a:pathLst>
@@ -20617,15 +20806,15 @@
         <a:fontRef idx="minor"/>
       </dsp:style>
     </dsp:sp>
-    <dsp:sp modelId="{97D043BA-F485-3A42-B37A-A45D562BFC64}">
+    <dsp:sp modelId="{98EF5ED1-DAEC-3C47-A9F0-FE1B6B900A99}">
       <dsp:nvSpPr>
         <dsp:cNvPr id="0" name=""/>
         <dsp:cNvSpPr/>
       </dsp:nvSpPr>
       <dsp:spPr>
         <a:xfrm>
-          <a:off x="4309176" y="1300678"/>
-          <a:ext cx="161041" cy="493859"/>
+          <a:off x="2752328" y="1576871"/>
+          <a:ext cx="195260" cy="598797"/>
         </a:xfrm>
         <a:custGeom>
           <a:avLst/>
@@ -20639,10 +20828,10 @@
                 <a:pt x="0" y="0"/>
               </a:moveTo>
               <a:lnTo>
-                <a:pt x="0" y="493859"/>
+                <a:pt x="0" y="598797"/>
               </a:lnTo>
               <a:lnTo>
-                <a:pt x="161041" y="493859"/>
+                <a:pt x="195260" y="598797"/>
               </a:lnTo>
             </a:path>
           </a:pathLst>
@@ -20676,15 +20865,15 @@
         <a:fontRef idx="minor"/>
       </dsp:style>
     </dsp:sp>
-    <dsp:sp modelId="{3CB410B5-B416-7849-B459-5A962C9E8CAE}">
+    <dsp:sp modelId="{BF9C65A5-C5F5-0E46-9055-AC2648C002EE}">
       <dsp:nvSpPr>
         <dsp:cNvPr id="0" name=""/>
         <dsp:cNvSpPr/>
       </dsp:nvSpPr>
       <dsp:spPr>
         <a:xfrm>
-          <a:off x="4089086" y="538416"/>
-          <a:ext cx="649532" cy="225457"/>
+          <a:off x="3273022" y="652640"/>
+          <a:ext cx="787548" cy="273364"/>
         </a:xfrm>
         <a:custGeom>
           <a:avLst/>
@@ -20695,16 +20884,16 @@
           <a:pathLst>
             <a:path>
               <a:moveTo>
-                <a:pt x="0" y="0"/>
+                <a:pt x="787548" y="0"/>
               </a:moveTo>
               <a:lnTo>
-                <a:pt x="0" y="112728"/>
+                <a:pt x="787548" y="136682"/>
               </a:lnTo>
               <a:lnTo>
-                <a:pt x="649532" y="112728"/>
+                <a:pt x="0" y="136682"/>
               </a:lnTo>
               <a:lnTo>
-                <a:pt x="649532" y="225457"/>
+                <a:pt x="0" y="273364"/>
               </a:lnTo>
             </a:path>
           </a:pathLst>
@@ -20738,15 +20927,15 @@
         <a:fontRef idx="minor"/>
       </dsp:style>
     </dsp:sp>
-    <dsp:sp modelId="{312D0D41-5CF4-D342-8F48-0FDFFD86B1F0}">
+    <dsp:sp modelId="{F0EC5A6C-12AE-6E44-B761-CF66AE16A88B}">
       <dsp:nvSpPr>
         <dsp:cNvPr id="0" name=""/>
         <dsp:cNvSpPr/>
       </dsp:nvSpPr>
       <dsp:spPr>
         <a:xfrm>
-          <a:off x="3010110" y="1300678"/>
-          <a:ext cx="161041" cy="2018383"/>
+          <a:off x="1177231" y="1576871"/>
+          <a:ext cx="195260" cy="2447259"/>
         </a:xfrm>
         <a:custGeom>
           <a:avLst/>
@@ -20760,10 +20949,10 @@
                 <a:pt x="0" y="0"/>
               </a:moveTo>
               <a:lnTo>
-                <a:pt x="0" y="2018383"/>
+                <a:pt x="0" y="2447259"/>
               </a:lnTo>
               <a:lnTo>
-                <a:pt x="161041" y="2018383"/>
+                <a:pt x="195260" y="2447259"/>
               </a:lnTo>
             </a:path>
           </a:pathLst>
@@ -20797,15 +20986,15 @@
         <a:fontRef idx="minor"/>
       </dsp:style>
     </dsp:sp>
-    <dsp:sp modelId="{C387BB6B-C6A7-1140-AB3E-D359B07E2050}">
+    <dsp:sp modelId="{44D91E12-C830-5042-95BD-DE100E863AEC}">
       <dsp:nvSpPr>
         <dsp:cNvPr id="0" name=""/>
         <dsp:cNvSpPr/>
       </dsp:nvSpPr>
       <dsp:spPr>
         <a:xfrm>
-          <a:off x="3010110" y="1300678"/>
-          <a:ext cx="161041" cy="1256121"/>
+          <a:off x="1177231" y="1576871"/>
+          <a:ext cx="195260" cy="1523028"/>
         </a:xfrm>
         <a:custGeom>
           <a:avLst/>
@@ -20819,10 +21008,10 @@
                 <a:pt x="0" y="0"/>
               </a:moveTo>
               <a:lnTo>
-                <a:pt x="0" y="1256121"/>
+                <a:pt x="0" y="1523028"/>
               </a:lnTo>
               <a:lnTo>
-                <a:pt x="161041" y="1256121"/>
+                <a:pt x="195260" y="1523028"/>
               </a:lnTo>
             </a:path>
           </a:pathLst>
@@ -20856,15 +21045,15 @@
         <a:fontRef idx="minor"/>
       </dsp:style>
     </dsp:sp>
-    <dsp:sp modelId="{98EF5ED1-DAEC-3C47-A9F0-FE1B6B900A99}">
+    <dsp:sp modelId="{5D90D505-34BA-F345-9D64-69C4C5CF194C}">
       <dsp:nvSpPr>
         <dsp:cNvPr id="0" name=""/>
         <dsp:cNvSpPr/>
       </dsp:nvSpPr>
       <dsp:spPr>
         <a:xfrm>
-          <a:off x="3010110" y="1300678"/>
-          <a:ext cx="161041" cy="493859"/>
+          <a:off x="1177231" y="1576871"/>
+          <a:ext cx="195260" cy="598797"/>
         </a:xfrm>
         <a:custGeom>
           <a:avLst/>
@@ -20878,10 +21067,10 @@
                 <a:pt x="0" y="0"/>
               </a:moveTo>
               <a:lnTo>
-                <a:pt x="0" y="493859"/>
+                <a:pt x="0" y="598797"/>
               </a:lnTo>
               <a:lnTo>
-                <a:pt x="161041" y="493859"/>
+                <a:pt x="195260" y="598797"/>
               </a:lnTo>
             </a:path>
           </a:pathLst>
@@ -20915,15 +21104,15 @@
         <a:fontRef idx="minor"/>
       </dsp:style>
     </dsp:sp>
-    <dsp:sp modelId="{BF9C65A5-C5F5-0E46-9055-AC2648C002EE}">
+    <dsp:sp modelId="{A731BC4F-EE78-524B-B75A-91DBE4DA6D06}">
       <dsp:nvSpPr>
         <dsp:cNvPr id="0" name=""/>
         <dsp:cNvSpPr/>
       </dsp:nvSpPr>
       <dsp:spPr>
         <a:xfrm>
-          <a:off x="3439554" y="538416"/>
-          <a:ext cx="649532" cy="225457"/>
+          <a:off x="1697924" y="652640"/>
+          <a:ext cx="2362646" cy="273364"/>
         </a:xfrm>
         <a:custGeom>
           <a:avLst/>
@@ -20934,16 +21123,16 @@
           <a:pathLst>
             <a:path>
               <a:moveTo>
-                <a:pt x="649532" y="0"/>
+                <a:pt x="2362646" y="0"/>
               </a:moveTo>
               <a:lnTo>
-                <a:pt x="649532" y="112728"/>
+                <a:pt x="2362646" y="136682"/>
               </a:lnTo>
               <a:lnTo>
-                <a:pt x="0" y="112728"/>
+                <a:pt x="0" y="136682"/>
               </a:lnTo>
               <a:lnTo>
-                <a:pt x="0" y="225457"/>
+                <a:pt x="0" y="273364"/>
               </a:lnTo>
             </a:path>
           </a:pathLst>
@@ -20977,304 +21166,6 @@
         <a:fontRef idx="minor"/>
       </dsp:style>
     </dsp:sp>
-    <dsp:sp modelId="{F0EC5A6C-12AE-6E44-B761-CF66AE16A88B}">
-      <dsp:nvSpPr>
-        <dsp:cNvPr id="0" name=""/>
-        <dsp:cNvSpPr/>
-      </dsp:nvSpPr>
-      <dsp:spPr>
-        <a:xfrm>
-          <a:off x="1711045" y="1300678"/>
-          <a:ext cx="161041" cy="2780644"/>
-        </a:xfrm>
-        <a:custGeom>
-          <a:avLst/>
-          <a:gdLst/>
-          <a:ahLst/>
-          <a:cxnLst/>
-          <a:rect l="0" t="0" r="0" b="0"/>
-          <a:pathLst>
-            <a:path>
-              <a:moveTo>
-                <a:pt x="0" y="0"/>
-              </a:moveTo>
-              <a:lnTo>
-                <a:pt x="0" y="2780644"/>
-              </a:lnTo>
-              <a:lnTo>
-                <a:pt x="161041" y="2780644"/>
-              </a:lnTo>
-            </a:path>
-          </a:pathLst>
-        </a:custGeom>
-        <a:noFill/>
-        <a:ln w="19050" cap="flat" cmpd="sng" algn="ctr">
-          <a:solidFill>
-            <a:schemeClr val="accent1">
-              <a:shade val="80000"/>
-              <a:hueOff val="0"/>
-              <a:satOff val="0"/>
-              <a:lumOff val="0"/>
-              <a:alphaOff val="0"/>
-            </a:schemeClr>
-          </a:solidFill>
-          <a:prstDash val="solid"/>
-          <a:miter lim="800000"/>
-        </a:ln>
-        <a:effectLst/>
-      </dsp:spPr>
-      <dsp:style>
-        <a:lnRef idx="2">
-          <a:scrgbClr r="0" g="0" b="0"/>
-        </a:lnRef>
-        <a:fillRef idx="0">
-          <a:scrgbClr r="0" g="0" b="0"/>
-        </a:fillRef>
-        <a:effectRef idx="0">
-          <a:scrgbClr r="0" g="0" b="0"/>
-        </a:effectRef>
-        <a:fontRef idx="minor"/>
-      </dsp:style>
-    </dsp:sp>
-    <dsp:sp modelId="{5F428E68-6D3A-5748-9985-4CB72225EF95}">
-      <dsp:nvSpPr>
-        <dsp:cNvPr id="0" name=""/>
-        <dsp:cNvSpPr/>
-      </dsp:nvSpPr>
-      <dsp:spPr>
-        <a:xfrm>
-          <a:off x="1711045" y="1300678"/>
-          <a:ext cx="161041" cy="2018383"/>
-        </a:xfrm>
-        <a:custGeom>
-          <a:avLst/>
-          <a:gdLst/>
-          <a:ahLst/>
-          <a:cxnLst/>
-          <a:rect l="0" t="0" r="0" b="0"/>
-          <a:pathLst>
-            <a:path>
-              <a:moveTo>
-                <a:pt x="0" y="0"/>
-              </a:moveTo>
-              <a:lnTo>
-                <a:pt x="0" y="2018383"/>
-              </a:lnTo>
-              <a:lnTo>
-                <a:pt x="161041" y="2018383"/>
-              </a:lnTo>
-            </a:path>
-          </a:pathLst>
-        </a:custGeom>
-        <a:noFill/>
-        <a:ln w="19050" cap="flat" cmpd="sng" algn="ctr">
-          <a:solidFill>
-            <a:schemeClr val="accent1">
-              <a:shade val="80000"/>
-              <a:hueOff val="0"/>
-              <a:satOff val="0"/>
-              <a:lumOff val="0"/>
-              <a:alphaOff val="0"/>
-            </a:schemeClr>
-          </a:solidFill>
-          <a:prstDash val="solid"/>
-          <a:miter lim="800000"/>
-        </a:ln>
-        <a:effectLst/>
-      </dsp:spPr>
-      <dsp:style>
-        <a:lnRef idx="2">
-          <a:scrgbClr r="0" g="0" b="0"/>
-        </a:lnRef>
-        <a:fillRef idx="0">
-          <a:scrgbClr r="0" g="0" b="0"/>
-        </a:fillRef>
-        <a:effectRef idx="0">
-          <a:scrgbClr r="0" g="0" b="0"/>
-        </a:effectRef>
-        <a:fontRef idx="minor"/>
-      </dsp:style>
-    </dsp:sp>
-    <dsp:sp modelId="{44D91E12-C830-5042-95BD-DE100E863AEC}">
-      <dsp:nvSpPr>
-        <dsp:cNvPr id="0" name=""/>
-        <dsp:cNvSpPr/>
-      </dsp:nvSpPr>
-      <dsp:spPr>
-        <a:xfrm>
-          <a:off x="1711045" y="1300678"/>
-          <a:ext cx="161041" cy="1256121"/>
-        </a:xfrm>
-        <a:custGeom>
-          <a:avLst/>
-          <a:gdLst/>
-          <a:ahLst/>
-          <a:cxnLst/>
-          <a:rect l="0" t="0" r="0" b="0"/>
-          <a:pathLst>
-            <a:path>
-              <a:moveTo>
-                <a:pt x="0" y="0"/>
-              </a:moveTo>
-              <a:lnTo>
-                <a:pt x="0" y="1256121"/>
-              </a:lnTo>
-              <a:lnTo>
-                <a:pt x="161041" y="1256121"/>
-              </a:lnTo>
-            </a:path>
-          </a:pathLst>
-        </a:custGeom>
-        <a:noFill/>
-        <a:ln w="19050" cap="flat" cmpd="sng" algn="ctr">
-          <a:solidFill>
-            <a:schemeClr val="accent1">
-              <a:shade val="80000"/>
-              <a:hueOff val="0"/>
-              <a:satOff val="0"/>
-              <a:lumOff val="0"/>
-              <a:alphaOff val="0"/>
-            </a:schemeClr>
-          </a:solidFill>
-          <a:prstDash val="solid"/>
-          <a:miter lim="800000"/>
-        </a:ln>
-        <a:effectLst/>
-      </dsp:spPr>
-      <dsp:style>
-        <a:lnRef idx="2">
-          <a:scrgbClr r="0" g="0" b="0"/>
-        </a:lnRef>
-        <a:fillRef idx="0">
-          <a:scrgbClr r="0" g="0" b="0"/>
-        </a:fillRef>
-        <a:effectRef idx="0">
-          <a:scrgbClr r="0" g="0" b="0"/>
-        </a:effectRef>
-        <a:fontRef idx="minor"/>
-      </dsp:style>
-    </dsp:sp>
-    <dsp:sp modelId="{5D90D505-34BA-F345-9D64-69C4C5CF194C}">
-      <dsp:nvSpPr>
-        <dsp:cNvPr id="0" name=""/>
-        <dsp:cNvSpPr/>
-      </dsp:nvSpPr>
-      <dsp:spPr>
-        <a:xfrm>
-          <a:off x="1711045" y="1300678"/>
-          <a:ext cx="161041" cy="493859"/>
-        </a:xfrm>
-        <a:custGeom>
-          <a:avLst/>
-          <a:gdLst/>
-          <a:ahLst/>
-          <a:cxnLst/>
-          <a:rect l="0" t="0" r="0" b="0"/>
-          <a:pathLst>
-            <a:path>
-              <a:moveTo>
-                <a:pt x="0" y="0"/>
-              </a:moveTo>
-              <a:lnTo>
-                <a:pt x="0" y="493859"/>
-              </a:lnTo>
-              <a:lnTo>
-                <a:pt x="161041" y="493859"/>
-              </a:lnTo>
-            </a:path>
-          </a:pathLst>
-        </a:custGeom>
-        <a:noFill/>
-        <a:ln w="19050" cap="flat" cmpd="sng" algn="ctr">
-          <a:solidFill>
-            <a:schemeClr val="accent1">
-              <a:shade val="80000"/>
-              <a:hueOff val="0"/>
-              <a:satOff val="0"/>
-              <a:lumOff val="0"/>
-              <a:alphaOff val="0"/>
-            </a:schemeClr>
-          </a:solidFill>
-          <a:prstDash val="solid"/>
-          <a:miter lim="800000"/>
-        </a:ln>
-        <a:effectLst/>
-      </dsp:spPr>
-      <dsp:style>
-        <a:lnRef idx="2">
-          <a:scrgbClr r="0" g="0" b="0"/>
-        </a:lnRef>
-        <a:fillRef idx="0">
-          <a:scrgbClr r="0" g="0" b="0"/>
-        </a:fillRef>
-        <a:effectRef idx="0">
-          <a:scrgbClr r="0" g="0" b="0"/>
-        </a:effectRef>
-        <a:fontRef idx="minor"/>
-      </dsp:style>
-    </dsp:sp>
-    <dsp:sp modelId="{A731BC4F-EE78-524B-B75A-91DBE4DA6D06}">
-      <dsp:nvSpPr>
-        <dsp:cNvPr id="0" name=""/>
-        <dsp:cNvSpPr/>
-      </dsp:nvSpPr>
-      <dsp:spPr>
-        <a:xfrm>
-          <a:off x="2140488" y="538416"/>
-          <a:ext cx="1948598" cy="225457"/>
-        </a:xfrm>
-        <a:custGeom>
-          <a:avLst/>
-          <a:gdLst/>
-          <a:ahLst/>
-          <a:cxnLst/>
-          <a:rect l="0" t="0" r="0" b="0"/>
-          <a:pathLst>
-            <a:path>
-              <a:moveTo>
-                <a:pt x="1948598" y="0"/>
-              </a:moveTo>
-              <a:lnTo>
-                <a:pt x="1948598" y="112728"/>
-              </a:lnTo>
-              <a:lnTo>
-                <a:pt x="0" y="112728"/>
-              </a:lnTo>
-              <a:lnTo>
-                <a:pt x="0" y="225457"/>
-              </a:lnTo>
-            </a:path>
-          </a:pathLst>
-        </a:custGeom>
-        <a:noFill/>
-        <a:ln w="19050" cap="flat" cmpd="sng" algn="ctr">
-          <a:solidFill>
-            <a:schemeClr val="accent1">
-              <a:shade val="60000"/>
-              <a:hueOff val="0"/>
-              <a:satOff val="0"/>
-              <a:lumOff val="0"/>
-              <a:alphaOff val="0"/>
-            </a:schemeClr>
-          </a:solidFill>
-          <a:prstDash val="solid"/>
-          <a:miter lim="800000"/>
-        </a:ln>
-        <a:effectLst/>
-      </dsp:spPr>
-      <dsp:style>
-        <a:lnRef idx="2">
-          <a:scrgbClr r="0" g="0" b="0"/>
-        </a:lnRef>
-        <a:fillRef idx="0">
-          <a:scrgbClr r="0" g="0" b="0"/>
-        </a:fillRef>
-        <a:effectRef idx="0">
-          <a:scrgbClr r="0" g="0" b="0"/>
-        </a:effectRef>
-        <a:fontRef idx="minor"/>
-      </dsp:style>
-    </dsp:sp>
     <dsp:sp modelId="{87CB75FF-A3C9-1C43-83C1-729B235B27AF}">
       <dsp:nvSpPr>
         <dsp:cNvPr id="0" name=""/>
@@ -21282,8 +21173,8 @@
       </dsp:nvSpPr>
       <dsp:spPr>
         <a:xfrm>
-          <a:off x="3552282" y="1612"/>
-          <a:ext cx="1073608" cy="536804"/>
+          <a:off x="3409704" y="1773"/>
+          <a:ext cx="1301733" cy="650866"/>
         </a:xfrm>
         <a:prstGeom prst="rect">
           <a:avLst/>
@@ -21356,8 +21247,8 @@
         </a:p>
       </dsp:txBody>
       <dsp:txXfrm>
-        <a:off x="3552282" y="1612"/>
-        <a:ext cx="1073608" cy="536804"/>
+        <a:off x="3409704" y="1773"/>
+        <a:ext cx="1301733" cy="650866"/>
       </dsp:txXfrm>
     </dsp:sp>
     <dsp:sp modelId="{A1DCC881-6B5A-2748-8DBB-3929CDCBCD66}">
@@ -21367,8 +21258,8 @@
       </dsp:nvSpPr>
       <dsp:spPr>
         <a:xfrm>
-          <a:off x="1603684" y="763874"/>
-          <a:ext cx="1073608" cy="536804"/>
+          <a:off x="1047057" y="926004"/>
+          <a:ext cx="1301733" cy="650866"/>
         </a:xfrm>
         <a:prstGeom prst="rect">
           <a:avLst/>
@@ -21437,8 +21328,8 @@
         </a:p>
       </dsp:txBody>
       <dsp:txXfrm>
-        <a:off x="1603684" y="763874"/>
-        <a:ext cx="1073608" cy="536804"/>
+        <a:off x="1047057" y="926004"/>
+        <a:ext cx="1301733" cy="650866"/>
       </dsp:txXfrm>
     </dsp:sp>
     <dsp:sp modelId="{6AFC0196-01F6-0240-99F1-2361465AF458}">
@@ -21448,8 +21339,8 @@
       </dsp:nvSpPr>
       <dsp:spPr>
         <a:xfrm>
-          <a:off x="1872086" y="1526136"/>
-          <a:ext cx="1073608" cy="536804"/>
+          <a:off x="1372491" y="1850235"/>
+          <a:ext cx="1301733" cy="650866"/>
         </a:xfrm>
         <a:prstGeom prst="rect">
           <a:avLst/>
@@ -21523,8 +21414,8 @@
         </a:p>
       </dsp:txBody>
       <dsp:txXfrm>
-        <a:off x="1872086" y="1526136"/>
-        <a:ext cx="1073608" cy="536804"/>
+        <a:off x="1372491" y="1850235"/>
+        <a:ext cx="1301733" cy="650866"/>
       </dsp:txXfrm>
     </dsp:sp>
     <dsp:sp modelId="{9BD1E258-8689-464A-A587-4EB3F5827A63}">
@@ -21534,28 +21425,25 @@
       </dsp:nvSpPr>
       <dsp:spPr>
         <a:xfrm>
-          <a:off x="1872086" y="2288397"/>
-          <a:ext cx="1073608" cy="536804"/>
+          <a:off x="1372491" y="2774466"/>
+          <a:ext cx="1301733" cy="650866"/>
         </a:xfrm>
         <a:prstGeom prst="rect">
           <a:avLst/>
         </a:prstGeom>
         <a:solidFill>
-          <a:schemeClr val="accent1">
-            <a:hueOff val="0"/>
-            <a:satOff val="0"/>
-            <a:lumOff val="0"/>
-            <a:alphaOff val="0"/>
-          </a:schemeClr>
+          <a:prstClr val="white">
+            <a:lumMod val="75000"/>
+          </a:prstClr>
         </a:solidFill>
         <a:ln w="19050" cap="flat" cmpd="sng" algn="ctr">
           <a:solidFill>
-            <a:schemeClr val="lt1">
+            <a:prstClr val="white">
               <a:hueOff val="0"/>
               <a:satOff val="0"/>
               <a:lumOff val="0"/>
               <a:alphaOff val="0"/>
-            </a:schemeClr>
+            </a:prstClr>
           </a:solidFill>
           <a:prstDash val="solid"/>
           <a:miter lim="800000"/>
@@ -21597,99 +21485,28 @@
           </a:pPr>
           <a:r>
             <a:rPr lang="en-US" altLang="zh-TW" sz="1200" kern="1200" dirty="0">
+              <a:solidFill>
+                <a:prstClr val="white"/>
+              </a:solidFill>
               <a:latin typeface="Arial" panose="020B0604020202020204" pitchFamily="34" charset="0"/>
+              <a:ea typeface="+mn-ea"/>
               <a:cs typeface="Arial" panose="020B0604020202020204" pitchFamily="34" charset="0"/>
             </a:rPr>
             <a:t>Subset</a:t>
           </a:r>
           <a:endParaRPr lang="zh-TW" altLang="en-US" sz="1200" kern="1200" dirty="0">
+            <a:solidFill>
+              <a:prstClr val="white"/>
+            </a:solidFill>
             <a:latin typeface="Arial" panose="020B0604020202020204" pitchFamily="34" charset="0"/>
+            <a:ea typeface="+mn-ea"/>
             <a:cs typeface="Arial" panose="020B0604020202020204" pitchFamily="34" charset="0"/>
           </a:endParaRPr>
         </a:p>
       </dsp:txBody>
       <dsp:txXfrm>
-        <a:off x="1872086" y="2288397"/>
-        <a:ext cx="1073608" cy="536804"/>
-      </dsp:txXfrm>
-    </dsp:sp>
-    <dsp:sp modelId="{B985F0D8-2D18-A443-9D85-FB596BA7D682}">
-      <dsp:nvSpPr>
-        <dsp:cNvPr id="0" name=""/>
-        <dsp:cNvSpPr/>
-      </dsp:nvSpPr>
-      <dsp:spPr>
-        <a:xfrm>
-          <a:off x="1872086" y="3050659"/>
-          <a:ext cx="1073608" cy="536804"/>
-        </a:xfrm>
-        <a:prstGeom prst="rect">
-          <a:avLst/>
-        </a:prstGeom>
-        <a:solidFill>
-          <a:schemeClr val="bg1">
-            <a:lumMod val="75000"/>
-          </a:schemeClr>
-        </a:solidFill>
-        <a:ln w="19050" cap="flat" cmpd="sng" algn="ctr">
-          <a:solidFill>
-            <a:schemeClr val="lt1">
-              <a:hueOff val="0"/>
-              <a:satOff val="0"/>
-              <a:lumOff val="0"/>
-              <a:alphaOff val="0"/>
-            </a:schemeClr>
-          </a:solidFill>
-          <a:prstDash val="solid"/>
-          <a:miter lim="800000"/>
-        </a:ln>
-        <a:effectLst/>
-      </dsp:spPr>
-      <dsp:style>
-        <a:lnRef idx="2">
-          <a:scrgbClr r="0" g="0" b="0"/>
-        </a:lnRef>
-        <a:fillRef idx="1">
-          <a:scrgbClr r="0" g="0" b="0"/>
-        </a:fillRef>
-        <a:effectRef idx="0">
-          <a:scrgbClr r="0" g="0" b="0"/>
-        </a:effectRef>
-        <a:fontRef idx="minor">
-          <a:schemeClr val="lt1"/>
-        </a:fontRef>
-      </dsp:style>
-      <dsp:txBody>
-        <a:bodyPr spcFirstLastPara="0" vert="horz" wrap="square" lIns="7620" tIns="7620" rIns="7620" bIns="7620" numCol="1" spcCol="1270" anchor="ctr" anchorCtr="0">
-          <a:noAutofit/>
-        </a:bodyPr>
-        <a:lstStyle/>
-        <a:p>
-          <a:pPr marL="0" lvl="0" indent="0" algn="ctr" defTabSz="533400">
-            <a:lnSpc>
-              <a:spcPct val="90000"/>
-            </a:lnSpc>
-            <a:spcBef>
-              <a:spcPct val="0"/>
-            </a:spcBef>
-            <a:spcAft>
-              <a:spcPct val="35000"/>
-            </a:spcAft>
-            <a:buFont typeface="Arial" panose="020B0604020202020204" pitchFamily="34" charset="0"/>
-            <a:buNone/>
-          </a:pPr>
-          <a:r>
-            <a:rPr lang="en-US" sz="1200" kern="1200" dirty="0">
-              <a:latin typeface="Arial" panose="020B0604020202020204" pitchFamily="34" charset="0"/>
-              <a:cs typeface="Arial" panose="020B0604020202020204" pitchFamily="34" charset="0"/>
-            </a:rPr>
-            <a:t>Naive string matching</a:t>
-          </a:r>
-        </a:p>
-      </dsp:txBody>
-      <dsp:txXfrm>
-        <a:off x="1872086" y="3050659"/>
-        <a:ext cx="1073608" cy="536804"/>
+        <a:off x="1372491" y="2774466"/>
+        <a:ext cx="1301733" cy="650866"/>
       </dsp:txXfrm>
     </dsp:sp>
     <dsp:sp modelId="{5B7F08E5-1124-2143-9E15-06A29F73FB9F}">
@@ -21699,8 +21516,8 @@
       </dsp:nvSpPr>
       <dsp:spPr>
         <a:xfrm>
-          <a:off x="1872086" y="3812921"/>
-          <a:ext cx="1073608" cy="536804"/>
+          <a:off x="1372491" y="3698697"/>
+          <a:ext cx="1301733" cy="650866"/>
         </a:xfrm>
         <a:prstGeom prst="rect">
           <a:avLst/>
@@ -21771,8 +21588,8 @@
         </a:p>
       </dsp:txBody>
       <dsp:txXfrm>
-        <a:off x="1872086" y="3812921"/>
-        <a:ext cx="1073608" cy="536804"/>
+        <a:off x="1372491" y="3698697"/>
+        <a:ext cx="1301733" cy="650866"/>
       </dsp:txXfrm>
     </dsp:sp>
     <dsp:sp modelId="{57F2F2F1-DECF-A044-B0A4-203A150C93AF}">
@@ -21782,8 +21599,8 @@
       </dsp:nvSpPr>
       <dsp:spPr>
         <a:xfrm>
-          <a:off x="2902750" y="763874"/>
-          <a:ext cx="1073608" cy="536804"/>
+          <a:off x="2622155" y="926004"/>
+          <a:ext cx="1301733" cy="650866"/>
         </a:xfrm>
         <a:prstGeom prst="rect">
           <a:avLst/>
@@ -21856,8 +21673,8 @@
         </a:p>
       </dsp:txBody>
       <dsp:txXfrm>
-        <a:off x="2902750" y="763874"/>
-        <a:ext cx="1073608" cy="536804"/>
+        <a:off x="2622155" y="926004"/>
+        <a:ext cx="1301733" cy="650866"/>
       </dsp:txXfrm>
     </dsp:sp>
     <dsp:sp modelId="{A19848DA-1684-694E-8AB2-37795844922E}">
@@ -21867,8 +21684,8 @@
       </dsp:nvSpPr>
       <dsp:spPr>
         <a:xfrm>
-          <a:off x="3171152" y="1526136"/>
-          <a:ext cx="1073608" cy="536804"/>
+          <a:off x="2947589" y="1850235"/>
+          <a:ext cx="1301733" cy="650866"/>
         </a:xfrm>
         <a:prstGeom prst="rect">
           <a:avLst/>
@@ -21942,8 +21759,8 @@
         </a:p>
       </dsp:txBody>
       <dsp:txXfrm>
-        <a:off x="3171152" y="1526136"/>
-        <a:ext cx="1073608" cy="536804"/>
+        <a:off x="2947589" y="1850235"/>
+        <a:ext cx="1301733" cy="650866"/>
       </dsp:txXfrm>
     </dsp:sp>
     <dsp:sp modelId="{06395E12-08EB-C642-A2A2-1B2FCE15A2D0}">
@@ -21953,8 +21770,8 @@
       </dsp:nvSpPr>
       <dsp:spPr>
         <a:xfrm>
-          <a:off x="3171152" y="2288397"/>
-          <a:ext cx="1073608" cy="536804"/>
+          <a:off x="2947589" y="2774466"/>
+          <a:ext cx="1301733" cy="650866"/>
         </a:xfrm>
         <a:prstGeom prst="rect">
           <a:avLst/>
@@ -22024,8 +21841,8 @@
         </a:p>
       </dsp:txBody>
       <dsp:txXfrm>
-        <a:off x="3171152" y="2288397"/>
-        <a:ext cx="1073608" cy="536804"/>
+        <a:off x="2947589" y="2774466"/>
+        <a:ext cx="1301733" cy="650866"/>
       </dsp:txXfrm>
     </dsp:sp>
     <dsp:sp modelId="{10EC097E-C088-3548-A227-78CEAF79AF9A}">
@@ -22035,8 +21852,8 @@
       </dsp:nvSpPr>
       <dsp:spPr>
         <a:xfrm>
-          <a:off x="3171152" y="3050659"/>
-          <a:ext cx="1073608" cy="536804"/>
+          <a:off x="2947589" y="3698697"/>
+          <a:ext cx="1301733" cy="650866"/>
         </a:xfrm>
         <a:prstGeom prst="rect">
           <a:avLst/>
@@ -22103,8 +21920,8 @@
         </a:p>
       </dsp:txBody>
       <dsp:txXfrm>
-        <a:off x="3171152" y="3050659"/>
-        <a:ext cx="1073608" cy="536804"/>
+        <a:off x="2947589" y="3698697"/>
+        <a:ext cx="1301733" cy="650866"/>
       </dsp:txXfrm>
     </dsp:sp>
     <dsp:sp modelId="{3856B5D9-57AA-2F4D-BC56-5E17D7DCFD9D}">
@@ -22114,8 +21931,8 @@
       </dsp:nvSpPr>
       <dsp:spPr>
         <a:xfrm>
-          <a:off x="4201815" y="763874"/>
-          <a:ext cx="1073608" cy="536804"/>
+          <a:off x="4197253" y="926004"/>
+          <a:ext cx="1301733" cy="650866"/>
         </a:xfrm>
         <a:prstGeom prst="rect">
           <a:avLst/>
@@ -22188,8 +22005,8 @@
         </a:p>
       </dsp:txBody>
       <dsp:txXfrm>
-        <a:off x="4201815" y="763874"/>
-        <a:ext cx="1073608" cy="536804"/>
+        <a:off x="4197253" y="926004"/>
+        <a:ext cx="1301733" cy="650866"/>
       </dsp:txXfrm>
     </dsp:sp>
     <dsp:sp modelId="{9CA0242D-AB72-1B40-9E0B-6B6501A6D36F}">
@@ -22199,8 +22016,8 @@
       </dsp:nvSpPr>
       <dsp:spPr>
         <a:xfrm>
-          <a:off x="4470217" y="1526136"/>
-          <a:ext cx="1073608" cy="536804"/>
+          <a:off x="4522686" y="1850235"/>
+          <a:ext cx="1301733" cy="650866"/>
         </a:xfrm>
         <a:prstGeom prst="rect">
           <a:avLst/>
@@ -22274,8 +22091,8 @@
         </a:p>
       </dsp:txBody>
       <dsp:txXfrm>
-        <a:off x="4470217" y="1526136"/>
-        <a:ext cx="1073608" cy="536804"/>
+        <a:off x="4522686" y="1850235"/>
+        <a:ext cx="1301733" cy="650866"/>
       </dsp:txXfrm>
     </dsp:sp>
     <dsp:sp modelId="{B5F42C35-0833-CA41-83C3-29A41F7BF946}">
@@ -22285,8 +22102,8 @@
       </dsp:nvSpPr>
       <dsp:spPr>
         <a:xfrm>
-          <a:off x="4470217" y="2288397"/>
-          <a:ext cx="1073608" cy="536804"/>
+          <a:off x="4522686" y="2774466"/>
+          <a:ext cx="1301733" cy="650866"/>
         </a:xfrm>
         <a:prstGeom prst="rect">
           <a:avLst/>
@@ -22356,8 +22173,8 @@
         </a:p>
       </dsp:txBody>
       <dsp:txXfrm>
-        <a:off x="4470217" y="2288397"/>
-        <a:ext cx="1073608" cy="536804"/>
+        <a:off x="4522686" y="2774466"/>
+        <a:ext cx="1301733" cy="650866"/>
       </dsp:txXfrm>
     </dsp:sp>
     <dsp:sp modelId="{5F9D470D-2E93-1A4F-A151-DB3503B42AC1}">
@@ -22367,8 +22184,8 @@
       </dsp:nvSpPr>
       <dsp:spPr>
         <a:xfrm>
-          <a:off x="4470217" y="3050659"/>
-          <a:ext cx="1073608" cy="536804"/>
+          <a:off x="4522686" y="3698697"/>
+          <a:ext cx="1301733" cy="650866"/>
         </a:xfrm>
         <a:prstGeom prst="rect">
           <a:avLst/>
@@ -22435,8 +22252,8 @@
         </a:p>
       </dsp:txBody>
       <dsp:txXfrm>
-        <a:off x="4470217" y="3050659"/>
-        <a:ext cx="1073608" cy="536804"/>
+        <a:off x="4522686" y="3698697"/>
+        <a:ext cx="1301733" cy="650866"/>
       </dsp:txXfrm>
     </dsp:sp>
     <dsp:sp modelId="{05DF9195-C624-BF4B-AA8A-31F4470AD518}">
@@ -22446,25 +22263,28 @@
       </dsp:nvSpPr>
       <dsp:spPr>
         <a:xfrm>
-          <a:off x="5500881" y="763874"/>
-          <a:ext cx="1073608" cy="536804"/>
+          <a:off x="5772351" y="926004"/>
+          <a:ext cx="1301733" cy="650866"/>
         </a:xfrm>
         <a:prstGeom prst="rect">
           <a:avLst/>
         </a:prstGeom>
         <a:solidFill>
-          <a:schemeClr val="bg1">
-            <a:lumMod val="75000"/>
-          </a:schemeClr>
+          <a:srgbClr val="156082">
+            <a:hueOff val="0"/>
+            <a:satOff val="0"/>
+            <a:lumOff val="0"/>
+            <a:alphaOff val="0"/>
+          </a:srgbClr>
         </a:solidFill>
         <a:ln w="19050" cap="flat" cmpd="sng" algn="ctr">
           <a:solidFill>
-            <a:schemeClr val="lt1">
+            <a:prstClr val="white">
               <a:hueOff val="0"/>
               <a:satOff val="0"/>
               <a:lumOff val="0"/>
               <a:alphaOff val="0"/>
-            </a:schemeClr>
+            </a:prstClr>
           </a:solidFill>
           <a:prstDash val="solid"/>
           <a:miter lim="800000"/>
@@ -22505,20 +22325,28 @@
           </a:pPr>
           <a:r>
             <a:rPr lang="en-US" sz="1200" b="0" kern="1200" dirty="0">
+              <a:solidFill>
+                <a:prstClr val="white"/>
+              </a:solidFill>
               <a:latin typeface="Arial" panose="020B0604020202020204" pitchFamily="34" charset="0"/>
+              <a:ea typeface="+mn-ea"/>
               <a:cs typeface="Arial" panose="020B0604020202020204" pitchFamily="34" charset="0"/>
             </a:rPr>
             <a:t>Greedy Algorithms</a:t>
           </a:r>
           <a:endParaRPr lang="zh-TW" altLang="en-US" sz="1200" b="0" kern="1200" dirty="0">
+            <a:solidFill>
+              <a:prstClr val="white"/>
+            </a:solidFill>
             <a:latin typeface="Arial" panose="020B0604020202020204" pitchFamily="34" charset="0"/>
+            <a:ea typeface="+mn-ea"/>
             <a:cs typeface="Arial" panose="020B0604020202020204" pitchFamily="34" charset="0"/>
           </a:endParaRPr>
         </a:p>
       </dsp:txBody>
       <dsp:txXfrm>
-        <a:off x="5500881" y="763874"/>
-        <a:ext cx="1073608" cy="536804"/>
+        <a:off x="5772351" y="926004"/>
+        <a:ext cx="1301733" cy="650866"/>
       </dsp:txXfrm>
     </dsp:sp>
     <dsp:sp modelId="{183D34E5-9A2F-A743-A8A5-F2E99BB2365A}">
@@ -22528,25 +22356,125 @@
       </dsp:nvSpPr>
       <dsp:spPr>
         <a:xfrm>
-          <a:off x="5769283" y="1526136"/>
-          <a:ext cx="1073608" cy="536804"/>
+          <a:off x="6097784" y="1850235"/>
+          <a:ext cx="1301733" cy="650866"/>
         </a:xfrm>
         <a:prstGeom prst="rect">
           <a:avLst/>
         </a:prstGeom>
         <a:solidFill>
-          <a:schemeClr val="bg1">
-            <a:lumMod val="75000"/>
-          </a:schemeClr>
+          <a:srgbClr val="156082">
+            <a:hueOff val="0"/>
+            <a:satOff val="0"/>
+            <a:lumOff val="0"/>
+            <a:alphaOff val="0"/>
+          </a:srgbClr>
         </a:solidFill>
         <a:ln w="19050" cap="flat" cmpd="sng" algn="ctr">
           <a:solidFill>
-            <a:schemeClr val="lt1">
+            <a:prstClr val="white">
               <a:hueOff val="0"/>
               <a:satOff val="0"/>
               <a:lumOff val="0"/>
               <a:alphaOff val="0"/>
-            </a:schemeClr>
+            </a:prstClr>
+          </a:solidFill>
+          <a:prstDash val="solid"/>
+          <a:miter lim="800000"/>
+        </a:ln>
+        <a:effectLst/>
+      </dsp:spPr>
+      <dsp:style>
+        <a:lnRef idx="2">
+          <a:scrgbClr r="0" g="0" b="0"/>
+        </a:lnRef>
+        <a:fillRef idx="1">
+          <a:scrgbClr r="0" g="0" b="0"/>
+        </a:fillRef>
+        <a:effectRef idx="0">
+          <a:scrgbClr r="0" g="0" b="0"/>
+        </a:effectRef>
+        <a:fontRef idx="minor">
+          <a:schemeClr val="lt1"/>
+        </a:fontRef>
+      </dsp:style>
+      <dsp:txBody>
+        <a:bodyPr spcFirstLastPara="0" vert="horz" wrap="square" lIns="7620" tIns="7620" rIns="7620" bIns="7620" numCol="1" spcCol="1270" anchor="ctr" anchorCtr="0">
+          <a:noAutofit/>
+        </a:bodyPr>
+        <a:lstStyle/>
+        <a:p>
+          <a:pPr marL="0" lvl="0" indent="0" algn="ctr" defTabSz="533400">
+            <a:lnSpc>
+              <a:spcPct val="90000"/>
+            </a:lnSpc>
+            <a:spcBef>
+              <a:spcPct val="0"/>
+            </a:spcBef>
+            <a:spcAft>
+              <a:spcPct val="35000"/>
+            </a:spcAft>
+            <a:buFont typeface="Arial" panose="020B0604020202020204" pitchFamily="34" charset="0"/>
+            <a:buNone/>
+          </a:pPr>
+          <a:r>
+            <a:rPr lang="en-US" sz="1200" kern="1200" dirty="0">
+              <a:solidFill>
+                <a:prstClr val="white"/>
+              </a:solidFill>
+              <a:latin typeface="Arial" panose="020B0604020202020204" pitchFamily="34" charset="0"/>
+              <a:ea typeface="+mn-ea"/>
+              <a:cs typeface="Arial" panose="020B0604020202020204" pitchFamily="34" charset="0"/>
+            </a:rPr>
+            <a:t>Huffman</a:t>
+          </a:r>
+          <a:r>
+            <a:rPr lang="en-US" sz="1200" kern="1200" dirty="0">
+              <a:latin typeface="Arial" panose="020B0604020202020204" pitchFamily="34" charset="0"/>
+              <a:cs typeface="Arial" panose="020B0604020202020204" pitchFamily="34" charset="0"/>
+            </a:rPr>
+            <a:t> Coding</a:t>
+          </a:r>
+          <a:endParaRPr lang="zh-TW" altLang="en-US" sz="1200" b="0" kern="1200" dirty="0">
+            <a:latin typeface="Arial" panose="020B0604020202020204" pitchFamily="34" charset="0"/>
+            <a:cs typeface="Arial" panose="020B0604020202020204" pitchFamily="34" charset="0"/>
+          </a:endParaRPr>
+        </a:p>
+      </dsp:txBody>
+      <dsp:txXfrm>
+        <a:off x="6097784" y="1850235"/>
+        <a:ext cx="1301733" cy="650866"/>
+      </dsp:txXfrm>
+    </dsp:sp>
+    <dsp:sp modelId="{49ED93F1-9B12-104A-8FFC-B4148C0AC09A}">
+      <dsp:nvSpPr>
+        <dsp:cNvPr id="0" name=""/>
+        <dsp:cNvSpPr/>
+      </dsp:nvSpPr>
+      <dsp:spPr>
+        <a:xfrm>
+          <a:off x="6097784" y="2774466"/>
+          <a:ext cx="1301733" cy="650866"/>
+        </a:xfrm>
+        <a:prstGeom prst="rect">
+          <a:avLst/>
+        </a:prstGeom>
+        <a:solidFill>
+          <a:srgbClr val="156082">
+            <a:hueOff val="0"/>
+            <a:satOff val="0"/>
+            <a:lumOff val="0"/>
+            <a:alphaOff val="0"/>
+          </a:srgbClr>
+        </a:solidFill>
+        <a:ln w="19050" cap="flat" cmpd="sng" algn="ctr">
+          <a:solidFill>
+            <a:prstClr val="white">
+              <a:hueOff val="0"/>
+              <a:satOff val="0"/>
+              <a:lumOff val="0"/>
+              <a:alphaOff val="0"/>
+            </a:prstClr>
           </a:solidFill>
           <a:prstDash val="solid"/>
           <a:miter lim="800000"/>
@@ -22591,28 +22519,42 @@
               <a:latin typeface="Arial" panose="020B0604020202020204" pitchFamily="34" charset="0"/>
               <a:cs typeface="Arial" panose="020B0604020202020204" pitchFamily="34" charset="0"/>
             </a:rPr>
-            <a:t>Activity Selection</a:t>
+            <a:t>Minimum </a:t>
           </a:r>
-          <a:endParaRPr lang="zh-TW" altLang="en-US" sz="1200" b="0" kern="1200" dirty="0">
-            <a:latin typeface="Arial" panose="020B0604020202020204" pitchFamily="34" charset="0"/>
-            <a:cs typeface="Arial" panose="020B0604020202020204" pitchFamily="34" charset="0"/>
-          </a:endParaRPr>
+          <a:r>
+            <a:rPr lang="en-US" sz="1200" kern="1200" dirty="0">
+              <a:solidFill>
+                <a:prstClr val="white"/>
+              </a:solidFill>
+              <a:latin typeface="Arial" panose="020B0604020202020204" pitchFamily="34" charset="0"/>
+              <a:ea typeface="+mn-ea"/>
+              <a:cs typeface="Arial" panose="020B0604020202020204" pitchFamily="34" charset="0"/>
+            </a:rPr>
+            <a:t>Spanning</a:t>
+          </a:r>
+          <a:r>
+            <a:rPr lang="en-US" sz="1200" kern="1200" dirty="0">
+              <a:latin typeface="Arial" panose="020B0604020202020204" pitchFamily="34" charset="0"/>
+              <a:cs typeface="Arial" panose="020B0604020202020204" pitchFamily="34" charset="0"/>
+            </a:rPr>
+            <a:t> Tree</a:t>
+          </a:r>
         </a:p>
       </dsp:txBody>
       <dsp:txXfrm>
-        <a:off x="5769283" y="1526136"/>
-        <a:ext cx="1073608" cy="536804"/>
+        <a:off x="6097784" y="2774466"/>
+        <a:ext cx="1301733" cy="650866"/>
       </dsp:txXfrm>
     </dsp:sp>
-    <dsp:sp modelId="{49ED93F1-9B12-104A-8FFC-B4148C0AC09A}">
+    <dsp:sp modelId="{A4A35E8B-1CCA-534E-BB27-D5BAF397E36D}">
       <dsp:nvSpPr>
         <dsp:cNvPr id="0" name=""/>
         <dsp:cNvSpPr/>
       </dsp:nvSpPr>
       <dsp:spPr>
         <a:xfrm>
-          <a:off x="5769283" y="2288397"/>
-          <a:ext cx="1073608" cy="536804"/>
+          <a:off x="6097784" y="3698697"/>
+          <a:ext cx="1301733" cy="650866"/>
         </a:xfrm>
         <a:prstGeom prst="rect">
           <a:avLst/>
@@ -22666,7 +22608,6 @@
             <a:spcAft>
               <a:spcPct val="35000"/>
             </a:spcAft>
-            <a:buFont typeface="Arial" panose="020B0604020202020204" pitchFamily="34" charset="0"/>
             <a:buNone/>
           </a:pPr>
           <a:r>
@@ -22674,171 +22615,13 @@
               <a:latin typeface="Arial" panose="020B0604020202020204" pitchFamily="34" charset="0"/>
               <a:cs typeface="Arial" panose="020B0604020202020204" pitchFamily="34" charset="0"/>
             </a:rPr>
-            <a:t>Interval Scheduling</a:t>
+            <a:t>Activity Selection</a:t>
           </a:r>
         </a:p>
       </dsp:txBody>
       <dsp:txXfrm>
-        <a:off x="5769283" y="2288397"/>
-        <a:ext cx="1073608" cy="536804"/>
-      </dsp:txXfrm>
-    </dsp:sp>
-    <dsp:sp modelId="{A4A35E8B-1CCA-534E-BB27-D5BAF397E36D}">
-      <dsp:nvSpPr>
-        <dsp:cNvPr id="0" name=""/>
-        <dsp:cNvSpPr/>
-      </dsp:nvSpPr>
-      <dsp:spPr>
-        <a:xfrm>
-          <a:off x="5769283" y="3050659"/>
-          <a:ext cx="1073608" cy="536804"/>
-        </a:xfrm>
-        <a:prstGeom prst="rect">
-          <a:avLst/>
-        </a:prstGeom>
-        <a:solidFill>
-          <a:schemeClr val="bg1">
-            <a:lumMod val="75000"/>
-          </a:schemeClr>
-        </a:solidFill>
-        <a:ln w="19050" cap="flat" cmpd="sng" algn="ctr">
-          <a:solidFill>
-            <a:schemeClr val="lt1">
-              <a:hueOff val="0"/>
-              <a:satOff val="0"/>
-              <a:lumOff val="0"/>
-              <a:alphaOff val="0"/>
-            </a:schemeClr>
-          </a:solidFill>
-          <a:prstDash val="solid"/>
-          <a:miter lim="800000"/>
-        </a:ln>
-        <a:effectLst/>
-      </dsp:spPr>
-      <dsp:style>
-        <a:lnRef idx="2">
-          <a:scrgbClr r="0" g="0" b="0"/>
-        </a:lnRef>
-        <a:fillRef idx="1">
-          <a:scrgbClr r="0" g="0" b="0"/>
-        </a:fillRef>
-        <a:effectRef idx="0">
-          <a:scrgbClr r="0" g="0" b="0"/>
-        </a:effectRef>
-        <a:fontRef idx="minor">
-          <a:schemeClr val="lt1"/>
-        </a:fontRef>
-      </dsp:style>
-      <dsp:txBody>
-        <a:bodyPr spcFirstLastPara="0" vert="horz" wrap="square" lIns="7620" tIns="7620" rIns="7620" bIns="7620" numCol="1" spcCol="1270" anchor="ctr" anchorCtr="0">
-          <a:noAutofit/>
-        </a:bodyPr>
-        <a:lstStyle/>
-        <a:p>
-          <a:pPr marL="0" lvl="0" indent="0" algn="ctr" defTabSz="533400">
-            <a:lnSpc>
-              <a:spcPct val="90000"/>
-            </a:lnSpc>
-            <a:spcBef>
-              <a:spcPct val="0"/>
-            </a:spcBef>
-            <a:spcAft>
-              <a:spcPct val="35000"/>
-            </a:spcAft>
-            <a:buFont typeface="Arial" panose="020B0604020202020204" pitchFamily="34" charset="0"/>
-            <a:buNone/>
-          </a:pPr>
-          <a:r>
-            <a:rPr lang="en-US" sz="1200" kern="1200" dirty="0">
-              <a:latin typeface="Arial" panose="020B0604020202020204" pitchFamily="34" charset="0"/>
-              <a:cs typeface="Arial" panose="020B0604020202020204" pitchFamily="34" charset="0"/>
-            </a:rPr>
-            <a:t>Huffman Coding</a:t>
-          </a:r>
-        </a:p>
-      </dsp:txBody>
-      <dsp:txXfrm>
-        <a:off x="5769283" y="3050659"/>
-        <a:ext cx="1073608" cy="536804"/>
-      </dsp:txXfrm>
-    </dsp:sp>
-    <dsp:sp modelId="{7D39AB92-3834-464D-AC65-5C7E5337B454}">
-      <dsp:nvSpPr>
-        <dsp:cNvPr id="0" name=""/>
-        <dsp:cNvSpPr/>
-      </dsp:nvSpPr>
-      <dsp:spPr>
-        <a:xfrm>
-          <a:off x="5769283" y="3812921"/>
-          <a:ext cx="1073608" cy="536804"/>
-        </a:xfrm>
-        <a:prstGeom prst="rect">
-          <a:avLst/>
-        </a:prstGeom>
-        <a:solidFill>
-          <a:schemeClr val="bg1">
-            <a:lumMod val="75000"/>
-          </a:schemeClr>
-        </a:solidFill>
-        <a:ln w="19050" cap="flat" cmpd="sng" algn="ctr">
-          <a:solidFill>
-            <a:schemeClr val="lt1">
-              <a:hueOff val="0"/>
-              <a:satOff val="0"/>
-              <a:lumOff val="0"/>
-              <a:alphaOff val="0"/>
-            </a:schemeClr>
-          </a:solidFill>
-          <a:prstDash val="solid"/>
-          <a:miter lim="800000"/>
-        </a:ln>
-        <a:effectLst/>
-      </dsp:spPr>
-      <dsp:style>
-        <a:lnRef idx="2">
-          <a:scrgbClr r="0" g="0" b="0"/>
-        </a:lnRef>
-        <a:fillRef idx="1">
-          <a:scrgbClr r="0" g="0" b="0"/>
-        </a:fillRef>
-        <a:effectRef idx="0">
-          <a:scrgbClr r="0" g="0" b="0"/>
-        </a:effectRef>
-        <a:fontRef idx="minor">
-          <a:schemeClr val="lt1"/>
-        </a:fontRef>
-      </dsp:style>
-      <dsp:txBody>
-        <a:bodyPr spcFirstLastPara="0" vert="horz" wrap="square" lIns="7620" tIns="7620" rIns="7620" bIns="7620" numCol="1" spcCol="1270" anchor="ctr" anchorCtr="0">
-          <a:noAutofit/>
-        </a:bodyPr>
-        <a:lstStyle/>
-        <a:p>
-          <a:pPr marL="0" lvl="0" indent="0" algn="ctr" defTabSz="533400">
-            <a:lnSpc>
-              <a:spcPct val="90000"/>
-            </a:lnSpc>
-            <a:spcBef>
-              <a:spcPct val="0"/>
-            </a:spcBef>
-            <a:spcAft>
-              <a:spcPct val="35000"/>
-            </a:spcAft>
-            <a:buFont typeface="Arial" panose="020B0604020202020204" pitchFamily="34" charset="0"/>
-            <a:buNone/>
-          </a:pPr>
-          <a:r>
-            <a:rPr lang="en-US" sz="1200" kern="1200" dirty="0">
-              <a:latin typeface="Arial" panose="020B0604020202020204" pitchFamily="34" charset="0"/>
-              <a:cs typeface="Arial" panose="020B0604020202020204" pitchFamily="34" charset="0"/>
-            </a:rPr>
-            <a:t>Minimum Spanning Tree</a:t>
-          </a:r>
-        </a:p>
-      </dsp:txBody>
-      <dsp:txXfrm>
-        <a:off x="5769283" y="3812921"/>
-        <a:ext cx="1073608" cy="536804"/>
+        <a:off x="6097784" y="3698697"/>
+        <a:ext cx="1301733" cy="650866"/>
       </dsp:txXfrm>
     </dsp:sp>
   </dsp:spTree>
@@ -31712,7 +31495,7 @@
           <a:p>
             <a:fld id="{B8322ED2-AA20-DC4A-9CA1-814CBB0E7E0D}" type="datetimeFigureOut">
               <a:rPr kumimoji="1" lang="zh-TW" altLang="en-US" smtClean="0"/>
-              <a:t>2026/1/17</a:t>
+              <a:t>2026/2/23</a:t>
             </a:fld>
             <a:endParaRPr kumimoji="1" lang="zh-TW" altLang="en-US"/>
           </a:p>
@@ -31910,7 +31693,7 @@
           <a:p>
             <a:fld id="{B8322ED2-AA20-DC4A-9CA1-814CBB0E7E0D}" type="datetimeFigureOut">
               <a:rPr kumimoji="1" lang="zh-TW" altLang="en-US" smtClean="0"/>
-              <a:t>2026/1/17</a:t>
+              <a:t>2026/2/23</a:t>
             </a:fld>
             <a:endParaRPr kumimoji="1" lang="zh-TW" altLang="en-US"/>
           </a:p>
@@ -32118,7 +31901,7 @@
           <a:p>
             <a:fld id="{B8322ED2-AA20-DC4A-9CA1-814CBB0E7E0D}" type="datetimeFigureOut">
               <a:rPr kumimoji="1" lang="zh-TW" altLang="en-US" smtClean="0"/>
-              <a:t>2026/1/17</a:t>
+              <a:t>2026/2/23</a:t>
             </a:fld>
             <a:endParaRPr kumimoji="1" lang="zh-TW" altLang="en-US"/>
           </a:p>
@@ -32316,7 +32099,7 @@
           <a:p>
             <a:fld id="{B8322ED2-AA20-DC4A-9CA1-814CBB0E7E0D}" type="datetimeFigureOut">
               <a:rPr kumimoji="1" lang="zh-TW" altLang="en-US" smtClean="0"/>
-              <a:t>2026/1/17</a:t>
+              <a:t>2026/2/23</a:t>
             </a:fld>
             <a:endParaRPr kumimoji="1" lang="zh-TW" altLang="en-US"/>
           </a:p>
@@ -32591,7 +32374,7 @@
           <a:p>
             <a:fld id="{B8322ED2-AA20-DC4A-9CA1-814CBB0E7E0D}" type="datetimeFigureOut">
               <a:rPr kumimoji="1" lang="zh-TW" altLang="en-US" smtClean="0"/>
-              <a:t>2026/1/17</a:t>
+              <a:t>2026/2/23</a:t>
             </a:fld>
             <a:endParaRPr kumimoji="1" lang="zh-TW" altLang="en-US"/>
           </a:p>
@@ -32856,7 +32639,7 @@
           <a:p>
             <a:fld id="{B8322ED2-AA20-DC4A-9CA1-814CBB0E7E0D}" type="datetimeFigureOut">
               <a:rPr kumimoji="1" lang="zh-TW" altLang="en-US" smtClean="0"/>
-              <a:t>2026/1/17</a:t>
+              <a:t>2026/2/23</a:t>
             </a:fld>
             <a:endParaRPr kumimoji="1" lang="zh-TW" altLang="en-US"/>
           </a:p>
@@ -33268,7 +33051,7 @@
           <a:p>
             <a:fld id="{B8322ED2-AA20-DC4A-9CA1-814CBB0E7E0D}" type="datetimeFigureOut">
               <a:rPr kumimoji="1" lang="zh-TW" altLang="en-US" smtClean="0"/>
-              <a:t>2026/1/17</a:t>
+              <a:t>2026/2/23</a:t>
             </a:fld>
             <a:endParaRPr kumimoji="1" lang="zh-TW" altLang="en-US"/>
           </a:p>
@@ -33409,7 +33192,7 @@
           <a:p>
             <a:fld id="{B8322ED2-AA20-DC4A-9CA1-814CBB0E7E0D}" type="datetimeFigureOut">
               <a:rPr kumimoji="1" lang="zh-TW" altLang="en-US" smtClean="0"/>
-              <a:t>2026/1/17</a:t>
+              <a:t>2026/2/23</a:t>
             </a:fld>
             <a:endParaRPr kumimoji="1" lang="zh-TW" altLang="en-US"/>
           </a:p>
@@ -33522,7 +33305,7 @@
           <a:p>
             <a:fld id="{B8322ED2-AA20-DC4A-9CA1-814CBB0E7E0D}" type="datetimeFigureOut">
               <a:rPr kumimoji="1" lang="zh-TW" altLang="en-US" smtClean="0"/>
-              <a:t>2026/1/17</a:t>
+              <a:t>2026/2/23</a:t>
             </a:fld>
             <a:endParaRPr kumimoji="1" lang="zh-TW" altLang="en-US"/>
           </a:p>
@@ -33833,7 +33616,7 @@
           <a:p>
             <a:fld id="{B8322ED2-AA20-DC4A-9CA1-814CBB0E7E0D}" type="datetimeFigureOut">
               <a:rPr kumimoji="1" lang="zh-TW" altLang="en-US" smtClean="0"/>
-              <a:t>2026/1/17</a:t>
+              <a:t>2026/2/23</a:t>
             </a:fld>
             <a:endParaRPr kumimoji="1" lang="zh-TW" altLang="en-US"/>
           </a:p>
@@ -34121,7 +33904,7 @@
           <a:p>
             <a:fld id="{B8322ED2-AA20-DC4A-9CA1-814CBB0E7E0D}" type="datetimeFigureOut">
               <a:rPr kumimoji="1" lang="zh-TW" altLang="en-US" smtClean="0"/>
-              <a:t>2026/1/17</a:t>
+              <a:t>2026/2/23</a:t>
             </a:fld>
             <a:endParaRPr kumimoji="1" lang="zh-TW" altLang="en-US"/>
           </a:p>
@@ -34362,7 +34145,7 @@
           <a:p>
             <a:fld id="{B8322ED2-AA20-DC4A-9CA1-814CBB0E7E0D}" type="datetimeFigureOut">
               <a:rPr kumimoji="1" lang="zh-TW" altLang="en-US" smtClean="0"/>
-              <a:t>2026/1/17</a:t>
+              <a:t>2026/2/23</a:t>
             </a:fld>
             <a:endParaRPr kumimoji="1" lang="zh-TW" altLang="en-US"/>
           </a:p>
@@ -35219,7 +35002,7 @@
           <p:nvPr>
             <p:extLst>
               <p:ext uri="{D42A27DB-BD31-4B8C-83A1-F6EECF244321}">
-                <p14:modId xmlns:p14="http://schemas.microsoft.com/office/powerpoint/2010/main" val="788855129"/>
+                <p14:modId xmlns:p14="http://schemas.microsoft.com/office/powerpoint/2010/main" val="909551230"/>
               </p:ext>
             </p:extLst>
           </p:nvPr>
@@ -35319,7 +35102,7 @@
             <p:ph idx="1"/>
             <p:extLst>
               <p:ext uri="{D42A27DB-BD31-4B8C-83A1-F6EECF244321}">
-                <p14:modId xmlns:p14="http://schemas.microsoft.com/office/powerpoint/2010/main" val="3237902514"/>
+                <p14:modId xmlns:p14="http://schemas.microsoft.com/office/powerpoint/2010/main" val="3566729667"/>
               </p:ext>
             </p:extLst>
           </p:nvPr>

--- a/asset/ppt/ch01a_data_structures.pptx
+++ b/asset/ppt/ch01a_data_structures.pptx
@@ -7423,17 +7423,68 @@
       </dgm:t>
     </dgm:pt>
     <dgm:pt modelId="{026D1170-AB50-4D46-9A32-2B035E463CD4}">
-      <dgm:prSet/>
-      <dgm:spPr/>
+      <dgm:prSet custT="1"/>
+      <dgm:spPr>
+        <a:solidFill>
+          <a:srgbClr val="156082">
+            <a:hueOff val="0"/>
+            <a:satOff val="0"/>
+            <a:lumOff val="0"/>
+            <a:alphaOff val="0"/>
+          </a:srgbClr>
+        </a:solidFill>
+        <a:ln w="19050" cap="flat" cmpd="sng" algn="ctr">
+          <a:solidFill>
+            <a:prstClr val="white">
+              <a:hueOff val="0"/>
+              <a:satOff val="0"/>
+              <a:lumOff val="0"/>
+              <a:alphaOff val="0"/>
+            </a:prstClr>
+          </a:solidFill>
+          <a:prstDash val="solid"/>
+          <a:miter lim="800000"/>
+        </a:ln>
+        <a:effectLst/>
+      </dgm:spPr>
       <dgm:t>
-        <a:bodyPr/>
+        <a:bodyPr spcFirstLastPara="0" vert="horz" wrap="square" lIns="6350" tIns="6350" rIns="6350" bIns="6350" numCol="1" spcCol="1270" anchor="ctr" anchorCtr="0"/>
         <a:lstStyle/>
         <a:p>
           <a:r>
-            <a:rPr lang="en-US" altLang="zh-TW" dirty="0"/>
-            <a:t>Frequency Counting</a:t>
+            <a:rPr lang="en-US" altLang="zh-TW" sz="1000" kern="1200" dirty="0">
+              <a:solidFill>
+                <a:prstClr val="white"/>
+              </a:solidFill>
+              <a:latin typeface="Arial" panose="020B0604020202020204" pitchFamily="34" charset="0"/>
+              <a:ea typeface="新細明體" panose="02020500000000000000" pitchFamily="18" charset="-120"/>
+              <a:cs typeface="Arial" panose="020B0604020202020204" pitchFamily="34" charset="0"/>
+            </a:rPr>
+            <a:t>Frequency</a:t>
           </a:r>
-          <a:endParaRPr lang="zh-TW" altLang="en-US" dirty="0"/>
+          <a:r>
+            <a:rPr lang="en-US" altLang="zh-TW" sz="1400" kern="1200" dirty="0"/>
+            <a:t> </a:t>
+          </a:r>
+          <a:r>
+            <a:rPr lang="en-US" altLang="zh-TW" sz="1000" kern="1200" dirty="0">
+              <a:solidFill>
+                <a:prstClr val="white"/>
+              </a:solidFill>
+              <a:latin typeface="Arial" panose="020B0604020202020204" pitchFamily="34" charset="0"/>
+              <a:ea typeface="新細明體" panose="02020500000000000000" pitchFamily="18" charset="-120"/>
+              <a:cs typeface="Arial" panose="020B0604020202020204" pitchFamily="34" charset="0"/>
+            </a:rPr>
+            <a:t>Counting</a:t>
+          </a:r>
+          <a:endParaRPr lang="zh-TW" altLang="en-US" sz="1000" kern="1200" dirty="0">
+            <a:solidFill>
+              <a:prstClr val="white"/>
+            </a:solidFill>
+            <a:latin typeface="Arial" panose="020B0604020202020204" pitchFamily="34" charset="0"/>
+            <a:ea typeface="新細明體" panose="02020500000000000000" pitchFamily="18" charset="-120"/>
+            <a:cs typeface="Arial" panose="020B0604020202020204" pitchFamily="34" charset="0"/>
+          </a:endParaRPr>
         </a:p>
       </dgm:t>
     </dgm:pt>
@@ -7460,17 +7511,53 @@
       </dgm:t>
     </dgm:pt>
     <dgm:pt modelId="{F3ADAA2D-DE9B-F641-8D5E-14565C3C81FA}">
-      <dgm:prSet/>
-      <dgm:spPr/>
+      <dgm:prSet custT="1"/>
+      <dgm:spPr>
+        <a:solidFill>
+          <a:srgbClr val="156082">
+            <a:hueOff val="0"/>
+            <a:satOff val="0"/>
+            <a:lumOff val="0"/>
+            <a:alphaOff val="0"/>
+          </a:srgbClr>
+        </a:solidFill>
+        <a:ln w="19050" cap="flat" cmpd="sng" algn="ctr">
+          <a:solidFill>
+            <a:prstClr val="white">
+              <a:hueOff val="0"/>
+              <a:satOff val="0"/>
+              <a:lumOff val="0"/>
+              <a:alphaOff val="0"/>
+            </a:prstClr>
+          </a:solidFill>
+          <a:prstDash val="solid"/>
+          <a:miter lim="800000"/>
+        </a:ln>
+        <a:effectLst/>
+      </dgm:spPr>
       <dgm:t>
-        <a:bodyPr/>
+        <a:bodyPr spcFirstLastPara="0" vert="horz" wrap="square" lIns="6350" tIns="6350" rIns="6350" bIns="6350" numCol="1" spcCol="1270" anchor="ctr" anchorCtr="0"/>
         <a:lstStyle/>
         <a:p>
           <a:r>
-            <a:rPr lang="en-US" altLang="zh-TW" dirty="0"/>
+            <a:rPr lang="en-US" altLang="zh-TW" sz="1000" kern="1200" dirty="0">
+              <a:solidFill>
+                <a:prstClr val="white"/>
+              </a:solidFill>
+              <a:latin typeface="Arial" panose="020B0604020202020204" pitchFamily="34" charset="0"/>
+              <a:ea typeface="新細明體" panose="02020500000000000000" pitchFamily="18" charset="-120"/>
+              <a:cs typeface="Arial" panose="020B0604020202020204" pitchFamily="34" charset="0"/>
+            </a:rPr>
             <a:t>Two-sum</a:t>
           </a:r>
-          <a:endParaRPr lang="zh-TW" altLang="en-US" dirty="0"/>
+          <a:endParaRPr lang="zh-TW" altLang="en-US" sz="1000" kern="1200" dirty="0">
+            <a:solidFill>
+              <a:prstClr val="white"/>
+            </a:solidFill>
+            <a:latin typeface="Arial" panose="020B0604020202020204" pitchFamily="34" charset="0"/>
+            <a:ea typeface="新細明體" panose="02020500000000000000" pitchFamily="18" charset="-120"/>
+            <a:cs typeface="Arial" panose="020B0604020202020204" pitchFamily="34" charset="0"/>
+          </a:endParaRPr>
         </a:p>
       </dgm:t>
     </dgm:pt>
@@ -8452,7 +8539,15 @@
           <dgm:chPref val="3"/>
         </dgm:presLayoutVars>
       </dgm:prSet>
-      <dgm:spPr/>
+      <dgm:spPr>
+        <a:xfrm>
+          <a:off x="6046345" y="1204051"/>
+          <a:ext cx="845795" cy="422897"/>
+        </a:xfrm>
+        <a:prstGeom prst="rect">
+          <a:avLst/>
+        </a:prstGeom>
+      </dgm:spPr>
     </dgm:pt>
     <dgm:pt modelId="{1C8B56FD-D2D3-0743-8162-DDF942CA4351}" type="pres">
       <dgm:prSet presAssocID="{026D1170-AB50-4D46-9A32-2B035E463CD4}" presName="rootConnector" presStyleLbl="node3" presStyleIdx="13" presStyleCnt="24"/>
@@ -8488,7 +8583,15 @@
           <dgm:chPref val="3"/>
         </dgm:presLayoutVars>
       </dgm:prSet>
-      <dgm:spPr/>
+      <dgm:spPr>
+        <a:xfrm>
+          <a:off x="6046345" y="1804565"/>
+          <a:ext cx="845795" cy="422897"/>
+        </a:xfrm>
+        <a:prstGeom prst="rect">
+          <a:avLst/>
+        </a:prstGeom>
+      </dgm:spPr>
     </dgm:pt>
     <dgm:pt modelId="{B1E195A5-937A-0A4D-8492-66CA572CEC29}" type="pres">
       <dgm:prSet presAssocID="{F3ADAA2D-DE9B-F641-8D5E-14565C3C81FA}" presName="rootConnector" presStyleLbl="node3" presStyleIdx="14" presStyleCnt="24"/>
@@ -19112,21 +19215,21 @@
           <a:avLst/>
         </a:prstGeom>
         <a:solidFill>
-          <a:schemeClr val="accent1">
+          <a:srgbClr val="156082">
             <a:hueOff val="0"/>
             <a:satOff val="0"/>
             <a:lumOff val="0"/>
             <a:alphaOff val="0"/>
-          </a:schemeClr>
+          </a:srgbClr>
         </a:solidFill>
         <a:ln w="19050" cap="flat" cmpd="sng" algn="ctr">
           <a:solidFill>
-            <a:schemeClr val="lt1">
+            <a:prstClr val="white">
               <a:hueOff val="0"/>
               <a:satOff val="0"/>
               <a:lumOff val="0"/>
               <a:alphaOff val="0"/>
-            </a:schemeClr>
+            </a:prstClr>
           </a:solidFill>
           <a:prstDash val="solid"/>
           <a:miter lim="800000"/>
@@ -19148,12 +19251,12 @@
         </a:fontRef>
       </dsp:style>
       <dsp:txBody>
-        <a:bodyPr spcFirstLastPara="0" vert="horz" wrap="square" lIns="8890" tIns="8890" rIns="8890" bIns="8890" numCol="1" spcCol="1270" anchor="ctr" anchorCtr="0">
+        <a:bodyPr spcFirstLastPara="0" vert="horz" wrap="square" lIns="6350" tIns="6350" rIns="6350" bIns="6350" numCol="1" spcCol="1270" anchor="ctr" anchorCtr="0">
           <a:noAutofit/>
         </a:bodyPr>
         <a:lstStyle/>
         <a:p>
-          <a:pPr marL="0" lvl="0" indent="0" algn="ctr" defTabSz="622300">
+          <a:pPr marL="0" lvl="0" indent="0" algn="ctr" defTabSz="444500">
             <a:lnSpc>
               <a:spcPct val="90000"/>
             </a:lnSpc>
@@ -19166,10 +19269,39 @@
             <a:buNone/>
           </a:pPr>
           <a:r>
+            <a:rPr lang="en-US" altLang="zh-TW" sz="1000" kern="1200" dirty="0">
+              <a:solidFill>
+                <a:prstClr val="white"/>
+              </a:solidFill>
+              <a:latin typeface="Arial" panose="020B0604020202020204" pitchFamily="34" charset="0"/>
+              <a:ea typeface="新細明體" panose="02020500000000000000" pitchFamily="18" charset="-120"/>
+              <a:cs typeface="Arial" panose="020B0604020202020204" pitchFamily="34" charset="0"/>
+            </a:rPr>
+            <a:t>Frequency</a:t>
+          </a:r>
+          <a:r>
             <a:rPr lang="en-US" altLang="zh-TW" sz="1400" kern="1200" dirty="0"/>
-            <a:t>Frequency Counting</a:t>
+            <a:t> </a:t>
           </a:r>
-          <a:endParaRPr lang="zh-TW" altLang="en-US" sz="1400" kern="1200" dirty="0"/>
+          <a:r>
+            <a:rPr lang="en-US" altLang="zh-TW" sz="1000" kern="1200" dirty="0">
+              <a:solidFill>
+                <a:prstClr val="white"/>
+              </a:solidFill>
+              <a:latin typeface="Arial" panose="020B0604020202020204" pitchFamily="34" charset="0"/>
+              <a:ea typeface="新細明體" panose="02020500000000000000" pitchFamily="18" charset="-120"/>
+              <a:cs typeface="Arial" panose="020B0604020202020204" pitchFamily="34" charset="0"/>
+            </a:rPr>
+            <a:t>Counting</a:t>
+          </a:r>
+          <a:endParaRPr lang="zh-TW" altLang="en-US" sz="1000" kern="1200" dirty="0">
+            <a:solidFill>
+              <a:prstClr val="white"/>
+            </a:solidFill>
+            <a:latin typeface="Arial" panose="020B0604020202020204" pitchFamily="34" charset="0"/>
+            <a:ea typeface="新細明體" panose="02020500000000000000" pitchFamily="18" charset="-120"/>
+            <a:cs typeface="Arial" panose="020B0604020202020204" pitchFamily="34" charset="0"/>
+          </a:endParaRPr>
         </a:p>
       </dsp:txBody>
       <dsp:txXfrm>
@@ -19191,21 +19323,21 @@
           <a:avLst/>
         </a:prstGeom>
         <a:solidFill>
-          <a:schemeClr val="accent1">
+          <a:srgbClr val="156082">
             <a:hueOff val="0"/>
             <a:satOff val="0"/>
             <a:lumOff val="0"/>
             <a:alphaOff val="0"/>
-          </a:schemeClr>
+          </a:srgbClr>
         </a:solidFill>
         <a:ln w="19050" cap="flat" cmpd="sng" algn="ctr">
           <a:solidFill>
-            <a:schemeClr val="lt1">
+            <a:prstClr val="white">
               <a:hueOff val="0"/>
               <a:satOff val="0"/>
               <a:lumOff val="0"/>
               <a:alphaOff val="0"/>
-            </a:schemeClr>
+            </a:prstClr>
           </a:solidFill>
           <a:prstDash val="solid"/>
           <a:miter lim="800000"/>
@@ -19227,12 +19359,12 @@
         </a:fontRef>
       </dsp:style>
       <dsp:txBody>
-        <a:bodyPr spcFirstLastPara="0" vert="horz" wrap="square" lIns="8890" tIns="8890" rIns="8890" bIns="8890" numCol="1" spcCol="1270" anchor="ctr" anchorCtr="0">
+        <a:bodyPr spcFirstLastPara="0" vert="horz" wrap="square" lIns="6350" tIns="6350" rIns="6350" bIns="6350" numCol="1" spcCol="1270" anchor="ctr" anchorCtr="0">
           <a:noAutofit/>
         </a:bodyPr>
         <a:lstStyle/>
         <a:p>
-          <a:pPr marL="0" lvl="0" indent="0" algn="ctr" defTabSz="622300">
+          <a:pPr marL="0" lvl="0" indent="0" algn="ctr" defTabSz="444500">
             <a:lnSpc>
               <a:spcPct val="90000"/>
             </a:lnSpc>
@@ -19245,10 +19377,24 @@
             <a:buNone/>
           </a:pPr>
           <a:r>
-            <a:rPr lang="en-US" altLang="zh-TW" sz="1400" kern="1200" dirty="0"/>
+            <a:rPr lang="en-US" altLang="zh-TW" sz="1000" kern="1200" dirty="0">
+              <a:solidFill>
+                <a:prstClr val="white"/>
+              </a:solidFill>
+              <a:latin typeface="Arial" panose="020B0604020202020204" pitchFamily="34" charset="0"/>
+              <a:ea typeface="新細明體" panose="02020500000000000000" pitchFamily="18" charset="-120"/>
+              <a:cs typeface="Arial" panose="020B0604020202020204" pitchFamily="34" charset="0"/>
+            </a:rPr>
             <a:t>Two-sum</a:t>
           </a:r>
-          <a:endParaRPr lang="zh-TW" altLang="en-US" sz="1400" kern="1200" dirty="0"/>
+          <a:endParaRPr lang="zh-TW" altLang="en-US" sz="1000" kern="1200" dirty="0">
+            <a:solidFill>
+              <a:prstClr val="white"/>
+            </a:solidFill>
+            <a:latin typeface="Arial" panose="020B0604020202020204" pitchFamily="34" charset="0"/>
+            <a:ea typeface="新細明體" panose="02020500000000000000" pitchFamily="18" charset="-120"/>
+            <a:cs typeface="Arial" panose="020B0604020202020204" pitchFamily="34" charset="0"/>
+          </a:endParaRPr>
         </a:p>
       </dsp:txBody>
       <dsp:txXfrm>
@@ -31495,7 +31641,7 @@
           <a:p>
             <a:fld id="{B8322ED2-AA20-DC4A-9CA1-814CBB0E7E0D}" type="datetimeFigureOut">
               <a:rPr kumimoji="1" lang="zh-TW" altLang="en-US" smtClean="0"/>
-              <a:t>2026/2/23</a:t>
+              <a:t>2026/2/24</a:t>
             </a:fld>
             <a:endParaRPr kumimoji="1" lang="zh-TW" altLang="en-US"/>
           </a:p>
@@ -31693,7 +31839,7 @@
           <a:p>
             <a:fld id="{B8322ED2-AA20-DC4A-9CA1-814CBB0E7E0D}" type="datetimeFigureOut">
               <a:rPr kumimoji="1" lang="zh-TW" altLang="en-US" smtClean="0"/>
-              <a:t>2026/2/23</a:t>
+              <a:t>2026/2/24</a:t>
             </a:fld>
             <a:endParaRPr kumimoji="1" lang="zh-TW" altLang="en-US"/>
           </a:p>
@@ -31901,7 +32047,7 @@
           <a:p>
             <a:fld id="{B8322ED2-AA20-DC4A-9CA1-814CBB0E7E0D}" type="datetimeFigureOut">
               <a:rPr kumimoji="1" lang="zh-TW" altLang="en-US" smtClean="0"/>
-              <a:t>2026/2/23</a:t>
+              <a:t>2026/2/24</a:t>
             </a:fld>
             <a:endParaRPr kumimoji="1" lang="zh-TW" altLang="en-US"/>
           </a:p>
@@ -32099,7 +32245,7 @@
           <a:p>
             <a:fld id="{B8322ED2-AA20-DC4A-9CA1-814CBB0E7E0D}" type="datetimeFigureOut">
               <a:rPr kumimoji="1" lang="zh-TW" altLang="en-US" smtClean="0"/>
-              <a:t>2026/2/23</a:t>
+              <a:t>2026/2/24</a:t>
             </a:fld>
             <a:endParaRPr kumimoji="1" lang="zh-TW" altLang="en-US"/>
           </a:p>
@@ -32374,7 +32520,7 @@
           <a:p>
             <a:fld id="{B8322ED2-AA20-DC4A-9CA1-814CBB0E7E0D}" type="datetimeFigureOut">
               <a:rPr kumimoji="1" lang="zh-TW" altLang="en-US" smtClean="0"/>
-              <a:t>2026/2/23</a:t>
+              <a:t>2026/2/24</a:t>
             </a:fld>
             <a:endParaRPr kumimoji="1" lang="zh-TW" altLang="en-US"/>
           </a:p>
@@ -32639,7 +32785,7 @@
           <a:p>
             <a:fld id="{B8322ED2-AA20-DC4A-9CA1-814CBB0E7E0D}" type="datetimeFigureOut">
               <a:rPr kumimoji="1" lang="zh-TW" altLang="en-US" smtClean="0"/>
-              <a:t>2026/2/23</a:t>
+              <a:t>2026/2/24</a:t>
             </a:fld>
             <a:endParaRPr kumimoji="1" lang="zh-TW" altLang="en-US"/>
           </a:p>
@@ -33051,7 +33197,7 @@
           <a:p>
             <a:fld id="{B8322ED2-AA20-DC4A-9CA1-814CBB0E7E0D}" type="datetimeFigureOut">
               <a:rPr kumimoji="1" lang="zh-TW" altLang="en-US" smtClean="0"/>
-              <a:t>2026/2/23</a:t>
+              <a:t>2026/2/24</a:t>
             </a:fld>
             <a:endParaRPr kumimoji="1" lang="zh-TW" altLang="en-US"/>
           </a:p>
@@ -33192,7 +33338,7 @@
           <a:p>
             <a:fld id="{B8322ED2-AA20-DC4A-9CA1-814CBB0E7E0D}" type="datetimeFigureOut">
               <a:rPr kumimoji="1" lang="zh-TW" altLang="en-US" smtClean="0"/>
-              <a:t>2026/2/23</a:t>
+              <a:t>2026/2/24</a:t>
             </a:fld>
             <a:endParaRPr kumimoji="1" lang="zh-TW" altLang="en-US"/>
           </a:p>
@@ -33305,7 +33451,7 @@
           <a:p>
             <a:fld id="{B8322ED2-AA20-DC4A-9CA1-814CBB0E7E0D}" type="datetimeFigureOut">
               <a:rPr kumimoji="1" lang="zh-TW" altLang="en-US" smtClean="0"/>
-              <a:t>2026/2/23</a:t>
+              <a:t>2026/2/24</a:t>
             </a:fld>
             <a:endParaRPr kumimoji="1" lang="zh-TW" altLang="en-US"/>
           </a:p>
@@ -33616,7 +33762,7 @@
           <a:p>
             <a:fld id="{B8322ED2-AA20-DC4A-9CA1-814CBB0E7E0D}" type="datetimeFigureOut">
               <a:rPr kumimoji="1" lang="zh-TW" altLang="en-US" smtClean="0"/>
-              <a:t>2026/2/23</a:t>
+              <a:t>2026/2/24</a:t>
             </a:fld>
             <a:endParaRPr kumimoji="1" lang="zh-TW" altLang="en-US"/>
           </a:p>
@@ -33904,7 +34050,7 @@
           <a:p>
             <a:fld id="{B8322ED2-AA20-DC4A-9CA1-814CBB0E7E0D}" type="datetimeFigureOut">
               <a:rPr kumimoji="1" lang="zh-TW" altLang="en-US" smtClean="0"/>
-              <a:t>2026/2/23</a:t>
+              <a:t>2026/2/24</a:t>
             </a:fld>
             <a:endParaRPr kumimoji="1" lang="zh-TW" altLang="en-US"/>
           </a:p>
@@ -34145,7 +34291,7 @@
           <a:p>
             <a:fld id="{B8322ED2-AA20-DC4A-9CA1-814CBB0E7E0D}" type="datetimeFigureOut">
               <a:rPr kumimoji="1" lang="zh-TW" altLang="en-US" smtClean="0"/>
-              <a:t>2026/2/23</a:t>
+              <a:t>2026/2/24</a:t>
             </a:fld>
             <a:endParaRPr kumimoji="1" lang="zh-TW" altLang="en-US"/>
           </a:p>
@@ -35002,7 +35148,7 @@
           <p:nvPr>
             <p:extLst>
               <p:ext uri="{D42A27DB-BD31-4B8C-83A1-F6EECF244321}">
-                <p14:modId xmlns:p14="http://schemas.microsoft.com/office/powerpoint/2010/main" val="909551230"/>
+                <p14:modId xmlns:p14="http://schemas.microsoft.com/office/powerpoint/2010/main" val="1594848979"/>
               </p:ext>
             </p:extLst>
           </p:nvPr>

--- a/asset/ppt/ch01a_data_structures.pptx
+++ b/asset/ppt/ch01a_data_structures.pptx
@@ -6561,18 +6561,50 @@
       <dgm:prSet phldrT="[文字]" custT="1"/>
       <dgm:spPr>
         <a:solidFill>
-          <a:schemeClr val="bg1">
-            <a:lumMod val="75000"/>
-          </a:schemeClr>
+          <a:srgbClr val="156082">
+            <a:hueOff val="0"/>
+            <a:satOff val="0"/>
+            <a:lumOff val="0"/>
+            <a:alphaOff val="0"/>
+          </a:srgbClr>
         </a:solidFill>
+        <a:ln w="19050" cap="flat" cmpd="sng" algn="ctr">
+          <a:solidFill>
+            <a:prstClr val="white">
+              <a:hueOff val="0"/>
+              <a:satOff val="0"/>
+              <a:lumOff val="0"/>
+              <a:alphaOff val="0"/>
+            </a:prstClr>
+          </a:solidFill>
+          <a:prstDash val="solid"/>
+          <a:miter lim="800000"/>
+        </a:ln>
+        <a:effectLst/>
       </dgm:spPr>
       <dgm:t>
-        <a:bodyPr/>
+        <a:bodyPr spcFirstLastPara="0" vert="horz" wrap="square" lIns="6350" tIns="6350" rIns="6350" bIns="6350" numCol="1" spcCol="1270" anchor="ctr" anchorCtr="0"/>
         <a:lstStyle/>
         <a:p>
+          <a:pPr marL="0" lvl="0" indent="0" algn="ctr" defTabSz="444500">
+            <a:lnSpc>
+              <a:spcPct val="90000"/>
+            </a:lnSpc>
+            <a:spcBef>
+              <a:spcPct val="0"/>
+            </a:spcBef>
+            <a:spcAft>
+              <a:spcPct val="35000"/>
+            </a:spcAft>
+            <a:buNone/>
+          </a:pPr>
           <a:r>
-            <a:rPr lang="en-US" altLang="zh-TW" sz="1000" dirty="0">
+            <a:rPr lang="en-US" altLang="zh-TW" sz="1000" kern="1200" dirty="0">
+              <a:solidFill>
+                <a:prstClr val="white"/>
+              </a:solidFill>
               <a:latin typeface="Arial" panose="020B0604020202020204" pitchFamily="34" charset="0"/>
+              <a:ea typeface="新細明體" panose="02020500000000000000" pitchFamily="18" charset="-120"/>
               <a:cs typeface="Arial" panose="020B0604020202020204" pitchFamily="34" charset="0"/>
             </a:rPr>
             <a:t>Quick        Sort</a:t>
@@ -6612,24 +6644,60 @@
       <dgm:prSet phldrT="[文字]" custT="1"/>
       <dgm:spPr>
         <a:solidFill>
-          <a:schemeClr val="bg1">
-            <a:lumMod val="75000"/>
-          </a:schemeClr>
+          <a:srgbClr val="156082">
+            <a:hueOff val="0"/>
+            <a:satOff val="0"/>
+            <a:lumOff val="0"/>
+            <a:alphaOff val="0"/>
+          </a:srgbClr>
         </a:solidFill>
+        <a:ln w="19050" cap="flat" cmpd="sng" algn="ctr">
+          <a:solidFill>
+            <a:prstClr val="white">
+              <a:hueOff val="0"/>
+              <a:satOff val="0"/>
+              <a:lumOff val="0"/>
+              <a:alphaOff val="0"/>
+            </a:prstClr>
+          </a:solidFill>
+          <a:prstDash val="solid"/>
+          <a:miter lim="800000"/>
+        </a:ln>
+        <a:effectLst/>
       </dgm:spPr>
       <dgm:t>
-        <a:bodyPr/>
+        <a:bodyPr spcFirstLastPara="0" vert="horz" wrap="square" lIns="6350" tIns="6350" rIns="6350" bIns="6350" numCol="1" spcCol="1270" anchor="ctr" anchorCtr="0"/>
         <a:lstStyle/>
         <a:p>
+          <a:pPr marL="0" lvl="0" indent="0" algn="ctr" defTabSz="444500">
+            <a:lnSpc>
+              <a:spcPct val="90000"/>
+            </a:lnSpc>
+            <a:spcBef>
+              <a:spcPct val="0"/>
+            </a:spcBef>
+            <a:spcAft>
+              <a:spcPct val="35000"/>
+            </a:spcAft>
+            <a:buNone/>
+          </a:pPr>
           <a:r>
-            <a:rPr lang="en-US" altLang="zh-TW" sz="1000" dirty="0">
+            <a:rPr lang="en-US" altLang="zh-TW" sz="1000" kern="1200" dirty="0">
+              <a:solidFill>
+                <a:prstClr val="white"/>
+              </a:solidFill>
               <a:latin typeface="Arial" panose="020B0604020202020204" pitchFamily="34" charset="0"/>
+              <a:ea typeface="新細明體" panose="02020500000000000000" pitchFamily="18" charset="-120"/>
               <a:cs typeface="Arial" panose="020B0604020202020204" pitchFamily="34" charset="0"/>
             </a:rPr>
             <a:t>Bubble      Sort</a:t>
           </a:r>
-          <a:endParaRPr lang="zh-TW" altLang="en-US" sz="1000" dirty="0">
+          <a:endParaRPr lang="zh-TW" altLang="en-US" sz="1000" kern="1200" dirty="0">
+            <a:solidFill>
+              <a:prstClr val="white"/>
+            </a:solidFill>
             <a:latin typeface="Arial" panose="020B0604020202020204" pitchFamily="34" charset="0"/>
+            <a:ea typeface="新細明體" panose="02020500000000000000" pitchFamily="18" charset="-120"/>
             <a:cs typeface="Arial" panose="020B0604020202020204" pitchFamily="34" charset="0"/>
           </a:endParaRPr>
         </a:p>
@@ -6761,24 +6829,60 @@
       <dgm:prSet phldrT="[文字]" custT="1"/>
       <dgm:spPr>
         <a:solidFill>
-          <a:schemeClr val="bg1">
-            <a:lumMod val="75000"/>
-          </a:schemeClr>
+          <a:srgbClr val="156082">
+            <a:hueOff val="0"/>
+            <a:satOff val="0"/>
+            <a:lumOff val="0"/>
+            <a:alphaOff val="0"/>
+          </a:srgbClr>
         </a:solidFill>
+        <a:ln w="19050" cap="flat" cmpd="sng" algn="ctr">
+          <a:solidFill>
+            <a:prstClr val="white">
+              <a:hueOff val="0"/>
+              <a:satOff val="0"/>
+              <a:lumOff val="0"/>
+              <a:alphaOff val="0"/>
+            </a:prstClr>
+          </a:solidFill>
+          <a:prstDash val="solid"/>
+          <a:miter lim="800000"/>
+        </a:ln>
+        <a:effectLst/>
       </dgm:spPr>
       <dgm:t>
-        <a:bodyPr/>
+        <a:bodyPr spcFirstLastPara="0" vert="horz" wrap="square" lIns="6350" tIns="6350" rIns="6350" bIns="6350" numCol="1" spcCol="1270" anchor="ctr" anchorCtr="0"/>
         <a:lstStyle/>
         <a:p>
+          <a:pPr marL="0" lvl="0" indent="0" algn="ctr" defTabSz="444500">
+            <a:lnSpc>
+              <a:spcPct val="90000"/>
+            </a:lnSpc>
+            <a:spcBef>
+              <a:spcPct val="0"/>
+            </a:spcBef>
+            <a:spcAft>
+              <a:spcPct val="35000"/>
+            </a:spcAft>
+            <a:buNone/>
+          </a:pPr>
           <a:r>
-            <a:rPr lang="en-US" altLang="zh-TW" sz="1000" dirty="0">
+            <a:rPr lang="en-US" altLang="zh-TW" sz="1000" kern="1200" dirty="0">
+              <a:solidFill>
+                <a:prstClr val="white"/>
+              </a:solidFill>
               <a:latin typeface="Arial" panose="020B0604020202020204" pitchFamily="34" charset="0"/>
+              <a:ea typeface="新細明體" panose="02020500000000000000" pitchFamily="18" charset="-120"/>
               <a:cs typeface="Arial" panose="020B0604020202020204" pitchFamily="34" charset="0"/>
             </a:rPr>
             <a:t>Selection   Sort</a:t>
           </a:r>
-          <a:endParaRPr lang="zh-TW" altLang="en-US" sz="1000" dirty="0">
+          <a:endParaRPr lang="zh-TW" altLang="en-US" sz="1000" kern="1200" dirty="0">
+            <a:solidFill>
+              <a:prstClr val="white"/>
+            </a:solidFill>
             <a:latin typeface="Arial" panose="020B0604020202020204" pitchFamily="34" charset="0"/>
+            <a:ea typeface="新細明體" panose="02020500000000000000" pitchFamily="18" charset="-120"/>
             <a:cs typeface="Arial" panose="020B0604020202020204" pitchFamily="34" charset="0"/>
           </a:endParaRPr>
         </a:p>
@@ -7214,9 +7318,7 @@
       <dgm:prSet phldrT="[文字]" custT="1"/>
       <dgm:spPr>
         <a:solidFill>
-          <a:schemeClr val="bg1">
-            <a:lumMod val="75000"/>
-          </a:schemeClr>
+          <a:schemeClr val="accent1"/>
         </a:solidFill>
       </dgm:spPr>
       <dgm:t>
@@ -7283,9 +7385,7 @@
       <dgm:prSet phldrT="[文字]" custT="1"/>
       <dgm:spPr>
         <a:solidFill>
-          <a:schemeClr val="bg1">
-            <a:lumMod val="75000"/>
-          </a:schemeClr>
+          <a:schemeClr val="accent1"/>
         </a:solidFill>
       </dgm:spPr>
       <dgm:t>
@@ -7377,9 +7477,7 @@
       <dgm:prSet phldrT="[文字]" custT="1"/>
       <dgm:spPr>
         <a:solidFill>
-          <a:schemeClr val="bg1">
-            <a:lumMod val="75000"/>
-          </a:schemeClr>
+          <a:schemeClr val="accent1"/>
         </a:solidFill>
       </dgm:spPr>
       <dgm:t>
@@ -8071,7 +8169,15 @@
           <dgm:chPref val="3"/>
         </dgm:presLayoutVars>
       </dgm:prSet>
-      <dgm:spPr/>
+      <dgm:spPr>
+        <a:xfrm>
+          <a:off x="1952696" y="2405080"/>
+          <a:ext cx="845795" cy="422897"/>
+        </a:xfrm>
+        <a:prstGeom prst="rect">
+          <a:avLst/>
+        </a:prstGeom>
+      </dgm:spPr>
     </dgm:pt>
     <dgm:pt modelId="{64321DD3-2753-2848-A3BF-A8BE332797DE}" type="pres">
       <dgm:prSet presAssocID="{BD5CEA55-4808-7B46-BA9B-76C217B50A17}" presName="rootConnector" presStyleLbl="node3" presStyleIdx="4" presStyleCnt="24"/>
@@ -8107,7 +8213,15 @@
           <dgm:chPref val="3"/>
         </dgm:presLayoutVars>
       </dgm:prSet>
-      <dgm:spPr/>
+      <dgm:spPr>
+        <a:xfrm>
+          <a:off x="1952696" y="3005595"/>
+          <a:ext cx="845795" cy="422897"/>
+        </a:xfrm>
+        <a:prstGeom prst="rect">
+          <a:avLst/>
+        </a:prstGeom>
+      </dgm:spPr>
     </dgm:pt>
     <dgm:pt modelId="{05DE09AC-1517-3E47-8011-481CD4751A89}" type="pres">
       <dgm:prSet presAssocID="{1900234C-230E-ED43-BE4B-2AC60BD160BA}" presName="rootConnector" presStyleLbl="node3" presStyleIdx="5" presStyleCnt="24"/>
@@ -8143,7 +8257,15 @@
           <dgm:chPref val="3"/>
         </dgm:presLayoutVars>
       </dgm:prSet>
-      <dgm:spPr/>
+      <dgm:spPr>
+        <a:xfrm>
+          <a:off x="1952696" y="3606109"/>
+          <a:ext cx="845795" cy="422897"/>
+        </a:xfrm>
+        <a:prstGeom prst="rect">
+          <a:avLst/>
+        </a:prstGeom>
+      </dgm:spPr>
     </dgm:pt>
     <dgm:pt modelId="{D5943A0D-5343-F740-976D-6404C54DB166}" type="pres">
       <dgm:prSet presAssocID="{84A008EA-9777-3D49-ADD4-F7E6AE1E304F}" presName="rootConnector" presStyleLbl="node3" presStyleIdx="6" presStyleCnt="24"/>
@@ -9996,9 +10118,7 @@
       <dgm:prSet custT="1"/>
       <dgm:spPr>
         <a:solidFill>
-          <a:schemeClr val="bg1">
-            <a:lumMod val="75000"/>
-          </a:schemeClr>
+          <a:schemeClr val="accent1"/>
         </a:solidFill>
       </dgm:spPr>
       <dgm:t>
@@ -10328,18 +10448,50 @@
     </dgm:pt>
     <dgm:pt modelId="{BE9B5BE9-FB17-3049-A863-F58B20DBB129}">
       <dgm:prSet custT="1"/>
-      <dgm:spPr/>
+      <dgm:spPr>
+        <a:solidFill>
+          <a:prstClr val="white">
+            <a:lumMod val="75000"/>
+          </a:prstClr>
+        </a:solidFill>
+        <a:ln w="19050" cap="flat" cmpd="sng" algn="ctr">
+          <a:solidFill>
+            <a:prstClr val="white">
+              <a:hueOff val="0"/>
+              <a:satOff val="0"/>
+              <a:lumOff val="0"/>
+              <a:alphaOff val="0"/>
+            </a:prstClr>
+          </a:solidFill>
+          <a:prstDash val="solid"/>
+          <a:miter lim="800000"/>
+        </a:ln>
+        <a:effectLst/>
+      </dgm:spPr>
       <dgm:t>
-        <a:bodyPr/>
+        <a:bodyPr spcFirstLastPara="0" vert="horz" wrap="square" lIns="7620" tIns="7620" rIns="7620" bIns="7620" numCol="1" spcCol="1270" anchor="ctr" anchorCtr="0"/>
         <a:lstStyle/>
         <a:p>
-          <a:pPr>
+          <a:pPr marL="0" lvl="0" indent="0" algn="ctr" defTabSz="533400">
+            <a:lnSpc>
+              <a:spcPct val="90000"/>
+            </a:lnSpc>
+            <a:spcBef>
+              <a:spcPct val="0"/>
+            </a:spcBef>
+            <a:spcAft>
+              <a:spcPct val="35000"/>
+            </a:spcAft>
             <a:buFont typeface="Arial" panose="020B0604020202020204" pitchFamily="34" charset="0"/>
-            <a:buChar char="•"/>
+            <a:buNone/>
           </a:pPr>
           <a:r>
-            <a:rPr lang="en-US" sz="1200" dirty="0">
+            <a:rPr lang="en-US" sz="1200" kern="1200" dirty="0">
+              <a:solidFill>
+                <a:prstClr val="white"/>
+              </a:solidFill>
               <a:latin typeface="Arial" panose="020B0604020202020204" pitchFamily="34" charset="0"/>
+              <a:ea typeface="+mn-ea"/>
               <a:cs typeface="Arial" panose="020B0604020202020204" pitchFamily="34" charset="0"/>
             </a:rPr>
             <a:t>Knapsack</a:t>
@@ -10857,7 +11009,15 @@
           <dgm:chPref val="3"/>
         </dgm:presLayoutVars>
       </dgm:prSet>
-      <dgm:spPr/>
+      <dgm:spPr>
+        <a:xfrm>
+          <a:off x="4522686" y="2774466"/>
+          <a:ext cx="1301733" cy="650866"/>
+        </a:xfrm>
+        <a:prstGeom prst="rect">
+          <a:avLst/>
+        </a:prstGeom>
+      </dgm:spPr>
     </dgm:pt>
     <dgm:pt modelId="{C989ADDF-38F5-2C47-878B-4B873890C484}" type="pres">
       <dgm:prSet presAssocID="{BE9B5BE9-FB17-3049-A863-F58B20DBB129}" presName="rootConnector" presStyleLbl="node3" presStyleIdx="7" presStyleCnt="12"/>
@@ -18120,18 +18280,21 @@
           <a:avLst/>
         </a:prstGeom>
         <a:solidFill>
-          <a:schemeClr val="bg1">
-            <a:lumMod val="75000"/>
-          </a:schemeClr>
+          <a:srgbClr val="156082">
+            <a:hueOff val="0"/>
+            <a:satOff val="0"/>
+            <a:lumOff val="0"/>
+            <a:alphaOff val="0"/>
+          </a:srgbClr>
         </a:solidFill>
         <a:ln w="19050" cap="flat" cmpd="sng" algn="ctr">
           <a:solidFill>
-            <a:schemeClr val="lt1">
+            <a:prstClr val="white">
               <a:hueOff val="0"/>
               <a:satOff val="0"/>
               <a:lumOff val="0"/>
               <a:alphaOff val="0"/>
-            </a:schemeClr>
+            </a:prstClr>
           </a:solidFill>
           <a:prstDash val="solid"/>
           <a:miter lim="800000"/>
@@ -18172,13 +18335,21 @@
           </a:pPr>
           <a:r>
             <a:rPr lang="en-US" altLang="zh-TW" sz="1000" kern="1200" dirty="0">
+              <a:solidFill>
+                <a:prstClr val="white"/>
+              </a:solidFill>
               <a:latin typeface="Arial" panose="020B0604020202020204" pitchFamily="34" charset="0"/>
+              <a:ea typeface="新細明體" panose="02020500000000000000" pitchFamily="18" charset="-120"/>
               <a:cs typeface="Arial" panose="020B0604020202020204" pitchFamily="34" charset="0"/>
             </a:rPr>
             <a:t>Selection   Sort</a:t>
           </a:r>
           <a:endParaRPr lang="zh-TW" altLang="en-US" sz="1000" kern="1200" dirty="0">
+            <a:solidFill>
+              <a:prstClr val="white"/>
+            </a:solidFill>
             <a:latin typeface="Arial" panose="020B0604020202020204" pitchFamily="34" charset="0"/>
+            <a:ea typeface="新細明體" panose="02020500000000000000" pitchFamily="18" charset="-120"/>
             <a:cs typeface="Arial" panose="020B0604020202020204" pitchFamily="34" charset="0"/>
           </a:endParaRPr>
         </a:p>
@@ -18202,18 +18373,21 @@
           <a:avLst/>
         </a:prstGeom>
         <a:solidFill>
-          <a:schemeClr val="bg1">
-            <a:lumMod val="75000"/>
-          </a:schemeClr>
+          <a:srgbClr val="156082">
+            <a:hueOff val="0"/>
+            <a:satOff val="0"/>
+            <a:lumOff val="0"/>
+            <a:alphaOff val="0"/>
+          </a:srgbClr>
         </a:solidFill>
         <a:ln w="19050" cap="flat" cmpd="sng" algn="ctr">
           <a:solidFill>
-            <a:schemeClr val="lt1">
+            <a:prstClr val="white">
               <a:hueOff val="0"/>
               <a:satOff val="0"/>
               <a:lumOff val="0"/>
               <a:alphaOff val="0"/>
-            </a:schemeClr>
+            </a:prstClr>
           </a:solidFill>
           <a:prstDash val="solid"/>
           <a:miter lim="800000"/>
@@ -18254,13 +18428,21 @@
           </a:pPr>
           <a:r>
             <a:rPr lang="en-US" altLang="zh-TW" sz="1000" kern="1200" dirty="0">
+              <a:solidFill>
+                <a:prstClr val="white"/>
+              </a:solidFill>
               <a:latin typeface="Arial" panose="020B0604020202020204" pitchFamily="34" charset="0"/>
+              <a:ea typeface="新細明體" panose="02020500000000000000" pitchFamily="18" charset="-120"/>
               <a:cs typeface="Arial" panose="020B0604020202020204" pitchFamily="34" charset="0"/>
             </a:rPr>
             <a:t>Bubble      Sort</a:t>
           </a:r>
           <a:endParaRPr lang="zh-TW" altLang="en-US" sz="1000" kern="1200" dirty="0">
+            <a:solidFill>
+              <a:prstClr val="white"/>
+            </a:solidFill>
             <a:latin typeface="Arial" panose="020B0604020202020204" pitchFamily="34" charset="0"/>
+            <a:ea typeface="新細明體" panose="02020500000000000000" pitchFamily="18" charset="-120"/>
             <a:cs typeface="Arial" panose="020B0604020202020204" pitchFamily="34" charset="0"/>
           </a:endParaRPr>
         </a:p>
@@ -18284,18 +18466,21 @@
           <a:avLst/>
         </a:prstGeom>
         <a:solidFill>
-          <a:schemeClr val="bg1">
-            <a:lumMod val="75000"/>
-          </a:schemeClr>
+          <a:srgbClr val="156082">
+            <a:hueOff val="0"/>
+            <a:satOff val="0"/>
+            <a:lumOff val="0"/>
+            <a:alphaOff val="0"/>
+          </a:srgbClr>
         </a:solidFill>
         <a:ln w="19050" cap="flat" cmpd="sng" algn="ctr">
           <a:solidFill>
-            <a:schemeClr val="lt1">
+            <a:prstClr val="white">
               <a:hueOff val="0"/>
               <a:satOff val="0"/>
               <a:lumOff val="0"/>
               <a:alphaOff val="0"/>
-            </a:schemeClr>
+            </a:prstClr>
           </a:solidFill>
           <a:prstDash val="solid"/>
           <a:miter lim="800000"/>
@@ -18336,7 +18521,11 @@
           </a:pPr>
           <a:r>
             <a:rPr lang="en-US" altLang="zh-TW" sz="1000" kern="1200" dirty="0">
+              <a:solidFill>
+                <a:prstClr val="white"/>
+              </a:solidFill>
               <a:latin typeface="Arial" panose="020B0604020202020204" pitchFamily="34" charset="0"/>
+              <a:ea typeface="新細明體" panose="02020500000000000000" pitchFamily="18" charset="-120"/>
               <a:cs typeface="Arial" panose="020B0604020202020204" pitchFamily="34" charset="0"/>
             </a:rPr>
             <a:t>Quick        Sort</a:t>
@@ -18362,9 +18551,7 @@
           <a:avLst/>
         </a:prstGeom>
         <a:solidFill>
-          <a:schemeClr val="bg1">
-            <a:lumMod val="75000"/>
-          </a:schemeClr>
+          <a:schemeClr val="accent1"/>
         </a:solidFill>
         <a:ln w="19050" cap="flat" cmpd="sng" algn="ctr">
           <a:solidFill>
@@ -20180,9 +20367,7 @@
           <a:avLst/>
         </a:prstGeom>
         <a:solidFill>
-          <a:schemeClr val="bg1">
-            <a:lumMod val="75000"/>
-          </a:schemeClr>
+          <a:schemeClr val="accent1"/>
         </a:solidFill>
         <a:ln w="19050" cap="flat" cmpd="sng" algn="ctr">
           <a:solidFill>
@@ -20276,9 +20461,7 @@
           <a:avLst/>
         </a:prstGeom>
         <a:solidFill>
-          <a:schemeClr val="bg1">
-            <a:lumMod val="75000"/>
-          </a:schemeClr>
+          <a:schemeClr val="accent1"/>
         </a:solidFill>
         <a:ln w="19050" cap="flat" cmpd="sng" algn="ctr">
           <a:solidFill>
@@ -22005,9 +22188,7 @@
           <a:avLst/>
         </a:prstGeom>
         <a:solidFill>
-          <a:schemeClr val="bg1">
-            <a:lumMod val="75000"/>
-          </a:schemeClr>
+          <a:schemeClr val="accent1"/>
         </a:solidFill>
         <a:ln w="19050" cap="flat" cmpd="sng" algn="ctr">
           <a:solidFill>
@@ -22255,21 +22436,18 @@
           <a:avLst/>
         </a:prstGeom>
         <a:solidFill>
-          <a:schemeClr val="accent1">
-            <a:hueOff val="0"/>
-            <a:satOff val="0"/>
-            <a:lumOff val="0"/>
-            <a:alphaOff val="0"/>
-          </a:schemeClr>
+          <a:prstClr val="white">
+            <a:lumMod val="75000"/>
+          </a:prstClr>
         </a:solidFill>
         <a:ln w="19050" cap="flat" cmpd="sng" algn="ctr">
           <a:solidFill>
-            <a:schemeClr val="lt1">
+            <a:prstClr val="white">
               <a:hueOff val="0"/>
               <a:satOff val="0"/>
               <a:lumOff val="0"/>
               <a:alphaOff val="0"/>
-            </a:schemeClr>
+            </a:prstClr>
           </a:solidFill>
           <a:prstDash val="solid"/>
           <a:miter lim="800000"/>
@@ -22311,7 +22489,11 @@
           </a:pPr>
           <a:r>
             <a:rPr lang="en-US" sz="1200" kern="1200" dirty="0">
+              <a:solidFill>
+                <a:prstClr val="white"/>
+              </a:solidFill>
               <a:latin typeface="Arial" panose="020B0604020202020204" pitchFamily="34" charset="0"/>
+              <a:ea typeface="+mn-ea"/>
               <a:cs typeface="Arial" panose="020B0604020202020204" pitchFamily="34" charset="0"/>
             </a:rPr>
             <a:t>Knapsack</a:t>
@@ -31641,7 +31823,7 @@
           <a:p>
             <a:fld id="{B8322ED2-AA20-DC4A-9CA1-814CBB0E7E0D}" type="datetimeFigureOut">
               <a:rPr kumimoji="1" lang="zh-TW" altLang="en-US" smtClean="0"/>
-              <a:t>2026/2/24</a:t>
+              <a:t>2026/5/2</a:t>
             </a:fld>
             <a:endParaRPr kumimoji="1" lang="zh-TW" altLang="en-US"/>
           </a:p>
@@ -31839,7 +32021,7 @@
           <a:p>
             <a:fld id="{B8322ED2-AA20-DC4A-9CA1-814CBB0E7E0D}" type="datetimeFigureOut">
               <a:rPr kumimoji="1" lang="zh-TW" altLang="en-US" smtClean="0"/>
-              <a:t>2026/2/24</a:t>
+              <a:t>2026/5/2</a:t>
             </a:fld>
             <a:endParaRPr kumimoji="1" lang="zh-TW" altLang="en-US"/>
           </a:p>
@@ -32047,7 +32229,7 @@
           <a:p>
             <a:fld id="{B8322ED2-AA20-DC4A-9CA1-814CBB0E7E0D}" type="datetimeFigureOut">
               <a:rPr kumimoji="1" lang="zh-TW" altLang="en-US" smtClean="0"/>
-              <a:t>2026/2/24</a:t>
+              <a:t>2026/5/2</a:t>
             </a:fld>
             <a:endParaRPr kumimoji="1" lang="zh-TW" altLang="en-US"/>
           </a:p>
@@ -32245,7 +32427,7 @@
           <a:p>
             <a:fld id="{B8322ED2-AA20-DC4A-9CA1-814CBB0E7E0D}" type="datetimeFigureOut">
               <a:rPr kumimoji="1" lang="zh-TW" altLang="en-US" smtClean="0"/>
-              <a:t>2026/2/24</a:t>
+              <a:t>2026/5/2</a:t>
             </a:fld>
             <a:endParaRPr kumimoji="1" lang="zh-TW" altLang="en-US"/>
           </a:p>
@@ -32520,7 +32702,7 @@
           <a:p>
             <a:fld id="{B8322ED2-AA20-DC4A-9CA1-814CBB0E7E0D}" type="datetimeFigureOut">
               <a:rPr kumimoji="1" lang="zh-TW" altLang="en-US" smtClean="0"/>
-              <a:t>2026/2/24</a:t>
+              <a:t>2026/5/2</a:t>
             </a:fld>
             <a:endParaRPr kumimoji="1" lang="zh-TW" altLang="en-US"/>
           </a:p>
@@ -32785,7 +32967,7 @@
           <a:p>
             <a:fld id="{B8322ED2-AA20-DC4A-9CA1-814CBB0E7E0D}" type="datetimeFigureOut">
               <a:rPr kumimoji="1" lang="zh-TW" altLang="en-US" smtClean="0"/>
-              <a:t>2026/2/24</a:t>
+              <a:t>2026/5/2</a:t>
             </a:fld>
             <a:endParaRPr kumimoji="1" lang="zh-TW" altLang="en-US"/>
           </a:p>
@@ -33197,7 +33379,7 @@
           <a:p>
             <a:fld id="{B8322ED2-AA20-DC4A-9CA1-814CBB0E7E0D}" type="datetimeFigureOut">
               <a:rPr kumimoji="1" lang="zh-TW" altLang="en-US" smtClean="0"/>
-              <a:t>2026/2/24</a:t>
+              <a:t>2026/5/2</a:t>
             </a:fld>
             <a:endParaRPr kumimoji="1" lang="zh-TW" altLang="en-US"/>
           </a:p>
@@ -33338,7 +33520,7 @@
           <a:p>
             <a:fld id="{B8322ED2-AA20-DC4A-9CA1-814CBB0E7E0D}" type="datetimeFigureOut">
               <a:rPr kumimoji="1" lang="zh-TW" altLang="en-US" smtClean="0"/>
-              <a:t>2026/2/24</a:t>
+              <a:t>2026/5/2</a:t>
             </a:fld>
             <a:endParaRPr kumimoji="1" lang="zh-TW" altLang="en-US"/>
           </a:p>
@@ -33451,7 +33633,7 @@
           <a:p>
             <a:fld id="{B8322ED2-AA20-DC4A-9CA1-814CBB0E7E0D}" type="datetimeFigureOut">
               <a:rPr kumimoji="1" lang="zh-TW" altLang="en-US" smtClean="0"/>
-              <a:t>2026/2/24</a:t>
+              <a:t>2026/5/2</a:t>
             </a:fld>
             <a:endParaRPr kumimoji="1" lang="zh-TW" altLang="en-US"/>
           </a:p>
@@ -33762,7 +33944,7 @@
           <a:p>
             <a:fld id="{B8322ED2-AA20-DC4A-9CA1-814CBB0E7E0D}" type="datetimeFigureOut">
               <a:rPr kumimoji="1" lang="zh-TW" altLang="en-US" smtClean="0"/>
-              <a:t>2026/2/24</a:t>
+              <a:t>2026/5/2</a:t>
             </a:fld>
             <a:endParaRPr kumimoji="1" lang="zh-TW" altLang="en-US"/>
           </a:p>
@@ -34050,7 +34232,7 @@
           <a:p>
             <a:fld id="{B8322ED2-AA20-DC4A-9CA1-814CBB0E7E0D}" type="datetimeFigureOut">
               <a:rPr kumimoji="1" lang="zh-TW" altLang="en-US" smtClean="0"/>
-              <a:t>2026/2/24</a:t>
+              <a:t>2026/5/2</a:t>
             </a:fld>
             <a:endParaRPr kumimoji="1" lang="zh-TW" altLang="en-US"/>
           </a:p>
@@ -34291,7 +34473,7 @@
           <a:p>
             <a:fld id="{B8322ED2-AA20-DC4A-9CA1-814CBB0E7E0D}" type="datetimeFigureOut">
               <a:rPr kumimoji="1" lang="zh-TW" altLang="en-US" smtClean="0"/>
-              <a:t>2026/2/24</a:t>
+              <a:t>2026/5/2</a:t>
             </a:fld>
             <a:endParaRPr kumimoji="1" lang="zh-TW" altLang="en-US"/>
           </a:p>
@@ -35148,7 +35330,7 @@
           <p:nvPr>
             <p:extLst>
               <p:ext uri="{D42A27DB-BD31-4B8C-83A1-F6EECF244321}">
-                <p14:modId xmlns:p14="http://schemas.microsoft.com/office/powerpoint/2010/main" val="1594848979"/>
+                <p14:modId xmlns:p14="http://schemas.microsoft.com/office/powerpoint/2010/main" val="2308954385"/>
               </p:ext>
             </p:extLst>
           </p:nvPr>
@@ -35248,7 +35430,7 @@
             <p:ph idx="1"/>
             <p:extLst>
               <p:ext uri="{D42A27DB-BD31-4B8C-83A1-F6EECF244321}">
-                <p14:modId xmlns:p14="http://schemas.microsoft.com/office/powerpoint/2010/main" val="3566729667"/>
+                <p14:modId xmlns:p14="http://schemas.microsoft.com/office/powerpoint/2010/main" val="2421955634"/>
               </p:ext>
             </p:extLst>
           </p:nvPr>
